--- a/docs/営業改革_山本会長共有資料.pptx
+++ b/docs/営業改革_山本会長共有資料.pptx
@@ -5021,7 +5021,7 @@
                 <a:ea typeface="Yu Gothic"/>
                 <a:cs typeface="Yu Gothic"/>
               </a:rPr>
-              <a:t>推進体制STO（専任2名＋兼務2名）が発足</a:t>
+              <a:t>推進体制STO（専任1名＋兼務3名）が発足</a:t>
             </a:r>
           </a:p>
           <a:p>
@@ -8690,7 +8690,7 @@
                           <a:ea typeface="Yu Gothic"/>
                           <a:cs typeface="Yu Gothic"/>
                         </a:rPr>
-                        <a:t>STO専任2名は90日間、部門業務から切り離しました。評価は改革貢献で新谷が責任を持ちます</a:t>
+                        <a:t>STOの2リードは、専任・兼務それぞれの枠を部門と合意して確保しました。評価は改革貢献で新谷が責任を持ちます</a:t>
                       </a:r>
                     </a:p>
                   </a:txBody>
@@ -8719,7 +8719,7 @@
                           <a:ea typeface="Yu Gothic"/>
                           <a:cs typeface="Yu Gothic"/>
                         </a:rPr>
-                        <a:t>途中で部門都合により専任が崩れそうな場合の後ろ盾</a:t>
+                        <a:t>途中で部門都合により専任・兼務の枠が崩れそうな場合の後ろ盾</a:t>
                       </a:r>
                     </a:p>
                   </a:txBody>

--- a/docs/営業改革_山本会長共有資料.pptx
+++ b/docs/営業改革_山本会長共有資料.pptx
@@ -3104,13 +3104,13 @@
         <p:spPr>
           <a:xfrm>
             <a:off x="0" y="0"/>
-            <a:ext cx="256032" cy="6858000"/>
+            <a:ext cx="12191695" cy="6858000"/>
           </a:xfrm>
           <a:prstGeom prst="rect">
             <a:avLst/>
           </a:prstGeom>
           <a:solidFill>
-            <a:srgbClr val="7823DC"/>
+            <a:srgbClr val="2563EB"/>
           </a:solidFill>
           <a:ln>
             <a:noFill/>
@@ -3141,20 +3141,22 @@
       </p:sp>
       <p:sp>
         <p:nvSpPr>
-          <p:cNvPr id="3" name="Rectangle 2"/>
+          <p:cNvPr id="3" name="Oval 2"/>
           <p:cNvSpPr/>
           <p:nvPr/>
         </p:nvSpPr>
         <p:spPr>
           <a:xfrm>
-            <a:off x="822960" y="1874519"/>
-            <a:ext cx="2011680" cy="38100"/>
-          </a:xfrm>
-          <a:prstGeom prst="rect">
+            <a:off x="8869680" y="-1280160"/>
+            <a:ext cx="4754880" cy="4754880"/>
+          </a:xfrm>
+          <a:prstGeom prst="ellipse">
             <a:avLst/>
           </a:prstGeom>
           <a:solidFill>
-            <a:srgbClr val="7823DC"/>
+            <a:srgbClr val="4F7DEE">
+              <a:alpha val="45000"/>
+            </a:srgbClr>
           </a:solidFill>
           <a:ln>
             <a:noFill/>
@@ -3185,14 +3187,196 @@
       </p:sp>
       <p:sp>
         <p:nvSpPr>
-          <p:cNvPr id="4" name="TextBox 3"/>
+          <p:cNvPr id="4" name="Oval 3"/>
+          <p:cNvSpPr/>
+          <p:nvPr/>
+        </p:nvSpPr>
+        <p:spPr>
+          <a:xfrm>
+            <a:off x="9966960" y="4206240"/>
+            <a:ext cx="3291840" cy="3291840"/>
+          </a:xfrm>
+          <a:prstGeom prst="ellipse">
+            <a:avLst/>
+          </a:prstGeom>
+          <a:noFill/>
+          <a:ln w="17780">
+            <a:solidFill>
+              <a:srgbClr val="FFFFFF">
+                <a:alpha val="22000"/>
+              </a:srgbClr>
+            </a:solidFill>
+          </a:ln>
+          <a:effectLst/>
+        </p:spPr>
+        <p:style>
+          <a:lnRef idx="1">
+            <a:schemeClr val="accent1"/>
+          </a:lnRef>
+          <a:fillRef idx="3">
+            <a:schemeClr val="accent1"/>
+          </a:fillRef>
+          <a:effectRef idx="2">
+            <a:schemeClr val="accent1"/>
+          </a:effectRef>
+          <a:fontRef idx="minor">
+            <a:schemeClr val="lt1"/>
+          </a:fontRef>
+        </p:style>
+        <p:txBody>
+          <a:bodyPr rtlCol="0" anchor="ctr"/>
+          <a:lstStyle/>
+          <a:p>
+            <a:pPr algn="ctr"/>
+          </a:p>
+        </p:txBody>
+      </p:sp>
+      <p:sp>
+        <p:nvSpPr>
+          <p:cNvPr id="5" name="Oval 4"/>
+          <p:cNvSpPr/>
+          <p:nvPr/>
+        </p:nvSpPr>
+        <p:spPr>
+          <a:xfrm>
+            <a:off x="-822960" y="4663440"/>
+            <a:ext cx="2560320" cy="2560320"/>
+          </a:xfrm>
+          <a:prstGeom prst="ellipse">
+            <a:avLst/>
+          </a:prstGeom>
+          <a:noFill/>
+          <a:ln w="15240">
+            <a:solidFill>
+              <a:srgbClr val="FFFFFF">
+                <a:alpha val="16000"/>
+              </a:srgbClr>
+            </a:solidFill>
+          </a:ln>
+          <a:effectLst/>
+        </p:spPr>
+        <p:style>
+          <a:lnRef idx="1">
+            <a:schemeClr val="accent1"/>
+          </a:lnRef>
+          <a:fillRef idx="3">
+            <a:schemeClr val="accent1"/>
+          </a:fillRef>
+          <a:effectRef idx="2">
+            <a:schemeClr val="accent1"/>
+          </a:effectRef>
+          <a:fontRef idx="minor">
+            <a:schemeClr val="lt1"/>
+          </a:fontRef>
+        </p:style>
+        <p:txBody>
+          <a:bodyPr rtlCol="0" anchor="ctr"/>
+          <a:lstStyle/>
+          <a:p>
+            <a:pPr algn="ctr"/>
+          </a:p>
+        </p:txBody>
+      </p:sp>
+      <p:sp>
+        <p:nvSpPr>
+          <p:cNvPr id="6" name="Isosceles Triangle 5"/>
+          <p:cNvSpPr/>
+          <p:nvPr/>
+        </p:nvSpPr>
+        <p:spPr>
+          <a:xfrm rot="1200000">
+            <a:off x="10881360" y="1737360"/>
+            <a:ext cx="1371600" cy="1371600"/>
+          </a:xfrm>
+          <a:prstGeom prst="triangle">
+            <a:avLst/>
+          </a:prstGeom>
+          <a:noFill/>
+          <a:ln w="15240">
+            <a:solidFill>
+              <a:srgbClr val="FFFFFF">
+                <a:alpha val="18000"/>
+              </a:srgbClr>
+            </a:solidFill>
+          </a:ln>
+          <a:effectLst/>
+        </p:spPr>
+        <p:style>
+          <a:lnRef idx="1">
+            <a:schemeClr val="accent1"/>
+          </a:lnRef>
+          <a:fillRef idx="3">
+            <a:schemeClr val="accent1"/>
+          </a:fillRef>
+          <a:effectRef idx="2">
+            <a:schemeClr val="accent1"/>
+          </a:effectRef>
+          <a:fontRef idx="minor">
+            <a:schemeClr val="lt1"/>
+          </a:fontRef>
+        </p:style>
+        <p:txBody>
+          <a:bodyPr rtlCol="0" anchor="ctr"/>
+          <a:lstStyle/>
+          <a:p>
+            <a:pPr algn="ctr"/>
+          </a:p>
+        </p:txBody>
+      </p:sp>
+      <p:sp>
+        <p:nvSpPr>
+          <p:cNvPr id="7" name="Rectangle 6"/>
+          <p:cNvSpPr/>
+          <p:nvPr/>
+        </p:nvSpPr>
+        <p:spPr>
+          <a:xfrm>
+            <a:off x="868680" y="2084831"/>
+            <a:ext cx="603504" cy="38100"/>
+          </a:xfrm>
+          <a:prstGeom prst="rect">
+            <a:avLst/>
+          </a:prstGeom>
+          <a:solidFill>
+            <a:srgbClr val="FFFFFF"/>
+          </a:solidFill>
+          <a:ln>
+            <a:noFill/>
+          </a:ln>
+          <a:effectLst/>
+        </p:spPr>
+        <p:style>
+          <a:lnRef idx="1">
+            <a:schemeClr val="accent1"/>
+          </a:lnRef>
+          <a:fillRef idx="3">
+            <a:schemeClr val="accent1"/>
+          </a:fillRef>
+          <a:effectRef idx="2">
+            <a:schemeClr val="accent1"/>
+          </a:effectRef>
+          <a:fontRef idx="minor">
+            <a:schemeClr val="lt1"/>
+          </a:fontRef>
+        </p:style>
+        <p:txBody>
+          <a:bodyPr rtlCol="0" anchor="ctr"/>
+          <a:lstStyle/>
+          <a:p>
+            <a:pPr algn="ctr"/>
+          </a:p>
+        </p:txBody>
+      </p:sp>
+      <p:sp>
+        <p:nvSpPr>
+          <p:cNvPr id="8" name="TextBox 7"/>
           <p:cNvSpPr txBox="1"/>
           <p:nvPr/>
         </p:nvSpPr>
         <p:spPr>
           <a:xfrm>
-            <a:off x="822960" y="2148840"/>
-            <a:ext cx="10607040" cy="365760"/>
+            <a:off x="868680" y="2249424"/>
+            <a:ext cx="9875520" cy="365760"/>
           </a:xfrm>
           <a:prstGeom prst="rect">
             <a:avLst/>
@@ -3211,9 +3395,9 @@
               </a:spcAft>
             </a:pPr>
             <a:r>
-              <a:rPr sz="1500" b="1" i="0">
-                <a:solidFill>
-                  <a:srgbClr val="5F5F6E"/>
+              <a:rPr sz="1400" b="1" i="0">
+                <a:solidFill>
+                  <a:srgbClr val="BFD4FE"/>
                 </a:solidFill>
                 <a:latin typeface="Yu Gothic"/>
                 <a:ea typeface="Yu Gothic"/>
@@ -3226,14 +3410,14 @@
       </p:sp>
       <p:sp>
         <p:nvSpPr>
-          <p:cNvPr id="5" name="TextBox 4"/>
+          <p:cNvPr id="9" name="TextBox 8"/>
           <p:cNvSpPr txBox="1"/>
           <p:nvPr/>
         </p:nvSpPr>
         <p:spPr>
           <a:xfrm>
-            <a:off x="822960" y="2697480"/>
-            <a:ext cx="10698480" cy="1554480"/>
+            <a:off x="822960" y="2788920"/>
+            <a:ext cx="10607040" cy="1920240"/>
           </a:xfrm>
           <a:prstGeom prst="rect">
             <a:avLst/>
@@ -3252,9 +3436,9 @@
               </a:spcAft>
             </a:pPr>
             <a:r>
-              <a:rPr sz="4000" b="1" i="0">
-                <a:solidFill>
-                  <a:srgbClr val="262630"/>
+              <a:rPr sz="3800" b="1" i="0">
+                <a:solidFill>
+                  <a:srgbClr val="FFFFFF"/>
                 </a:solidFill>
                 <a:latin typeface="Yu Gothic"/>
                 <a:ea typeface="Yu Gothic"/>
@@ -3263,6 +3447,88 @@
               <a:t>営業改革</a:t>
             </a:r>
           </a:p>
+        </p:txBody>
+      </p:sp>
+      <p:sp>
+        <p:nvSpPr>
+          <p:cNvPr id="10" name="TextBox 9"/>
+          <p:cNvSpPr txBox="1"/>
+          <p:nvPr/>
+        </p:nvSpPr>
+        <p:spPr>
+          <a:xfrm>
+            <a:off x="868680" y="3666744"/>
+            <a:ext cx="10424160" cy="548640"/>
+          </a:xfrm>
+          <a:prstGeom prst="rect">
+            <a:avLst/>
+          </a:prstGeom>
+          <a:noFill/>
+        </p:spPr>
+        <p:txBody>
+          <a:bodyPr wrap="square" lIns="0" rIns="0" tIns="0" bIns="0">
+            <a:spAutoFit/>
+          </a:bodyPr>
+          <a:lstStyle/>
+          <a:p>
+            <a:pPr algn="l">
+              <a:spcAft>
+                <a:spcPts val="400"/>
+              </a:spcAft>
+            </a:pPr>
+            <a:r>
+              <a:rPr sz="1700" b="1" i="0">
+                <a:solidFill>
+                  <a:srgbClr val="BFD4FE"/>
+                </a:solidFill>
+                <a:latin typeface="Yu Gothic"/>
+                <a:ea typeface="Yu Gothic"/>
+                <a:cs typeface="Yu Gothic"/>
+              </a:rPr>
+              <a:t>点検会議の設計と重要論点のご相談</a:t>
+            </a:r>
+          </a:p>
+        </p:txBody>
+      </p:sp>
+      <p:sp>
+        <p:nvSpPr>
+          <p:cNvPr id="11" name="TextBox 10"/>
+          <p:cNvSpPr txBox="1"/>
+          <p:nvPr/>
+        </p:nvSpPr>
+        <p:spPr>
+          <a:xfrm>
+            <a:off x="868680" y="5806440"/>
+            <a:ext cx="10424160" cy="822960"/>
+          </a:xfrm>
+          <a:prstGeom prst="rect">
+            <a:avLst/>
+          </a:prstGeom>
+          <a:noFill/>
+        </p:spPr>
+        <p:txBody>
+          <a:bodyPr wrap="square" lIns="0" rIns="0" tIns="0" bIns="0">
+            <a:spAutoFit/>
+          </a:bodyPr>
+          <a:lstStyle/>
+          <a:p>
+            <a:pPr algn="l">
+              <a:spcAft>
+                <a:spcPts val="300"/>
+              </a:spcAft>
+            </a:pPr>
+            <a:r>
+              <a:rPr sz="1200" b="1" i="0">
+                <a:solidFill>
+                  <a:srgbClr val="FFFFFF"/>
+                </a:solidFill>
+                <a:latin typeface="Yu Gothic"/>
+                <a:ea typeface="Yu Gothic"/>
+                <a:cs typeface="Yu Gothic"/>
+              </a:rPr>
+              <a:t>新谷隼人（専務執行役員）</a:t>
+            </a:r>
+          </a:p>
           <a:p>
             <a:pPr algn="l">
               <a:spcAft>
@@ -3270,68 +3536,9 @@
               </a:spcAft>
             </a:pPr>
             <a:r>
-              <a:rPr sz="2200" b="1" i="0">
-                <a:solidFill>
-                  <a:srgbClr val="7823DC"/>
-                </a:solidFill>
-                <a:latin typeface="Yu Gothic"/>
-                <a:ea typeface="Yu Gothic"/>
-                <a:cs typeface="Yu Gothic"/>
-              </a:rPr>
-              <a:t>点検会議の設計と重要論点のご相談</a:t>
-            </a:r>
-          </a:p>
-        </p:txBody>
-      </p:sp>
-      <p:sp>
-        <p:nvSpPr>
-          <p:cNvPr id="6" name="TextBox 5"/>
-          <p:cNvSpPr txBox="1"/>
-          <p:nvPr/>
-        </p:nvSpPr>
-        <p:spPr>
-          <a:xfrm>
-            <a:off x="822960" y="4800600"/>
-            <a:ext cx="10515600" cy="914400"/>
-          </a:xfrm>
-          <a:prstGeom prst="rect">
-            <a:avLst/>
-          </a:prstGeom>
-          <a:noFill/>
-        </p:spPr>
-        <p:txBody>
-          <a:bodyPr wrap="square" lIns="0" rIns="0" tIns="0" bIns="0">
-            <a:spAutoFit/>
-          </a:bodyPr>
-          <a:lstStyle/>
-          <a:p>
-            <a:pPr algn="l">
-              <a:spcAft>
-                <a:spcPts val="400"/>
-              </a:spcAft>
-            </a:pPr>
-            <a:r>
-              <a:rPr sz="1300" b="1" i="0">
-                <a:solidFill>
-                  <a:srgbClr val="262630"/>
-                </a:solidFill>
-                <a:latin typeface="Yu Gothic"/>
-                <a:ea typeface="Yu Gothic"/>
-                <a:cs typeface="Yu Gothic"/>
-              </a:rPr>
-              <a:t>新谷隼人（専務執行役員）</a:t>
-            </a:r>
-          </a:p>
-          <a:p>
-            <a:pPr algn="l">
-              <a:spcAft>
-                <a:spcPts val="0"/>
-              </a:spcAft>
-            </a:pPr>
-            <a:r>
-              <a:rPr sz="1200" b="0" i="0">
-                <a:solidFill>
-                  <a:srgbClr val="5F5F6E"/>
+              <a:rPr sz="1000" b="0" i="0">
+                <a:solidFill>
+                  <a:srgbClr val="BFD4FE"/>
                 </a:solidFill>
                 <a:latin typeface="Yu Gothic"/>
                 <a:ea typeface="Yu Gothic"/>
@@ -3362,14 +3569,160 @@
       <p:grpSpPr/>
       <p:sp>
         <p:nvSpPr>
-          <p:cNvPr id="2" name="TextBox 1"/>
+          <p:cNvPr id="2" name="Rounded Rectangle 1"/>
+          <p:cNvSpPr/>
+          <p:nvPr/>
+        </p:nvSpPr>
+        <p:spPr>
+          <a:xfrm>
+            <a:off x="502920" y="274320"/>
+            <a:ext cx="1005840" cy="274320"/>
+          </a:xfrm>
+          <a:prstGeom prst="roundRect">
+            <a:avLst>
+              <a:gd name="adj" fmla="val 50000"/>
+            </a:avLst>
+          </a:prstGeom>
+          <a:solidFill>
+            <a:srgbClr val="EAF1FE"/>
+          </a:solidFill>
+          <a:ln>
+            <a:noFill/>
+          </a:ln>
+          <a:effectLst/>
+        </p:spPr>
+        <p:style>
+          <a:lnRef idx="1">
+            <a:schemeClr val="accent1"/>
+          </a:lnRef>
+          <a:fillRef idx="3">
+            <a:schemeClr val="accent1"/>
+          </a:fillRef>
+          <a:effectRef idx="2">
+            <a:schemeClr val="accent1"/>
+          </a:effectRef>
+          <a:fontRef idx="minor">
+            <a:schemeClr val="lt1"/>
+          </a:fontRef>
+        </p:style>
+        <p:txBody>
+          <a:bodyPr rtlCol="0" anchor="ctr" wrap="none" lIns="109728" rIns="109728" tIns="0" bIns="0"/>
+          <a:lstStyle/>
+          <a:p>
+            <a:pPr algn="l">
+              <a:spcAft>
+                <a:spcPts val="0"/>
+              </a:spcAft>
+            </a:pPr>
+            <a:r>
+              <a:rPr sz="900" b="1" i="0">
+                <a:solidFill>
+                  <a:srgbClr val="2563EB"/>
+                </a:solidFill>
+                <a:latin typeface="Yu Gothic"/>
+                <a:ea typeface="Yu Gothic"/>
+                <a:cs typeface="Yu Gothic"/>
+              </a:rPr>
+              <a:t>AGENDA</a:t>
+            </a:r>
+          </a:p>
+        </p:txBody>
+      </p:sp>
+      <p:sp>
+        <p:nvSpPr>
+          <p:cNvPr id="3" name="TextBox 2"/>
           <p:cNvSpPr txBox="1"/>
           <p:nvPr/>
         </p:nvSpPr>
         <p:spPr>
           <a:xfrm>
-            <a:off x="502920" y="256032"/>
-            <a:ext cx="11155680" cy="256032"/>
+            <a:off x="502920" y="566928"/>
+            <a:ext cx="11155680" cy="804672"/>
+          </a:xfrm>
+          <a:prstGeom prst="rect">
+            <a:avLst/>
+          </a:prstGeom>
+          <a:noFill/>
+        </p:spPr>
+        <p:txBody>
+          <a:bodyPr wrap="square" lIns="0" rIns="0" tIns="0" bIns="0">
+            <a:spAutoFit/>
+          </a:bodyPr>
+          <a:lstStyle/>
+          <a:p>
+            <a:pPr algn="l">
+              <a:spcAft>
+                <a:spcPts val="0"/>
+              </a:spcAft>
+            </a:pPr>
+            <a:r>
+              <a:rPr sz="1800" b="1" i="0">
+                <a:solidFill>
+                  <a:srgbClr val="1B1B26"/>
+                </a:solidFill>
+                <a:latin typeface="Yu Gothic"/>
+                <a:ea typeface="Yu Gothic"/>
+                <a:cs typeface="Yu Gothic"/>
+              </a:rPr>
+              <a:t>本日お話ししたいこと</a:t>
+            </a:r>
+          </a:p>
+        </p:txBody>
+      </p:sp>
+      <p:sp>
+        <p:nvSpPr>
+          <p:cNvPr id="4" name="Rectangle 3"/>
+          <p:cNvSpPr/>
+          <p:nvPr/>
+        </p:nvSpPr>
+        <p:spPr>
+          <a:xfrm>
+            <a:off x="502920" y="1335024"/>
+            <a:ext cx="11183112" cy="11430"/>
+          </a:xfrm>
+          <a:prstGeom prst="rect">
+            <a:avLst/>
+          </a:prstGeom>
+          <a:solidFill>
+            <a:srgbClr val="E5E7EB"/>
+          </a:solidFill>
+          <a:ln>
+            <a:noFill/>
+          </a:ln>
+          <a:effectLst/>
+        </p:spPr>
+        <p:style>
+          <a:lnRef idx="1">
+            <a:schemeClr val="accent1"/>
+          </a:lnRef>
+          <a:fillRef idx="3">
+            <a:schemeClr val="accent1"/>
+          </a:fillRef>
+          <a:effectRef idx="2">
+            <a:schemeClr val="accent1"/>
+          </a:effectRef>
+          <a:fontRef idx="minor">
+            <a:schemeClr val="lt1"/>
+          </a:fontRef>
+        </p:style>
+        <p:txBody>
+          <a:bodyPr rtlCol="0" anchor="ctr"/>
+          <a:lstStyle/>
+          <a:p>
+            <a:pPr algn="ctr"/>
+          </a:p>
+        </p:txBody>
+      </p:sp>
+      <p:sp>
+        <p:nvSpPr>
+          <p:cNvPr id="5" name="TextBox 4"/>
+          <p:cNvSpPr txBox="1"/>
+          <p:nvPr/>
+        </p:nvSpPr>
+        <p:spPr>
+          <a:xfrm>
+            <a:off x="502920" y="1481328"/>
+            <a:ext cx="11155680" cy="310896"/>
           </a:xfrm>
           <a:prstGeom prst="rect">
             <a:avLst/>
@@ -3388,29 +3741,178 @@
               </a:spcAft>
             </a:pPr>
             <a:r>
-              <a:rPr sz="1000" b="1" i="0">
-                <a:solidFill>
-                  <a:srgbClr val="7823DC"/>
+              <a:rPr sz="1150" b="1" i="0">
+                <a:solidFill>
+                  <a:srgbClr val="2563EB"/>
                 </a:solidFill>
                 <a:latin typeface="Yu Gothic"/>
                 <a:ea typeface="Yu Gothic"/>
                 <a:cs typeface="Yu Gothic"/>
               </a:rPr>
-              <a:t>AGENDA</a:t>
-            </a:r>
-          </a:p>
-        </p:txBody>
-      </p:sp>
-      <p:sp>
-        <p:nvSpPr>
-          <p:cNvPr id="3" name="TextBox 2"/>
+              <a:t>3つのテーマで、あわせて30分ほどお時間をいただきます</a:t>
+            </a:r>
+          </a:p>
+        </p:txBody>
+      </p:sp>
+      <p:sp>
+        <p:nvSpPr>
+          <p:cNvPr id="6" name="Rectangle 5"/>
+          <p:cNvSpPr/>
+          <p:nvPr/>
+        </p:nvSpPr>
+        <p:spPr>
+          <a:xfrm>
+            <a:off x="502920" y="2084831"/>
+            <a:ext cx="11183112" cy="1060704"/>
+          </a:xfrm>
+          <a:prstGeom prst="rect">
+            <a:avLst/>
+          </a:prstGeom>
+          <a:solidFill>
+            <a:srgbClr val="FFFFFF"/>
+          </a:solidFill>
+          <a:ln w="9525">
+            <a:solidFill>
+              <a:srgbClr val="E5E7EB"/>
+            </a:solidFill>
+          </a:ln>
+          <a:effectLst/>
+        </p:spPr>
+        <p:style>
+          <a:lnRef idx="1">
+            <a:schemeClr val="accent1"/>
+          </a:lnRef>
+          <a:fillRef idx="3">
+            <a:schemeClr val="accent1"/>
+          </a:fillRef>
+          <a:effectRef idx="2">
+            <a:schemeClr val="accent1"/>
+          </a:effectRef>
+          <a:fontRef idx="minor">
+            <a:schemeClr val="lt1"/>
+          </a:fontRef>
+        </p:style>
+        <p:txBody>
+          <a:bodyPr rtlCol="0" anchor="ctr"/>
+          <a:lstStyle/>
+          <a:p>
+            <a:pPr algn="ctr"/>
+          </a:p>
+        </p:txBody>
+      </p:sp>
+      <p:sp>
+        <p:nvSpPr>
+          <p:cNvPr id="7" name="Rectangle 6"/>
+          <p:cNvSpPr/>
+          <p:nvPr/>
+        </p:nvSpPr>
+        <p:spPr>
+          <a:xfrm>
+            <a:off x="502920" y="2084831"/>
+            <a:ext cx="64008" cy="1060704"/>
+          </a:xfrm>
+          <a:prstGeom prst="rect">
+            <a:avLst/>
+          </a:prstGeom>
+          <a:solidFill>
+            <a:srgbClr val="2563EB"/>
+          </a:solidFill>
+          <a:ln>
+            <a:noFill/>
+          </a:ln>
+          <a:effectLst/>
+        </p:spPr>
+        <p:style>
+          <a:lnRef idx="1">
+            <a:schemeClr val="accent1"/>
+          </a:lnRef>
+          <a:fillRef idx="3">
+            <a:schemeClr val="accent1"/>
+          </a:fillRef>
+          <a:effectRef idx="2">
+            <a:schemeClr val="accent1"/>
+          </a:effectRef>
+          <a:fontRef idx="minor">
+            <a:schemeClr val="lt1"/>
+          </a:fontRef>
+        </p:style>
+        <p:txBody>
+          <a:bodyPr rtlCol="0" anchor="ctr"/>
+          <a:lstStyle/>
+          <a:p>
+            <a:pPr algn="ctr"/>
+          </a:p>
+        </p:txBody>
+      </p:sp>
+      <p:sp>
+        <p:nvSpPr>
+          <p:cNvPr id="8" name="Oval 7"/>
+          <p:cNvSpPr/>
+          <p:nvPr/>
+        </p:nvSpPr>
+        <p:spPr>
+          <a:xfrm>
+            <a:off x="704088" y="2285999"/>
+            <a:ext cx="457200" cy="457200"/>
+          </a:xfrm>
+          <a:prstGeom prst="ellipse">
+            <a:avLst/>
+          </a:prstGeom>
+          <a:solidFill>
+            <a:srgbClr val="2563EB"/>
+          </a:solidFill>
+          <a:ln>
+            <a:noFill/>
+          </a:ln>
+          <a:effectLst/>
+        </p:spPr>
+        <p:style>
+          <a:lnRef idx="1">
+            <a:schemeClr val="accent1"/>
+          </a:lnRef>
+          <a:fillRef idx="3">
+            <a:schemeClr val="accent1"/>
+          </a:fillRef>
+          <a:effectRef idx="2">
+            <a:schemeClr val="accent1"/>
+          </a:effectRef>
+          <a:fontRef idx="minor">
+            <a:schemeClr val="lt1"/>
+          </a:fontRef>
+        </p:style>
+        <p:txBody>
+          <a:bodyPr rtlCol="0" anchor="ctr" wrap="none" lIns="0" rIns="0" tIns="0" bIns="0"/>
+          <a:lstStyle/>
+          <a:p>
+            <a:pPr algn="ctr">
+              <a:spcAft>
+                <a:spcPts val="0"/>
+              </a:spcAft>
+            </a:pPr>
+            <a:r>
+              <a:rPr sz="1800" b="1" i="0">
+                <a:solidFill>
+                  <a:srgbClr val="FFFFFF"/>
+                </a:solidFill>
+                <a:latin typeface="Yu Gothic"/>
+                <a:ea typeface="Yu Gothic"/>
+                <a:cs typeface="Yu Gothic"/>
+              </a:rPr>
+              <a:t>1</a:t>
+            </a:r>
+          </a:p>
+        </p:txBody>
+      </p:sp>
+      <p:sp>
+        <p:nvSpPr>
+          <p:cNvPr id="9" name="TextBox 8"/>
           <p:cNvSpPr txBox="1"/>
           <p:nvPr/>
         </p:nvSpPr>
         <p:spPr>
           <a:xfrm>
-            <a:off x="502920" y="512064"/>
-            <a:ext cx="11155680" cy="868680"/>
+            <a:off x="1344168" y="2249423"/>
+            <a:ext cx="10158984" cy="786384"/>
           </a:xfrm>
           <a:prstGeom prst="rect">
             <a:avLst/>
@@ -3418,10 +3920,28 @@
           <a:noFill/>
         </p:spPr>
         <p:txBody>
-          <a:bodyPr wrap="square" lIns="0" rIns="0" tIns="0" bIns="0">
+          <a:bodyPr wrap="square" lIns="0" rIns="0" tIns="0" bIns="0" anchor="ctr">
             <a:spAutoFit/>
           </a:bodyPr>
           <a:lstStyle/>
+          <a:p>
+            <a:pPr algn="l">
+              <a:spcAft>
+                <a:spcPts val="400"/>
+              </a:spcAft>
+            </a:pPr>
+            <a:r>
+              <a:rPr sz="1300" b="1" i="0">
+                <a:solidFill>
+                  <a:srgbClr val="1E40AF"/>
+                </a:solidFill>
+                <a:latin typeface="Yu Gothic"/>
+                <a:ea typeface="Yu Gothic"/>
+                <a:cs typeface="Yu Gothic"/>
+              </a:rPr>
+              <a:t>改革の現在地</a:t>
+            </a:r>
+          </a:p>
           <a:p>
             <a:pPr algn="l">
               <a:spcAft>
@@ -3429,35 +3949,81 @@
               </a:spcAft>
             </a:pPr>
             <a:r>
-              <a:rPr sz="1900" b="1" i="0">
-                <a:solidFill>
-                  <a:srgbClr val="262630"/>
+              <a:rPr sz="1050" b="0" i="0">
+                <a:solidFill>
+                  <a:srgbClr val="1B1B26"/>
                 </a:solidFill>
                 <a:latin typeface="Yu Gothic"/>
                 <a:ea typeface="Yu Gothic"/>
                 <a:cs typeface="Yu Gothic"/>
               </a:rPr>
-              <a:t>本日お話ししたいこと</a:t>
-            </a:r>
-          </a:p>
-        </p:txBody>
-      </p:sp>
-      <p:sp>
-        <p:nvSpPr>
-          <p:cNvPr id="4" name="Rectangle 3"/>
+              <a:t>なぜ今やるのか、どこまで進んだか（5分）</a:t>
+            </a:r>
+          </a:p>
+        </p:txBody>
+      </p:sp>
+      <p:sp>
+        <p:nvSpPr>
+          <p:cNvPr id="10" name="Rectangle 9"/>
           <p:cNvSpPr/>
           <p:nvPr/>
         </p:nvSpPr>
         <p:spPr>
           <a:xfrm>
-            <a:off x="502920" y="1389888"/>
-            <a:ext cx="1463040" cy="33020"/>
+            <a:off x="502920" y="3346703"/>
+            <a:ext cx="11183112" cy="1060704"/>
           </a:xfrm>
           <a:prstGeom prst="rect">
             <a:avLst/>
           </a:prstGeom>
           <a:solidFill>
-            <a:srgbClr val="7823DC"/>
+            <a:srgbClr val="FFFFFF"/>
+          </a:solidFill>
+          <a:ln w="9525">
+            <a:solidFill>
+              <a:srgbClr val="E5E7EB"/>
+            </a:solidFill>
+          </a:ln>
+          <a:effectLst/>
+        </p:spPr>
+        <p:style>
+          <a:lnRef idx="1">
+            <a:schemeClr val="accent1"/>
+          </a:lnRef>
+          <a:fillRef idx="3">
+            <a:schemeClr val="accent1"/>
+          </a:fillRef>
+          <a:effectRef idx="2">
+            <a:schemeClr val="accent1"/>
+          </a:effectRef>
+          <a:fontRef idx="minor">
+            <a:schemeClr val="lt1"/>
+          </a:fontRef>
+        </p:style>
+        <p:txBody>
+          <a:bodyPr rtlCol="0" anchor="ctr"/>
+          <a:lstStyle/>
+          <a:p>
+            <a:pPr algn="ctr"/>
+          </a:p>
+        </p:txBody>
+      </p:sp>
+      <p:sp>
+        <p:nvSpPr>
+          <p:cNvPr id="11" name="Rectangle 10"/>
+          <p:cNvSpPr/>
+          <p:nvPr/>
+        </p:nvSpPr>
+        <p:spPr>
+          <a:xfrm>
+            <a:off x="502920" y="3346703"/>
+            <a:ext cx="64008" cy="1060704"/>
+          </a:xfrm>
+          <a:prstGeom prst="rect">
+            <a:avLst/>
+          </a:prstGeom>
+          <a:solidFill>
+            <a:srgbClr val="2563EB"/>
           </a:solidFill>
           <a:ln>
             <a:noFill/>
@@ -3488,14 +4054,73 @@
       </p:sp>
       <p:sp>
         <p:nvSpPr>
-          <p:cNvPr id="5" name="TextBox 4"/>
+          <p:cNvPr id="12" name="Oval 11"/>
+          <p:cNvSpPr/>
+          <p:nvPr/>
+        </p:nvSpPr>
+        <p:spPr>
+          <a:xfrm>
+            <a:off x="704088" y="3547871"/>
+            <a:ext cx="457200" cy="457200"/>
+          </a:xfrm>
+          <a:prstGeom prst="ellipse">
+            <a:avLst/>
+          </a:prstGeom>
+          <a:solidFill>
+            <a:srgbClr val="2563EB"/>
+          </a:solidFill>
+          <a:ln>
+            <a:noFill/>
+          </a:ln>
+          <a:effectLst/>
+        </p:spPr>
+        <p:style>
+          <a:lnRef idx="1">
+            <a:schemeClr val="accent1"/>
+          </a:lnRef>
+          <a:fillRef idx="3">
+            <a:schemeClr val="accent1"/>
+          </a:fillRef>
+          <a:effectRef idx="2">
+            <a:schemeClr val="accent1"/>
+          </a:effectRef>
+          <a:fontRef idx="minor">
+            <a:schemeClr val="lt1"/>
+          </a:fontRef>
+        </p:style>
+        <p:txBody>
+          <a:bodyPr rtlCol="0" anchor="ctr" wrap="none" lIns="0" rIns="0" tIns="0" bIns="0"/>
+          <a:lstStyle/>
+          <a:p>
+            <a:pPr algn="ctr">
+              <a:spcAft>
+                <a:spcPts val="0"/>
+              </a:spcAft>
+            </a:pPr>
+            <a:r>
+              <a:rPr sz="1800" b="1" i="0">
+                <a:solidFill>
+                  <a:srgbClr val="FFFFFF"/>
+                </a:solidFill>
+                <a:latin typeface="Yu Gothic"/>
+                <a:ea typeface="Yu Gothic"/>
+                <a:cs typeface="Yu Gothic"/>
+              </a:rPr>
+              <a:t>2</a:t>
+            </a:r>
+          </a:p>
+        </p:txBody>
+      </p:sp>
+      <p:sp>
+        <p:nvSpPr>
+          <p:cNvPr id="13" name="TextBox 12"/>
           <p:cNvSpPr txBox="1"/>
           <p:nvPr/>
         </p:nvSpPr>
         <p:spPr>
           <a:xfrm>
-            <a:off x="502920" y="1517904"/>
-            <a:ext cx="11155680" cy="310896"/>
+            <a:off x="1344168" y="3511295"/>
+            <a:ext cx="10158984" cy="786384"/>
           </a:xfrm>
           <a:prstGeom prst="rect">
             <a:avLst/>
@@ -3503,7 +4128,7 @@
           <a:noFill/>
         </p:spPr>
         <p:txBody>
-          <a:bodyPr wrap="square" lIns="0" rIns="0" tIns="0" bIns="0">
+          <a:bodyPr wrap="square" lIns="0" rIns="0" tIns="0" bIns="0" anchor="ctr">
             <a:spAutoFit/>
           </a:bodyPr>
           <a:lstStyle/>
@@ -3514,28 +4139,46 @@
               </a:spcAft>
             </a:pPr>
             <a:r>
-              <a:rPr sz="1150" b="1" i="0">
-                <a:solidFill>
-                  <a:srgbClr val="3A106E"/>
+              <a:rPr sz="1300" b="1" i="0">
+                <a:solidFill>
+                  <a:srgbClr val="1E40AF"/>
                 </a:solidFill>
                 <a:latin typeface="Yu Gothic"/>
                 <a:ea typeface="Yu Gothic"/>
                 <a:cs typeface="Yu Gothic"/>
               </a:rPr>
-              <a:t>3つのテーマで、あわせて30分ほどお時間をいただきます</a:t>
-            </a:r>
-          </a:p>
-        </p:txBody>
-      </p:sp>
-      <p:sp>
-        <p:nvSpPr>
-          <p:cNvPr id="6" name="Rectangle 5"/>
+              <a:t>点検会議の設計</a:t>
+            </a:r>
+          </a:p>
+          <a:p>
+            <a:pPr algn="l">
+              <a:spcAft>
+                <a:spcPts val="0"/>
+              </a:spcAft>
+            </a:pPr>
+            <a:r>
+              <a:rPr sz="1050" b="0" i="0">
+                <a:solidFill>
+                  <a:srgbClr val="1B1B26"/>
+                </a:solidFill>
+                <a:latin typeface="Yu Gothic"/>
+                <a:ea typeface="Yu Gothic"/>
+                <a:cs typeface="Yu Gothic"/>
+              </a:rPr>
+              <a:t>会長にお願いしたい役割（10分）</a:t>
+            </a:r>
+          </a:p>
+        </p:txBody>
+      </p:sp>
+      <p:sp>
+        <p:nvSpPr>
+          <p:cNvPr id="14" name="Rectangle 13"/>
           <p:cNvSpPr/>
           <p:nvPr/>
         </p:nvSpPr>
         <p:spPr>
           <a:xfrm>
-            <a:off x="502920" y="2084831"/>
+            <a:off x="502920" y="4608575"/>
             <a:ext cx="11183112" cy="1060704"/>
           </a:xfrm>
           <a:prstGeom prst="rect">
@@ -3546,7 +4189,7 @@
           </a:solidFill>
           <a:ln w="9525">
             <a:solidFill>
-              <a:srgbClr val="D9D9E0"/>
+              <a:srgbClr val="E5E7EB"/>
             </a:solidFill>
           </a:ln>
           <a:effectLst/>
@@ -3575,20 +4218,20 @@
       </p:sp>
       <p:sp>
         <p:nvSpPr>
-          <p:cNvPr id="7" name="Rectangle 6"/>
+          <p:cNvPr id="15" name="Rectangle 14"/>
           <p:cNvSpPr/>
           <p:nvPr/>
         </p:nvSpPr>
         <p:spPr>
           <a:xfrm>
-            <a:off x="502920" y="2084831"/>
+            <a:off x="502920" y="4608575"/>
             <a:ext cx="64008" cy="1060704"/>
           </a:xfrm>
           <a:prstGeom prst="rect">
             <a:avLst/>
           </a:prstGeom>
           <a:solidFill>
-            <a:srgbClr val="7823DC"/>
+            <a:srgbClr val="2563EB"/>
           </a:solidFill>
           <a:ln>
             <a:noFill/>
@@ -3619,20 +4262,20 @@
       </p:sp>
       <p:sp>
         <p:nvSpPr>
-          <p:cNvPr id="8" name="Oval 7"/>
+          <p:cNvPr id="16" name="Oval 15"/>
           <p:cNvSpPr/>
           <p:nvPr/>
         </p:nvSpPr>
         <p:spPr>
           <a:xfrm>
-            <a:off x="704088" y="2285999"/>
+            <a:off x="704088" y="4809743"/>
             <a:ext cx="457200" cy="457200"/>
           </a:xfrm>
           <a:prstGeom prst="ellipse">
             <a:avLst/>
           </a:prstGeom>
           <a:solidFill>
-            <a:srgbClr val="7823DC"/>
+            <a:srgbClr val="2563EB"/>
           </a:solidFill>
           <a:ln>
             <a:noFill/>
@@ -3671,20 +4314,20 @@
                 <a:ea typeface="Yu Gothic"/>
                 <a:cs typeface="Yu Gothic"/>
               </a:rPr>
-              <a:t>1</a:t>
-            </a:r>
-          </a:p>
-        </p:txBody>
-      </p:sp>
-      <p:sp>
-        <p:nvSpPr>
-          <p:cNvPr id="9" name="TextBox 8"/>
+              <a:t>3</a:t>
+            </a:r>
+          </a:p>
+        </p:txBody>
+      </p:sp>
+      <p:sp>
+        <p:nvSpPr>
+          <p:cNvPr id="17" name="TextBox 16"/>
           <p:cNvSpPr txBox="1"/>
           <p:nvPr/>
         </p:nvSpPr>
         <p:spPr>
           <a:xfrm>
-            <a:off x="1344168" y="2249423"/>
+            <a:off x="1344168" y="4773167"/>
             <a:ext cx="10158984" cy="786384"/>
           </a:xfrm>
           <a:prstGeom prst="rect">
@@ -3706,13 +4349,13 @@
             <a:r>
               <a:rPr sz="1300" b="1" i="0">
                 <a:solidFill>
-                  <a:srgbClr val="3A106E"/>
+                  <a:srgbClr val="1E40AF"/>
                 </a:solidFill>
                 <a:latin typeface="Yu Gothic"/>
                 <a:ea typeface="Yu Gothic"/>
                 <a:cs typeface="Yu Gothic"/>
               </a:rPr>
-              <a:t>改革の現在地</a:t>
+              <a:t>重要論点の先出し</a:t>
             </a:r>
           </a:p>
           <a:p>
@@ -3724,38 +4367,36 @@
             <a:r>
               <a:rPr sz="1050" b="0" i="0">
                 <a:solidFill>
-                  <a:srgbClr val="262630"/>
+                  <a:srgbClr val="1B1B26"/>
                 </a:solidFill>
                 <a:latin typeface="Yu Gothic"/>
                 <a:ea typeface="Yu Gothic"/>
                 <a:cs typeface="Yu Gothic"/>
               </a:rPr>
-              <a:t>なぜ今やるのか、どこまで進んだか（5分）</a:t>
-            </a:r>
-          </a:p>
-        </p:txBody>
-      </p:sp>
-      <p:sp>
-        <p:nvSpPr>
-          <p:cNvPr id="10" name="Rectangle 9"/>
+              <a:t>初回点検会議までにご相談したいこと（15分）</a:t>
+            </a:r>
+          </a:p>
+        </p:txBody>
+      </p:sp>
+      <p:sp>
+        <p:nvSpPr>
+          <p:cNvPr id="18" name="Rectangle 17"/>
           <p:cNvSpPr/>
           <p:nvPr/>
         </p:nvSpPr>
         <p:spPr>
           <a:xfrm>
-            <a:off x="502920" y="3346703"/>
-            <a:ext cx="11183112" cy="1060704"/>
+            <a:off x="502920" y="5870448"/>
+            <a:ext cx="11183112" cy="548640"/>
           </a:xfrm>
           <a:prstGeom prst="rect">
             <a:avLst/>
           </a:prstGeom>
           <a:solidFill>
-            <a:srgbClr val="FFFFFF"/>
+            <a:srgbClr val="EAF1FE"/>
           </a:solidFill>
-          <a:ln w="9525">
-            <a:solidFill>
-              <a:srgbClr val="D9D9E0"/>
-            </a:solidFill>
+          <a:ln>
+            <a:noFill/>
           </a:ln>
           <a:effectLst/>
         </p:spPr>
@@ -3783,20 +4424,20 @@
       </p:sp>
       <p:sp>
         <p:nvSpPr>
-          <p:cNvPr id="11" name="Rectangle 10"/>
+          <p:cNvPr id="19" name="Rectangle 18"/>
           <p:cNvSpPr/>
           <p:nvPr/>
         </p:nvSpPr>
         <p:spPr>
           <a:xfrm>
-            <a:off x="502920" y="3346703"/>
-            <a:ext cx="64008" cy="1060704"/>
+            <a:off x="502920" y="5870448"/>
+            <a:ext cx="38100" cy="548640"/>
           </a:xfrm>
           <a:prstGeom prst="rect">
             <a:avLst/>
           </a:prstGeom>
           <a:solidFill>
-            <a:srgbClr val="7823DC"/>
+            <a:srgbClr val="2563EB"/>
           </a:solidFill>
           <a:ln>
             <a:noFill/>
@@ -3827,20 +4468,61 @@
       </p:sp>
       <p:sp>
         <p:nvSpPr>
-          <p:cNvPr id="12" name="Oval 11"/>
+          <p:cNvPr id="20" name="TextBox 19"/>
+          <p:cNvSpPr txBox="1"/>
+          <p:nvPr/>
+        </p:nvSpPr>
+        <p:spPr>
+          <a:xfrm>
+            <a:off x="685800" y="5934456"/>
+            <a:ext cx="10881360" cy="438912"/>
+          </a:xfrm>
+          <a:prstGeom prst="rect">
+            <a:avLst/>
+          </a:prstGeom>
+          <a:noFill/>
+        </p:spPr>
+        <p:txBody>
+          <a:bodyPr wrap="square" lIns="0" rIns="0" tIns="0" bIns="0" anchor="ctr">
+            <a:spAutoFit/>
+          </a:bodyPr>
+          <a:lstStyle/>
+          <a:p>
+            <a:pPr algn="l">
+              <a:spcAft>
+                <a:spcPts val="0"/>
+              </a:spcAft>
+            </a:pPr>
+            <a:r>
+              <a:rPr sz="1050" b="1" i="0">
+                <a:solidFill>
+                  <a:srgbClr val="1E40AF"/>
+                </a:solidFill>
+                <a:latin typeface="Yu Gothic"/>
+                <a:ea typeface="Yu Gothic"/>
+                <a:cs typeface="Yu Gothic"/>
+              </a:rPr>
+              <a:t>本日は決定をお願いする場ではありません。設計へのご意見と、論点の目線合わせをお願いします</a:t>
+            </a:r>
+          </a:p>
+        </p:txBody>
+      </p:sp>
+      <p:sp>
+        <p:nvSpPr>
+          <p:cNvPr id="21" name="Rectangle 20"/>
           <p:cNvSpPr/>
           <p:nvPr/>
         </p:nvSpPr>
         <p:spPr>
           <a:xfrm>
-            <a:off x="704088" y="3547871"/>
-            <a:ext cx="457200" cy="457200"/>
-          </a:xfrm>
-          <a:prstGeom prst="ellipse">
+            <a:off x="502920" y="6510528"/>
+            <a:ext cx="11183112" cy="15240"/>
+          </a:xfrm>
+          <a:prstGeom prst="rect">
             <a:avLst/>
           </a:prstGeom>
           <a:solidFill>
-            <a:srgbClr val="7823DC"/>
+            <a:srgbClr val="E5E7EB"/>
           </a:solidFill>
           <a:ln>
             <a:noFill/>
@@ -3862,38 +4544,23 @@
           </a:fontRef>
         </p:style>
         <p:txBody>
-          <a:bodyPr rtlCol="0" anchor="ctr" wrap="none" lIns="0" rIns="0" tIns="0" bIns="0"/>
-          <a:lstStyle/>
-          <a:p>
-            <a:pPr algn="ctr">
-              <a:spcAft>
-                <a:spcPts val="0"/>
-              </a:spcAft>
-            </a:pPr>
-            <a:r>
-              <a:rPr sz="1800" b="1" i="0">
-                <a:solidFill>
-                  <a:srgbClr val="FFFFFF"/>
-                </a:solidFill>
-                <a:latin typeface="Yu Gothic"/>
-                <a:ea typeface="Yu Gothic"/>
-                <a:cs typeface="Yu Gothic"/>
-              </a:rPr>
-              <a:t>2</a:t>
-            </a:r>
-          </a:p>
-        </p:txBody>
-      </p:sp>
-      <p:sp>
-        <p:nvSpPr>
-          <p:cNvPr id="13" name="TextBox 12"/>
+          <a:bodyPr rtlCol="0" anchor="ctr"/>
+          <a:lstStyle/>
+          <a:p>
+            <a:pPr algn="ctr"/>
+          </a:p>
+        </p:txBody>
+      </p:sp>
+      <p:sp>
+        <p:nvSpPr>
+          <p:cNvPr id="22" name="TextBox 21"/>
           <p:cNvSpPr txBox="1"/>
           <p:nvPr/>
         </p:nvSpPr>
         <p:spPr>
           <a:xfrm>
-            <a:off x="1344168" y="3511295"/>
-            <a:ext cx="10158984" cy="786384"/>
+            <a:off x="502920" y="6565392"/>
+            <a:ext cx="8686800" cy="274320"/>
           </a:xfrm>
           <a:prstGeom prst="rect">
             <a:avLst/>
@@ -3901,7 +4568,7 @@
           <a:noFill/>
         </p:spPr>
         <p:txBody>
-          <a:bodyPr wrap="square" lIns="0" rIns="0" tIns="0" bIns="0" anchor="ctr">
+          <a:bodyPr wrap="square" lIns="0" rIns="0" tIns="0" bIns="0">
             <a:spAutoFit/>
           </a:bodyPr>
           <a:lstStyle/>
@@ -3912,449 +4579,9 @@
               </a:spcAft>
             </a:pPr>
             <a:r>
-              <a:rPr sz="1300" b="1" i="0">
-                <a:solidFill>
-                  <a:srgbClr val="3A106E"/>
-                </a:solidFill>
-                <a:latin typeface="Yu Gothic"/>
-                <a:ea typeface="Yu Gothic"/>
-                <a:cs typeface="Yu Gothic"/>
-              </a:rPr>
-              <a:t>点検会議の設計</a:t>
-            </a:r>
-          </a:p>
-          <a:p>
-            <a:pPr algn="l">
-              <a:spcAft>
-                <a:spcPts val="0"/>
-              </a:spcAft>
-            </a:pPr>
-            <a:r>
-              <a:rPr sz="1050" b="0" i="0">
-                <a:solidFill>
-                  <a:srgbClr val="262630"/>
-                </a:solidFill>
-                <a:latin typeface="Yu Gothic"/>
-                <a:ea typeface="Yu Gothic"/>
-                <a:cs typeface="Yu Gothic"/>
-              </a:rPr>
-              <a:t>会長にお願いしたい役割（10分）</a:t>
-            </a:r>
-          </a:p>
-        </p:txBody>
-      </p:sp>
-      <p:sp>
-        <p:nvSpPr>
-          <p:cNvPr id="14" name="Rectangle 13"/>
-          <p:cNvSpPr/>
-          <p:nvPr/>
-        </p:nvSpPr>
-        <p:spPr>
-          <a:xfrm>
-            <a:off x="502920" y="4608575"/>
-            <a:ext cx="11183112" cy="1060704"/>
-          </a:xfrm>
-          <a:prstGeom prst="rect">
-            <a:avLst/>
-          </a:prstGeom>
-          <a:solidFill>
-            <a:srgbClr val="FFFFFF"/>
-          </a:solidFill>
-          <a:ln w="9525">
-            <a:solidFill>
-              <a:srgbClr val="D9D9E0"/>
-            </a:solidFill>
-          </a:ln>
-          <a:effectLst/>
-        </p:spPr>
-        <p:style>
-          <a:lnRef idx="1">
-            <a:schemeClr val="accent1"/>
-          </a:lnRef>
-          <a:fillRef idx="3">
-            <a:schemeClr val="accent1"/>
-          </a:fillRef>
-          <a:effectRef idx="2">
-            <a:schemeClr val="accent1"/>
-          </a:effectRef>
-          <a:fontRef idx="minor">
-            <a:schemeClr val="lt1"/>
-          </a:fontRef>
-        </p:style>
-        <p:txBody>
-          <a:bodyPr rtlCol="0" anchor="ctr"/>
-          <a:lstStyle/>
-          <a:p>
-            <a:pPr algn="ctr"/>
-          </a:p>
-        </p:txBody>
-      </p:sp>
-      <p:sp>
-        <p:nvSpPr>
-          <p:cNvPr id="15" name="Rectangle 14"/>
-          <p:cNvSpPr/>
-          <p:nvPr/>
-        </p:nvSpPr>
-        <p:spPr>
-          <a:xfrm>
-            <a:off x="502920" y="4608575"/>
-            <a:ext cx="64008" cy="1060704"/>
-          </a:xfrm>
-          <a:prstGeom prst="rect">
-            <a:avLst/>
-          </a:prstGeom>
-          <a:solidFill>
-            <a:srgbClr val="7823DC"/>
-          </a:solidFill>
-          <a:ln>
-            <a:noFill/>
-          </a:ln>
-          <a:effectLst/>
-        </p:spPr>
-        <p:style>
-          <a:lnRef idx="1">
-            <a:schemeClr val="accent1"/>
-          </a:lnRef>
-          <a:fillRef idx="3">
-            <a:schemeClr val="accent1"/>
-          </a:fillRef>
-          <a:effectRef idx="2">
-            <a:schemeClr val="accent1"/>
-          </a:effectRef>
-          <a:fontRef idx="minor">
-            <a:schemeClr val="lt1"/>
-          </a:fontRef>
-        </p:style>
-        <p:txBody>
-          <a:bodyPr rtlCol="0" anchor="ctr"/>
-          <a:lstStyle/>
-          <a:p>
-            <a:pPr algn="ctr"/>
-          </a:p>
-        </p:txBody>
-      </p:sp>
-      <p:sp>
-        <p:nvSpPr>
-          <p:cNvPr id="16" name="Oval 15"/>
-          <p:cNvSpPr/>
-          <p:nvPr/>
-        </p:nvSpPr>
-        <p:spPr>
-          <a:xfrm>
-            <a:off x="704088" y="4809743"/>
-            <a:ext cx="457200" cy="457200"/>
-          </a:xfrm>
-          <a:prstGeom prst="ellipse">
-            <a:avLst/>
-          </a:prstGeom>
-          <a:solidFill>
-            <a:srgbClr val="7823DC"/>
-          </a:solidFill>
-          <a:ln>
-            <a:noFill/>
-          </a:ln>
-          <a:effectLst/>
-        </p:spPr>
-        <p:style>
-          <a:lnRef idx="1">
-            <a:schemeClr val="accent1"/>
-          </a:lnRef>
-          <a:fillRef idx="3">
-            <a:schemeClr val="accent1"/>
-          </a:fillRef>
-          <a:effectRef idx="2">
-            <a:schemeClr val="accent1"/>
-          </a:effectRef>
-          <a:fontRef idx="minor">
-            <a:schemeClr val="lt1"/>
-          </a:fontRef>
-        </p:style>
-        <p:txBody>
-          <a:bodyPr rtlCol="0" anchor="ctr" wrap="none" lIns="0" rIns="0" tIns="0" bIns="0"/>
-          <a:lstStyle/>
-          <a:p>
-            <a:pPr algn="ctr">
-              <a:spcAft>
-                <a:spcPts val="0"/>
-              </a:spcAft>
-            </a:pPr>
-            <a:r>
-              <a:rPr sz="1800" b="1" i="0">
-                <a:solidFill>
-                  <a:srgbClr val="FFFFFF"/>
-                </a:solidFill>
-                <a:latin typeface="Yu Gothic"/>
-                <a:ea typeface="Yu Gothic"/>
-                <a:cs typeface="Yu Gothic"/>
-              </a:rPr>
-              <a:t>3</a:t>
-            </a:r>
-          </a:p>
-        </p:txBody>
-      </p:sp>
-      <p:sp>
-        <p:nvSpPr>
-          <p:cNvPr id="17" name="TextBox 16"/>
-          <p:cNvSpPr txBox="1"/>
-          <p:nvPr/>
-        </p:nvSpPr>
-        <p:spPr>
-          <a:xfrm>
-            <a:off x="1344168" y="4773167"/>
-            <a:ext cx="10158984" cy="786384"/>
-          </a:xfrm>
-          <a:prstGeom prst="rect">
-            <a:avLst/>
-          </a:prstGeom>
-          <a:noFill/>
-        </p:spPr>
-        <p:txBody>
-          <a:bodyPr wrap="square" lIns="0" rIns="0" tIns="0" bIns="0" anchor="ctr">
-            <a:spAutoFit/>
-          </a:bodyPr>
-          <a:lstStyle/>
-          <a:p>
-            <a:pPr algn="l">
-              <a:spcAft>
-                <a:spcPts val="400"/>
-              </a:spcAft>
-            </a:pPr>
-            <a:r>
-              <a:rPr sz="1300" b="1" i="0">
-                <a:solidFill>
-                  <a:srgbClr val="3A106E"/>
-                </a:solidFill>
-                <a:latin typeface="Yu Gothic"/>
-                <a:ea typeface="Yu Gothic"/>
-                <a:cs typeface="Yu Gothic"/>
-              </a:rPr>
-              <a:t>重要論点の先出し</a:t>
-            </a:r>
-          </a:p>
-          <a:p>
-            <a:pPr algn="l">
-              <a:spcAft>
-                <a:spcPts val="0"/>
-              </a:spcAft>
-            </a:pPr>
-            <a:r>
-              <a:rPr sz="1050" b="0" i="0">
-                <a:solidFill>
-                  <a:srgbClr val="262630"/>
-                </a:solidFill>
-                <a:latin typeface="Yu Gothic"/>
-                <a:ea typeface="Yu Gothic"/>
-                <a:cs typeface="Yu Gothic"/>
-              </a:rPr>
-              <a:t>初回点検会議までにご相談したいこと（15分）</a:t>
-            </a:r>
-          </a:p>
-        </p:txBody>
-      </p:sp>
-      <p:sp>
-        <p:nvSpPr>
-          <p:cNvPr id="18" name="Rectangle 17"/>
-          <p:cNvSpPr/>
-          <p:nvPr/>
-        </p:nvSpPr>
-        <p:spPr>
-          <a:xfrm>
-            <a:off x="502920" y="5870448"/>
-            <a:ext cx="11183112" cy="548640"/>
-          </a:xfrm>
-          <a:prstGeom prst="rect">
-            <a:avLst/>
-          </a:prstGeom>
-          <a:solidFill>
-            <a:srgbClr val="F3EFFB"/>
-          </a:solidFill>
-          <a:ln>
-            <a:noFill/>
-          </a:ln>
-          <a:effectLst/>
-        </p:spPr>
-        <p:style>
-          <a:lnRef idx="1">
-            <a:schemeClr val="accent1"/>
-          </a:lnRef>
-          <a:fillRef idx="3">
-            <a:schemeClr val="accent1"/>
-          </a:fillRef>
-          <a:effectRef idx="2">
-            <a:schemeClr val="accent1"/>
-          </a:effectRef>
-          <a:fontRef idx="minor">
-            <a:schemeClr val="lt1"/>
-          </a:fontRef>
-        </p:style>
-        <p:txBody>
-          <a:bodyPr rtlCol="0" anchor="ctr"/>
-          <a:lstStyle/>
-          <a:p>
-            <a:pPr algn="ctr"/>
-          </a:p>
-        </p:txBody>
-      </p:sp>
-      <p:sp>
-        <p:nvSpPr>
-          <p:cNvPr id="19" name="Rectangle 18"/>
-          <p:cNvSpPr/>
-          <p:nvPr/>
-        </p:nvSpPr>
-        <p:spPr>
-          <a:xfrm>
-            <a:off x="502920" y="5870448"/>
-            <a:ext cx="38100" cy="548640"/>
-          </a:xfrm>
-          <a:prstGeom prst="rect">
-            <a:avLst/>
-          </a:prstGeom>
-          <a:solidFill>
-            <a:srgbClr val="7823DC"/>
-          </a:solidFill>
-          <a:ln>
-            <a:noFill/>
-          </a:ln>
-          <a:effectLst/>
-        </p:spPr>
-        <p:style>
-          <a:lnRef idx="1">
-            <a:schemeClr val="accent1"/>
-          </a:lnRef>
-          <a:fillRef idx="3">
-            <a:schemeClr val="accent1"/>
-          </a:fillRef>
-          <a:effectRef idx="2">
-            <a:schemeClr val="accent1"/>
-          </a:effectRef>
-          <a:fontRef idx="minor">
-            <a:schemeClr val="lt1"/>
-          </a:fontRef>
-        </p:style>
-        <p:txBody>
-          <a:bodyPr rtlCol="0" anchor="ctr"/>
-          <a:lstStyle/>
-          <a:p>
-            <a:pPr algn="ctr"/>
-          </a:p>
-        </p:txBody>
-      </p:sp>
-      <p:sp>
-        <p:nvSpPr>
-          <p:cNvPr id="20" name="TextBox 19"/>
-          <p:cNvSpPr txBox="1"/>
-          <p:nvPr/>
-        </p:nvSpPr>
-        <p:spPr>
-          <a:xfrm>
-            <a:off x="685800" y="5934456"/>
-            <a:ext cx="10881360" cy="438912"/>
-          </a:xfrm>
-          <a:prstGeom prst="rect">
-            <a:avLst/>
-          </a:prstGeom>
-          <a:noFill/>
-        </p:spPr>
-        <p:txBody>
-          <a:bodyPr wrap="square" lIns="0" rIns="0" tIns="0" bIns="0" anchor="ctr">
-            <a:spAutoFit/>
-          </a:bodyPr>
-          <a:lstStyle/>
-          <a:p>
-            <a:pPr algn="l">
-              <a:spcAft>
-                <a:spcPts val="0"/>
-              </a:spcAft>
-            </a:pPr>
-            <a:r>
-              <a:rPr sz="1050" b="1" i="0">
-                <a:solidFill>
-                  <a:srgbClr val="3A106E"/>
-                </a:solidFill>
-                <a:latin typeface="Yu Gothic"/>
-                <a:ea typeface="Yu Gothic"/>
-                <a:cs typeface="Yu Gothic"/>
-              </a:rPr>
-              <a:t>本日は決定をお願いする場ではありません。設計へのご意見と、論点の目線合わせをお願いします</a:t>
-            </a:r>
-          </a:p>
-        </p:txBody>
-      </p:sp>
-      <p:sp>
-        <p:nvSpPr>
-          <p:cNvPr id="21" name="Rectangle 20"/>
-          <p:cNvSpPr/>
-          <p:nvPr/>
-        </p:nvSpPr>
-        <p:spPr>
-          <a:xfrm>
-            <a:off x="502920" y="6510528"/>
-            <a:ext cx="11183112" cy="15240"/>
-          </a:xfrm>
-          <a:prstGeom prst="rect">
-            <a:avLst/>
-          </a:prstGeom>
-          <a:solidFill>
-            <a:srgbClr val="D9D9E0"/>
-          </a:solidFill>
-          <a:ln>
-            <a:noFill/>
-          </a:ln>
-          <a:effectLst/>
-        </p:spPr>
-        <p:style>
-          <a:lnRef idx="1">
-            <a:schemeClr val="accent1"/>
-          </a:lnRef>
-          <a:fillRef idx="3">
-            <a:schemeClr val="accent1"/>
-          </a:fillRef>
-          <a:effectRef idx="2">
-            <a:schemeClr val="accent1"/>
-          </a:effectRef>
-          <a:fontRef idx="minor">
-            <a:schemeClr val="lt1"/>
-          </a:fontRef>
-        </p:style>
-        <p:txBody>
-          <a:bodyPr rtlCol="0" anchor="ctr"/>
-          <a:lstStyle/>
-          <a:p>
-            <a:pPr algn="ctr"/>
-          </a:p>
-        </p:txBody>
-      </p:sp>
-      <p:sp>
-        <p:nvSpPr>
-          <p:cNvPr id="22" name="TextBox 21"/>
-          <p:cNvSpPr txBox="1"/>
-          <p:nvPr/>
-        </p:nvSpPr>
-        <p:spPr>
-          <a:xfrm>
-            <a:off x="502920" y="6565392"/>
-            <a:ext cx="8686800" cy="274320"/>
-          </a:xfrm>
-          <a:prstGeom prst="rect">
-            <a:avLst/>
-          </a:prstGeom>
-          <a:noFill/>
-        </p:spPr>
-        <p:txBody>
-          <a:bodyPr wrap="square" lIns="0" rIns="0" tIns="0" bIns="0">
-            <a:spAutoFit/>
-          </a:bodyPr>
-          <a:lstStyle/>
-          <a:p>
-            <a:pPr algn="l">
-              <a:spcAft>
-                <a:spcPts val="400"/>
-              </a:spcAft>
-            </a:pPr>
-            <a:r>
               <a:rPr sz="750" b="0" i="0">
                 <a:solidFill>
-                  <a:srgbClr val="8A8A99"/>
+                  <a:srgbClr val="8A8F9C"/>
                 </a:solidFill>
                 <a:latin typeface="Yu Gothic"/>
                 <a:ea typeface="Yu Gothic"/>
@@ -4395,7 +4622,7 @@
             <a:r>
               <a:rPr sz="900" b="0" i="0">
                 <a:solidFill>
-                  <a:srgbClr val="5F5F6E"/>
+                  <a:srgbClr val="6B7280"/>
                 </a:solidFill>
                 <a:latin typeface="Yu Gothic"/>
                 <a:ea typeface="Yu Gothic"/>
@@ -4426,35 +4653,55 @@
       <p:grpSpPr/>
       <p:sp>
         <p:nvSpPr>
-          <p:cNvPr id="2" name="TextBox 1"/>
-          <p:cNvSpPr txBox="1"/>
-          <p:nvPr/>
-        </p:nvSpPr>
-        <p:spPr>
-          <a:xfrm>
-            <a:off x="502920" y="256032"/>
-            <a:ext cx="11155680" cy="256032"/>
-          </a:xfrm>
-          <a:prstGeom prst="rect">
-            <a:avLst/>
-          </a:prstGeom>
-          <a:noFill/>
-        </p:spPr>
-        <p:txBody>
-          <a:bodyPr wrap="square" lIns="0" rIns="0" tIns="0" bIns="0">
-            <a:spAutoFit/>
-          </a:bodyPr>
+          <p:cNvPr id="2" name="Rounded Rectangle 1"/>
+          <p:cNvSpPr/>
+          <p:nvPr/>
+        </p:nvSpPr>
+        <p:spPr>
+          <a:xfrm>
+            <a:off x="502920" y="274320"/>
+            <a:ext cx="1497330" cy="274320"/>
+          </a:xfrm>
+          <a:prstGeom prst="roundRect">
+            <a:avLst>
+              <a:gd name="adj" fmla="val 50000"/>
+            </a:avLst>
+          </a:prstGeom>
+          <a:solidFill>
+            <a:srgbClr val="EAF1FE"/>
+          </a:solidFill>
+          <a:ln>
+            <a:noFill/>
+          </a:ln>
+          <a:effectLst/>
+        </p:spPr>
+        <p:style>
+          <a:lnRef idx="1">
+            <a:schemeClr val="accent1"/>
+          </a:lnRef>
+          <a:fillRef idx="3">
+            <a:schemeClr val="accent1"/>
+          </a:fillRef>
+          <a:effectRef idx="2">
+            <a:schemeClr val="accent1"/>
+          </a:effectRef>
+          <a:fontRef idx="minor">
+            <a:schemeClr val="lt1"/>
+          </a:fontRef>
+        </p:style>
+        <p:txBody>
+          <a:bodyPr rtlCol="0" anchor="ctr" wrap="none" lIns="109728" rIns="109728" tIns="0" bIns="0"/>
           <a:lstStyle/>
           <a:p>
             <a:pPr algn="l">
               <a:spcAft>
-                <a:spcPts val="400"/>
+                <a:spcPts val="0"/>
               </a:spcAft>
             </a:pPr>
             <a:r>
-              <a:rPr sz="1000" b="1" i="0">
-                <a:solidFill>
-                  <a:srgbClr val="7823DC"/>
+              <a:rPr sz="900" b="1" i="0">
+                <a:solidFill>
+                  <a:srgbClr val="2563EB"/>
                 </a:solidFill>
                 <a:latin typeface="Yu Gothic"/>
                 <a:ea typeface="Yu Gothic"/>
@@ -4473,8 +4720,8 @@
         </p:nvSpPr>
         <p:spPr>
           <a:xfrm>
-            <a:off x="502920" y="512064"/>
-            <a:ext cx="11155680" cy="868680"/>
+            <a:off x="502920" y="566928"/>
+            <a:ext cx="11155680" cy="804672"/>
           </a:xfrm>
           <a:prstGeom prst="rect">
             <a:avLst/>
@@ -4493,9 +4740,9 @@
               </a:spcAft>
             </a:pPr>
             <a:r>
-              <a:rPr sz="1900" b="1" i="0">
-                <a:solidFill>
-                  <a:srgbClr val="262630"/>
+              <a:rPr sz="1800" b="1" i="0">
+                <a:solidFill>
+                  <a:srgbClr val="1B1B26"/>
                 </a:solidFill>
                 <a:latin typeface="Yu Gothic"/>
                 <a:ea typeface="Yu Gothic"/>
@@ -4514,14 +4761,14 @@
         </p:nvSpPr>
         <p:spPr>
           <a:xfrm>
-            <a:off x="502920" y="1389888"/>
-            <a:ext cx="1463040" cy="33020"/>
+            <a:off x="502920" y="1335024"/>
+            <a:ext cx="11183112" cy="11430"/>
           </a:xfrm>
           <a:prstGeom prst="rect">
             <a:avLst/>
           </a:prstGeom>
           <a:solidFill>
-            <a:srgbClr val="7823DC"/>
+            <a:srgbClr val="E5E7EB"/>
           </a:solidFill>
           <a:ln>
             <a:noFill/>
@@ -4565,11 +4812,11 @@
             <a:avLst/>
           </a:prstGeom>
           <a:solidFill>
-            <a:srgbClr val="F7F7F9"/>
+            <a:srgbClr val="F6F8FB"/>
           </a:solidFill>
           <a:ln w="9525">
             <a:solidFill>
-              <a:srgbClr val="D9D9E0"/>
+              <a:srgbClr val="E5E7EB"/>
             </a:solidFill>
           </a:ln>
           <a:effectLst/>
@@ -4611,7 +4858,7 @@
             <a:avLst/>
           </a:prstGeom>
           <a:solidFill>
-            <a:srgbClr val="3A106E"/>
+            <a:srgbClr val="1E40AF"/>
           </a:solidFill>
           <a:ln>
             <a:noFill/>
@@ -4711,7 +4958,7 @@
             <a:r>
               <a:rPr sz="1050" b="1" i="0">
                 <a:solidFill>
-                  <a:srgbClr val="262630"/>
+                  <a:srgbClr val="1B1B26"/>
                 </a:solidFill>
                 <a:latin typeface="Yu Gothic"/>
                 <a:ea typeface="Yu Gothic"/>
@@ -4765,7 +5012,7 @@
             <a:r>
               <a:rPr sz="1050" b="1" i="0">
                 <a:solidFill>
-                  <a:srgbClr val="3A106E"/>
+                  <a:srgbClr val="1E40AF"/>
                 </a:solidFill>
                 <a:latin typeface="Yu Gothic"/>
                 <a:ea typeface="Yu Gothic"/>
@@ -4783,7 +5030,7 @@
             <a:r>
               <a:rPr sz="950" b="0" i="0">
                 <a:solidFill>
-                  <a:srgbClr val="5F5F6E"/>
+                  <a:srgbClr val="6B7280"/>
                 </a:solidFill>
                 <a:latin typeface="Yu Gothic"/>
                 <a:ea typeface="Yu Gothic"/>
@@ -4801,7 +5048,7 @@
             <a:r>
               <a:rPr sz="1050" b="0" i="0">
                 <a:solidFill>
-                  <a:srgbClr val="262630"/>
+                  <a:srgbClr val="1B1B26"/>
                 </a:solidFill>
                 <a:latin typeface="Yu Gothic"/>
                 <a:ea typeface="Yu Gothic"/>
@@ -4827,11 +5074,11 @@
             <a:avLst/>
           </a:prstGeom>
           <a:solidFill>
-            <a:srgbClr val="F7F7F9"/>
+            <a:srgbClr val="F6F8FB"/>
           </a:solidFill>
           <a:ln w="9525">
             <a:solidFill>
-              <a:srgbClr val="D9D9E0"/>
+              <a:srgbClr val="E5E7EB"/>
             </a:solidFill>
           </a:ln>
           <a:effectLst/>
@@ -4873,7 +5120,7 @@
             <a:avLst/>
           </a:prstGeom>
           <a:solidFill>
-            <a:srgbClr val="7823DC"/>
+            <a:srgbClr val="2563EB"/>
           </a:solidFill>
           <a:ln>
             <a:noFill/>
@@ -4975,7 +5222,7 @@
             <a:r>
               <a:rPr sz="1050" b="0" i="0">
                 <a:solidFill>
-                  <a:srgbClr val="262630"/>
+                  <a:srgbClr val="1B1B26"/>
                 </a:solidFill>
                 <a:latin typeface="Yu Gothic"/>
                 <a:ea typeface="Yu Gothic"/>
@@ -4995,7 +5242,7 @@
             <a:r>
               <a:rPr sz="1050" b="0" i="0">
                 <a:solidFill>
-                  <a:srgbClr val="262630"/>
+                  <a:srgbClr val="1B1B26"/>
                 </a:solidFill>
                 <a:latin typeface="Yu Gothic"/>
                 <a:ea typeface="Yu Gothic"/>
@@ -5015,7 +5262,7 @@
             <a:r>
               <a:rPr sz="1050" b="0" i="0">
                 <a:solidFill>
-                  <a:srgbClr val="262630"/>
+                  <a:srgbClr val="1B1B26"/>
                 </a:solidFill>
                 <a:latin typeface="Yu Gothic"/>
                 <a:ea typeface="Yu Gothic"/>
@@ -5035,7 +5282,7 @@
             <a:r>
               <a:rPr sz="1050" b="0" i="0">
                 <a:solidFill>
-                  <a:srgbClr val="262630"/>
+                  <a:srgbClr val="1B1B26"/>
                 </a:solidFill>
                 <a:latin typeface="Yu Gothic"/>
                 <a:ea typeface="Yu Gothic"/>
@@ -5055,7 +5302,7 @@
             <a:r>
               <a:rPr sz="1050" b="0" i="0">
                 <a:solidFill>
-                  <a:srgbClr val="262630"/>
+                  <a:srgbClr val="1B1B26"/>
                 </a:solidFill>
                 <a:latin typeface="Yu Gothic"/>
                 <a:ea typeface="Yu Gothic"/>
@@ -5081,7 +5328,7 @@
             <a:avLst/>
           </a:prstGeom>
           <a:solidFill>
-            <a:srgbClr val="D9D9E0"/>
+            <a:srgbClr val="E5E7EB"/>
           </a:solidFill>
           <a:ln>
             <a:noFill/>
@@ -5140,7 +5387,7 @@
             <a:r>
               <a:rPr sz="750" b="0" i="0">
                 <a:solidFill>
-                  <a:srgbClr val="8A8A99"/>
+                  <a:srgbClr val="8A8F9C"/>
                 </a:solidFill>
                 <a:latin typeface="Yu Gothic"/>
                 <a:ea typeface="Yu Gothic"/>
@@ -5181,7 +5428,7 @@
             <a:r>
               <a:rPr sz="900" b="0" i="0">
                 <a:solidFill>
-                  <a:srgbClr val="5F5F6E"/>
+                  <a:srgbClr val="6B7280"/>
                 </a:solidFill>
                 <a:latin typeface="Yu Gothic"/>
                 <a:ea typeface="Yu Gothic"/>
@@ -5212,14 +5459,318 @@
       <p:grpSpPr/>
       <p:sp>
         <p:nvSpPr>
-          <p:cNvPr id="2" name="TextBox 1"/>
+          <p:cNvPr id="2" name="Rounded Rectangle 1"/>
+          <p:cNvSpPr/>
+          <p:nvPr/>
+        </p:nvSpPr>
+        <p:spPr>
+          <a:xfrm>
+            <a:off x="502920" y="274320"/>
+            <a:ext cx="1627632" cy="274320"/>
+          </a:xfrm>
+          <a:prstGeom prst="roundRect">
+            <a:avLst>
+              <a:gd name="adj" fmla="val 50000"/>
+            </a:avLst>
+          </a:prstGeom>
+          <a:solidFill>
+            <a:srgbClr val="EAF1FE"/>
+          </a:solidFill>
+          <a:ln>
+            <a:noFill/>
+          </a:ln>
+          <a:effectLst/>
+        </p:spPr>
+        <p:style>
+          <a:lnRef idx="1">
+            <a:schemeClr val="accent1"/>
+          </a:lnRef>
+          <a:fillRef idx="3">
+            <a:schemeClr val="accent1"/>
+          </a:fillRef>
+          <a:effectRef idx="2">
+            <a:schemeClr val="accent1"/>
+          </a:effectRef>
+          <a:fontRef idx="minor">
+            <a:schemeClr val="lt1"/>
+          </a:fontRef>
+        </p:style>
+        <p:txBody>
+          <a:bodyPr rtlCol="0" anchor="ctr" wrap="none" lIns="109728" rIns="109728" tIns="0" bIns="0"/>
+          <a:lstStyle/>
+          <a:p>
+            <a:pPr algn="l">
+              <a:spcAft>
+                <a:spcPts val="0"/>
+              </a:spcAft>
+            </a:pPr>
+            <a:r>
+              <a:rPr sz="900" b="1" i="0">
+                <a:solidFill>
+                  <a:srgbClr val="2563EB"/>
+                </a:solidFill>
+                <a:latin typeface="Yu Gothic"/>
+                <a:ea typeface="Yu Gothic"/>
+                <a:cs typeface="Yu Gothic"/>
+              </a:rPr>
+              <a:t>02 ｜ 点検会議の設計</a:t>
+            </a:r>
+          </a:p>
+        </p:txBody>
+      </p:sp>
+      <p:sp>
+        <p:nvSpPr>
+          <p:cNvPr id="3" name="TextBox 2"/>
           <p:cNvSpPr txBox="1"/>
           <p:nvPr/>
         </p:nvSpPr>
         <p:spPr>
           <a:xfrm>
-            <a:off x="502920" y="256032"/>
-            <a:ext cx="11155680" cy="256032"/>
+            <a:off x="502920" y="566928"/>
+            <a:ext cx="11155680" cy="804672"/>
+          </a:xfrm>
+          <a:prstGeom prst="rect">
+            <a:avLst/>
+          </a:prstGeom>
+          <a:noFill/>
+        </p:spPr>
+        <p:txBody>
+          <a:bodyPr wrap="square" lIns="0" rIns="0" tIns="0" bIns="0">
+            <a:spAutoFit/>
+          </a:bodyPr>
+          <a:lstStyle/>
+          <a:p>
+            <a:pPr algn="l">
+              <a:spcAft>
+                <a:spcPts val="0"/>
+              </a:spcAft>
+            </a:pPr>
+            <a:r>
+              <a:rPr sz="1800" b="1" i="0">
+                <a:solidFill>
+                  <a:srgbClr val="1B1B26"/>
+                </a:solidFill>
+                <a:latin typeface="Yu Gothic"/>
+                <a:ea typeface="Yu Gothic"/>
+                <a:cs typeface="Yu Gothic"/>
+              </a:rPr>
+              <a:t>会議体系のなかでの点検会議の位置づけ</a:t>
+            </a:r>
+          </a:p>
+        </p:txBody>
+      </p:sp>
+      <p:sp>
+        <p:nvSpPr>
+          <p:cNvPr id="4" name="Rectangle 3"/>
+          <p:cNvSpPr/>
+          <p:nvPr/>
+        </p:nvSpPr>
+        <p:spPr>
+          <a:xfrm>
+            <a:off x="502920" y="1335024"/>
+            <a:ext cx="11183112" cy="11430"/>
+          </a:xfrm>
+          <a:prstGeom prst="rect">
+            <a:avLst/>
+          </a:prstGeom>
+          <a:solidFill>
+            <a:srgbClr val="E5E7EB"/>
+          </a:solidFill>
+          <a:ln>
+            <a:noFill/>
+          </a:ln>
+          <a:effectLst/>
+        </p:spPr>
+        <p:style>
+          <a:lnRef idx="1">
+            <a:schemeClr val="accent1"/>
+          </a:lnRef>
+          <a:fillRef idx="3">
+            <a:schemeClr val="accent1"/>
+          </a:fillRef>
+          <a:effectRef idx="2">
+            <a:schemeClr val="accent1"/>
+          </a:effectRef>
+          <a:fontRef idx="minor">
+            <a:schemeClr val="lt1"/>
+          </a:fontRef>
+        </p:style>
+        <p:txBody>
+          <a:bodyPr rtlCol="0" anchor="ctr"/>
+          <a:lstStyle/>
+          <a:p>
+            <a:pPr algn="ctr"/>
+          </a:p>
+        </p:txBody>
+      </p:sp>
+      <p:sp>
+        <p:nvSpPr>
+          <p:cNvPr id="5" name="Rectangle 4"/>
+          <p:cNvSpPr/>
+          <p:nvPr/>
+        </p:nvSpPr>
+        <p:spPr>
+          <a:xfrm>
+            <a:off x="1947672" y="1938528"/>
+            <a:ext cx="8321040" cy="841248"/>
+          </a:xfrm>
+          <a:prstGeom prst="rect">
+            <a:avLst/>
+          </a:prstGeom>
+          <a:solidFill>
+            <a:srgbClr val="1E40AF"/>
+          </a:solidFill>
+          <a:ln>
+            <a:noFill/>
+          </a:ln>
+          <a:effectLst/>
+        </p:spPr>
+        <p:style>
+          <a:lnRef idx="1">
+            <a:schemeClr val="accent1"/>
+          </a:lnRef>
+          <a:fillRef idx="3">
+            <a:schemeClr val="accent1"/>
+          </a:fillRef>
+          <a:effectRef idx="2">
+            <a:schemeClr val="accent1"/>
+          </a:effectRef>
+          <a:fontRef idx="minor">
+            <a:schemeClr val="lt1"/>
+          </a:fontRef>
+        </p:style>
+        <p:txBody>
+          <a:bodyPr rtlCol="0" anchor="ctr"/>
+          <a:lstStyle/>
+          <a:p>
+            <a:pPr algn="ctr"/>
+          </a:p>
+        </p:txBody>
+      </p:sp>
+      <p:sp>
+        <p:nvSpPr>
+          <p:cNvPr id="6" name="TextBox 5"/>
+          <p:cNvSpPr txBox="1"/>
+          <p:nvPr/>
+        </p:nvSpPr>
+        <p:spPr>
+          <a:xfrm>
+            <a:off x="2167128" y="2029968"/>
+            <a:ext cx="7882128" cy="676656"/>
+          </a:xfrm>
+          <a:prstGeom prst="rect">
+            <a:avLst/>
+          </a:prstGeom>
+          <a:noFill/>
+        </p:spPr>
+        <p:txBody>
+          <a:bodyPr wrap="square" lIns="0" rIns="0" tIns="0" bIns="0" anchor="ctr">
+            <a:spAutoFit/>
+          </a:bodyPr>
+          <a:lstStyle/>
+          <a:p>
+            <a:pPr algn="ctr">
+              <a:spcAft>
+                <a:spcPts val="100"/>
+              </a:spcAft>
+            </a:pPr>
+            <a:r>
+              <a:rPr sz="1400" b="1" i="0">
+                <a:solidFill>
+                  <a:srgbClr val="FFFFFF"/>
+                </a:solidFill>
+                <a:latin typeface="Yu Gothic"/>
+                <a:ea typeface="Yu Gothic"/>
+                <a:cs typeface="Yu Gothic"/>
+              </a:rPr>
+              <a:t>点検会議</a:t>
+            </a:r>
+            <a:r>
+              <a:rPr sz="1050" b="0" i="0">
+                <a:solidFill>
+                  <a:srgbClr val="BFD4FE"/>
+                </a:solidFill>
+                <a:latin typeface="Yu Gothic"/>
+                <a:ea typeface="Yu Gothic"/>
+                <a:cs typeface="Yu Gothic"/>
+              </a:rPr>
+              <a:t>（月次60分・議長：山本会長）</a:t>
+            </a:r>
+          </a:p>
+          <a:p>
+            <a:pPr algn="ctr">
+              <a:spcAft>
+                <a:spcPts val="0"/>
+              </a:spcAft>
+            </a:pPr>
+            <a:r>
+              <a:rPr sz="950" b="0" i="0">
+                <a:solidFill>
+                  <a:srgbClr val="BFD4FE"/>
+                </a:solidFill>
+                <a:latin typeface="Yu Gothic"/>
+                <a:ea typeface="Yu Gothic"/>
+                <a:cs typeface="Yu Gothic"/>
+              </a:rPr>
+              <a:t>重要テーマの意思決定・優先順位・改革が約束どおり進んでいるかの点検</a:t>
+            </a:r>
+          </a:p>
+        </p:txBody>
+      </p:sp>
+      <p:sp>
+        <p:nvSpPr>
+          <p:cNvPr id="7" name="Up Arrow 6"/>
+          <p:cNvSpPr/>
+          <p:nvPr/>
+        </p:nvSpPr>
+        <p:spPr>
+          <a:xfrm>
+            <a:off x="5852160" y="2834640"/>
+            <a:ext cx="457200" cy="274320"/>
+          </a:xfrm>
+          <a:prstGeom prst="upArrow">
+            <a:avLst/>
+          </a:prstGeom>
+          <a:solidFill>
+            <a:srgbClr val="2563EB"/>
+          </a:solidFill>
+          <a:ln>
+            <a:noFill/>
+          </a:ln>
+          <a:effectLst/>
+        </p:spPr>
+        <p:style>
+          <a:lnRef idx="1">
+            <a:schemeClr val="accent1"/>
+          </a:lnRef>
+          <a:fillRef idx="3">
+            <a:schemeClr val="accent1"/>
+          </a:fillRef>
+          <a:effectRef idx="2">
+            <a:schemeClr val="accent1"/>
+          </a:effectRef>
+          <a:fontRef idx="minor">
+            <a:schemeClr val="lt1"/>
+          </a:fontRef>
+        </p:style>
+        <p:txBody>
+          <a:bodyPr rtlCol="0" anchor="ctr"/>
+          <a:lstStyle/>
+          <a:p>
+            <a:pPr algn="ctr"/>
+          </a:p>
+        </p:txBody>
+      </p:sp>
+      <p:sp>
+        <p:nvSpPr>
+          <p:cNvPr id="8" name="TextBox 7"/>
+          <p:cNvSpPr txBox="1"/>
+          <p:nvPr/>
+        </p:nvSpPr>
+        <p:spPr>
+          <a:xfrm>
+            <a:off x="6400800" y="2843784"/>
+            <a:ext cx="5029200" cy="256032"/>
           </a:xfrm>
           <a:prstGeom prst="rect">
             <a:avLst/>
@@ -5238,29 +5789,73 @@
               </a:spcAft>
             </a:pPr>
             <a:r>
-              <a:rPr sz="1000" b="1" i="0">
-                <a:solidFill>
-                  <a:srgbClr val="7823DC"/>
+              <a:rPr sz="950" b="1" i="0">
+                <a:solidFill>
+                  <a:srgbClr val="2563EB"/>
                 </a:solidFill>
                 <a:latin typeface="Yu Gothic"/>
                 <a:ea typeface="Yu Gothic"/>
                 <a:cs typeface="Yu Gothic"/>
               </a:rPr>
-              <a:t>02 ｜ 点検会議の設計</a:t>
-            </a:r>
-          </a:p>
-        </p:txBody>
-      </p:sp>
-      <p:sp>
-        <p:nvSpPr>
-          <p:cNvPr id="3" name="TextBox 2"/>
+              <a:t>会長のご判断が必要な論点のみ（1回3件以内）</a:t>
+            </a:r>
+          </a:p>
+        </p:txBody>
+      </p:sp>
+      <p:sp>
+        <p:nvSpPr>
+          <p:cNvPr id="9" name="Rectangle 8"/>
+          <p:cNvSpPr/>
+          <p:nvPr/>
+        </p:nvSpPr>
+        <p:spPr>
+          <a:xfrm>
+            <a:off x="1947672" y="3200400"/>
+            <a:ext cx="8321040" cy="841248"/>
+          </a:xfrm>
+          <a:prstGeom prst="rect">
+            <a:avLst/>
+          </a:prstGeom>
+          <a:solidFill>
+            <a:srgbClr val="2563EB"/>
+          </a:solidFill>
+          <a:ln>
+            <a:noFill/>
+          </a:ln>
+          <a:effectLst/>
+        </p:spPr>
+        <p:style>
+          <a:lnRef idx="1">
+            <a:schemeClr val="accent1"/>
+          </a:lnRef>
+          <a:fillRef idx="3">
+            <a:schemeClr val="accent1"/>
+          </a:fillRef>
+          <a:effectRef idx="2">
+            <a:schemeClr val="accent1"/>
+          </a:effectRef>
+          <a:fontRef idx="minor">
+            <a:schemeClr val="lt1"/>
+          </a:fontRef>
+        </p:style>
+        <p:txBody>
+          <a:bodyPr rtlCol="0" anchor="ctr"/>
+          <a:lstStyle/>
+          <a:p>
+            <a:pPr algn="ctr"/>
+          </a:p>
+        </p:txBody>
+      </p:sp>
+      <p:sp>
+        <p:nvSpPr>
+          <p:cNvPr id="10" name="TextBox 9"/>
           <p:cNvSpPr txBox="1"/>
           <p:nvPr/>
         </p:nvSpPr>
         <p:spPr>
           <a:xfrm>
-            <a:off x="502920" y="512064"/>
-            <a:ext cx="11155680" cy="868680"/>
+            <a:off x="2167128" y="3291840"/>
+            <a:ext cx="7882128" cy="676656"/>
           </a:xfrm>
           <a:prstGeom prst="rect">
             <a:avLst/>
@@ -5268,7 +5863,364 @@
           <a:noFill/>
         </p:spPr>
         <p:txBody>
+          <a:bodyPr wrap="square" lIns="0" rIns="0" tIns="0" bIns="0" anchor="ctr">
+            <a:spAutoFit/>
+          </a:bodyPr>
+          <a:lstStyle/>
+          <a:p>
+            <a:pPr algn="ctr">
+              <a:spcAft>
+                <a:spcPts val="100"/>
+              </a:spcAft>
+            </a:pPr>
+            <a:r>
+              <a:rPr sz="1400" b="1" i="0">
+                <a:solidFill>
+                  <a:srgbClr val="FFFFFF"/>
+                </a:solidFill>
+                <a:latin typeface="Yu Gothic"/>
+                <a:ea typeface="Yu Gothic"/>
+                <a:cs typeface="Yu Gothic"/>
+              </a:rPr>
+              <a:t>戦略会議</a:t>
+            </a:r>
+            <a:r>
+              <a:rPr sz="1050" b="0" i="0">
+                <a:solidFill>
+                  <a:srgbClr val="BFD4FE"/>
+                </a:solidFill>
+                <a:latin typeface="Yu Gothic"/>
+                <a:ea typeface="Yu Gothic"/>
+                <a:cs typeface="Yu Gothic"/>
+              </a:rPr>
+              <a:t>（隔週90分・議長：永竹社長）</a:t>
+            </a:r>
+          </a:p>
+          <a:p>
+            <a:pPr algn="ctr">
+              <a:spcAft>
+                <a:spcPts val="0"/>
+              </a:spcAft>
+            </a:pPr>
+            <a:r>
+              <a:rPr sz="950" b="0" i="0">
+                <a:solidFill>
+                  <a:srgbClr val="BFD4FE"/>
+                </a:solidFill>
+                <a:latin typeface="Yu Gothic"/>
+                <a:ea typeface="Yu Gothic"/>
+                <a:cs typeface="Yu Gothic"/>
+              </a:rPr>
+              <a:t>決め切る場。リソース配分・部門横断の決定</a:t>
+            </a:r>
+          </a:p>
+        </p:txBody>
+      </p:sp>
+      <p:sp>
+        <p:nvSpPr>
+          <p:cNvPr id="11" name="Up Arrow 10"/>
+          <p:cNvSpPr/>
+          <p:nvPr/>
+        </p:nvSpPr>
+        <p:spPr>
+          <a:xfrm>
+            <a:off x="5852160" y="4096512"/>
+            <a:ext cx="457200" cy="274320"/>
+          </a:xfrm>
+          <a:prstGeom prst="upArrow">
+            <a:avLst/>
+          </a:prstGeom>
+          <a:solidFill>
+            <a:srgbClr val="2563EB"/>
+          </a:solidFill>
+          <a:ln>
+            <a:noFill/>
+          </a:ln>
+          <a:effectLst/>
+        </p:spPr>
+        <p:style>
+          <a:lnRef idx="1">
+            <a:schemeClr val="accent1"/>
+          </a:lnRef>
+          <a:fillRef idx="3">
+            <a:schemeClr val="accent1"/>
+          </a:fillRef>
+          <a:effectRef idx="2">
+            <a:schemeClr val="accent1"/>
+          </a:effectRef>
+          <a:fontRef idx="minor">
+            <a:schemeClr val="lt1"/>
+          </a:fontRef>
+        </p:style>
+        <p:txBody>
+          <a:bodyPr rtlCol="0" anchor="ctr"/>
+          <a:lstStyle/>
+          <a:p>
+            <a:pPr algn="ctr"/>
+          </a:p>
+        </p:txBody>
+      </p:sp>
+      <p:sp>
+        <p:nvSpPr>
+          <p:cNvPr id="12" name="TextBox 11"/>
+          <p:cNvSpPr txBox="1"/>
+          <p:nvPr/>
+        </p:nvSpPr>
+        <p:spPr>
+          <a:xfrm>
+            <a:off x="6400800" y="4105656"/>
+            <a:ext cx="5029200" cy="256032"/>
+          </a:xfrm>
+          <a:prstGeom prst="rect">
+            <a:avLst/>
+          </a:prstGeom>
+          <a:noFill/>
+        </p:spPr>
+        <p:txBody>
           <a:bodyPr wrap="square" lIns="0" rIns="0" tIns="0" bIns="0">
+            <a:spAutoFit/>
+          </a:bodyPr>
+          <a:lstStyle/>
+          <a:p>
+            <a:pPr algn="l">
+              <a:spcAft>
+                <a:spcPts val="400"/>
+              </a:spcAft>
+            </a:pPr>
+            <a:r>
+              <a:rPr sz="950" b="1" i="0">
+                <a:solidFill>
+                  <a:srgbClr val="2563EB"/>
+                </a:solidFill>
+                <a:latin typeface="Yu Gothic"/>
+                <a:ea typeface="Yu Gothic"/>
+                <a:cs typeface="Yu Gothic"/>
+              </a:rPr>
+              <a:t>分科会で決め切れない論点</a:t>
+            </a:r>
+          </a:p>
+        </p:txBody>
+      </p:sp>
+      <p:sp>
+        <p:nvSpPr>
+          <p:cNvPr id="13" name="Rectangle 12"/>
+          <p:cNvSpPr/>
+          <p:nvPr/>
+        </p:nvSpPr>
+        <p:spPr>
+          <a:xfrm>
+            <a:off x="1947672" y="4462272"/>
+            <a:ext cx="8321040" cy="841248"/>
+          </a:xfrm>
+          <a:prstGeom prst="rect">
+            <a:avLst/>
+          </a:prstGeom>
+          <a:solidFill>
+            <a:srgbClr val="4B76D8"/>
+          </a:solidFill>
+          <a:ln>
+            <a:noFill/>
+          </a:ln>
+          <a:effectLst/>
+        </p:spPr>
+        <p:style>
+          <a:lnRef idx="1">
+            <a:schemeClr val="accent1"/>
+          </a:lnRef>
+          <a:fillRef idx="3">
+            <a:schemeClr val="accent1"/>
+          </a:fillRef>
+          <a:effectRef idx="2">
+            <a:schemeClr val="accent1"/>
+          </a:effectRef>
+          <a:fontRef idx="minor">
+            <a:schemeClr val="lt1"/>
+          </a:fontRef>
+        </p:style>
+        <p:txBody>
+          <a:bodyPr rtlCol="0" anchor="ctr"/>
+          <a:lstStyle/>
+          <a:p>
+            <a:pPr algn="ctr"/>
+          </a:p>
+        </p:txBody>
+      </p:sp>
+      <p:sp>
+        <p:nvSpPr>
+          <p:cNvPr id="14" name="TextBox 13"/>
+          <p:cNvSpPr txBox="1"/>
+          <p:nvPr/>
+        </p:nvSpPr>
+        <p:spPr>
+          <a:xfrm>
+            <a:off x="2167128" y="4553712"/>
+            <a:ext cx="7882128" cy="676656"/>
+          </a:xfrm>
+          <a:prstGeom prst="rect">
+            <a:avLst/>
+          </a:prstGeom>
+          <a:noFill/>
+        </p:spPr>
+        <p:txBody>
+          <a:bodyPr wrap="square" lIns="0" rIns="0" tIns="0" bIns="0" anchor="ctr">
+            <a:spAutoFit/>
+          </a:bodyPr>
+          <a:lstStyle/>
+          <a:p>
+            <a:pPr algn="ctr">
+              <a:spcAft>
+                <a:spcPts val="100"/>
+              </a:spcAft>
+            </a:pPr>
+            <a:r>
+              <a:rPr sz="1400" b="1" i="0">
+                <a:solidFill>
+                  <a:srgbClr val="FFFFFF"/>
+                </a:solidFill>
+                <a:latin typeface="Yu Gothic"/>
+                <a:ea typeface="Yu Gothic"/>
+                <a:cs typeface="Yu Gothic"/>
+              </a:rPr>
+              <a:t>分科会×3</a:t>
+            </a:r>
+            <a:r>
+              <a:rPr sz="1050" b="0" i="0">
+                <a:solidFill>
+                  <a:srgbClr val="BFD4FE"/>
+                </a:solidFill>
+                <a:latin typeface="Yu Gothic"/>
+                <a:ea typeface="Yu Gothic"/>
+                <a:cs typeface="Yu Gothic"/>
+              </a:rPr>
+              <a:t>（週次75分・黒澤／南谷／高橋）</a:t>
+            </a:r>
+          </a:p>
+          <a:p>
+            <a:pPr algn="ctr">
+              <a:spcAft>
+                <a:spcPts val="0"/>
+              </a:spcAft>
+            </a:pPr>
+            <a:r>
+              <a:rPr sz="950" b="0" i="0">
+                <a:solidFill>
+                  <a:srgbClr val="BFD4FE"/>
+                </a:solidFill>
+                <a:latin typeface="Yu Gothic"/>
+                <a:ea typeface="Yu Gothic"/>
+                <a:cs typeface="Yu Gothic"/>
+              </a:rPr>
+              <a:t>接点づくり／ライセンス営業改革／経営基盤強化</a:t>
+            </a:r>
+          </a:p>
+        </p:txBody>
+      </p:sp>
+      <p:sp>
+        <p:nvSpPr>
+          <p:cNvPr id="15" name="Rectangle 14"/>
+          <p:cNvSpPr/>
+          <p:nvPr/>
+        </p:nvSpPr>
+        <p:spPr>
+          <a:xfrm>
+            <a:off x="502920" y="5742432"/>
+            <a:ext cx="11183112" cy="603504"/>
+          </a:xfrm>
+          <a:prstGeom prst="rect">
+            <a:avLst/>
+          </a:prstGeom>
+          <a:solidFill>
+            <a:srgbClr val="EAF1FE"/>
+          </a:solidFill>
+          <a:ln>
+            <a:noFill/>
+          </a:ln>
+          <a:effectLst/>
+        </p:spPr>
+        <p:style>
+          <a:lnRef idx="1">
+            <a:schemeClr val="accent1"/>
+          </a:lnRef>
+          <a:fillRef idx="3">
+            <a:schemeClr val="accent1"/>
+          </a:fillRef>
+          <a:effectRef idx="2">
+            <a:schemeClr val="accent1"/>
+          </a:effectRef>
+          <a:fontRef idx="minor">
+            <a:schemeClr val="lt1"/>
+          </a:fontRef>
+        </p:style>
+        <p:txBody>
+          <a:bodyPr rtlCol="0" anchor="ctr"/>
+          <a:lstStyle/>
+          <a:p>
+            <a:pPr algn="ctr"/>
+          </a:p>
+        </p:txBody>
+      </p:sp>
+      <p:sp>
+        <p:nvSpPr>
+          <p:cNvPr id="16" name="Rectangle 15"/>
+          <p:cNvSpPr/>
+          <p:nvPr/>
+        </p:nvSpPr>
+        <p:spPr>
+          <a:xfrm>
+            <a:off x="502920" y="5742432"/>
+            <a:ext cx="38100" cy="603504"/>
+          </a:xfrm>
+          <a:prstGeom prst="rect">
+            <a:avLst/>
+          </a:prstGeom>
+          <a:solidFill>
+            <a:srgbClr val="2563EB"/>
+          </a:solidFill>
+          <a:ln>
+            <a:noFill/>
+          </a:ln>
+          <a:effectLst/>
+        </p:spPr>
+        <p:style>
+          <a:lnRef idx="1">
+            <a:schemeClr val="accent1"/>
+          </a:lnRef>
+          <a:fillRef idx="3">
+            <a:schemeClr val="accent1"/>
+          </a:fillRef>
+          <a:effectRef idx="2">
+            <a:schemeClr val="accent1"/>
+          </a:effectRef>
+          <a:fontRef idx="minor">
+            <a:schemeClr val="lt1"/>
+          </a:fontRef>
+        </p:style>
+        <p:txBody>
+          <a:bodyPr rtlCol="0" anchor="ctr"/>
+          <a:lstStyle/>
+          <a:p>
+            <a:pPr algn="ctr"/>
+          </a:p>
+        </p:txBody>
+      </p:sp>
+      <p:sp>
+        <p:nvSpPr>
+          <p:cNvPr id="17" name="TextBox 16"/>
+          <p:cNvSpPr txBox="1"/>
+          <p:nvPr/>
+        </p:nvSpPr>
+        <p:spPr>
+          <a:xfrm>
+            <a:off x="685800" y="5815584"/>
+            <a:ext cx="10881360" cy="493776"/>
+          </a:xfrm>
+          <a:prstGeom prst="rect">
+            <a:avLst/>
+          </a:prstGeom>
+          <a:noFill/>
+        </p:spPr>
+        <p:txBody>
+          <a:bodyPr wrap="square" lIns="0" rIns="0" tIns="0" bIns="0" anchor="ctr">
             <a:spAutoFit/>
           </a:bodyPr>
           <a:lstStyle/>
@@ -5279,35 +6231,46 @@
               </a:spcAft>
             </a:pPr>
             <a:r>
-              <a:rPr sz="1900" b="1" i="0">
-                <a:solidFill>
-                  <a:srgbClr val="262630"/>
+              <a:rPr sz="1000" b="1" i="0">
+                <a:solidFill>
+                  <a:srgbClr val="2563EB"/>
                 </a:solidFill>
                 <a:latin typeface="Yu Gothic"/>
                 <a:ea typeface="Yu Gothic"/>
                 <a:cs typeface="Yu Gothic"/>
               </a:rPr>
-              <a:t>会議体系のなかでの点検会議の位置づけ</a:t>
-            </a:r>
-          </a:p>
-        </p:txBody>
-      </p:sp>
-      <p:sp>
-        <p:nvSpPr>
-          <p:cNvPr id="4" name="Rectangle 3"/>
+              <a:t>原則：</a:t>
+            </a:r>
+            <a:r>
+              <a:rPr sz="1000" b="0" i="0">
+                <a:solidFill>
+                  <a:srgbClr val="1B1B26"/>
+                </a:solidFill>
+                <a:latin typeface="Yu Gothic"/>
+                <a:ea typeface="Yu Gothic"/>
+                <a:cs typeface="Yu Gothic"/>
+              </a:rPr>
+              <a:t>下で決められることは下で決め、会長には「会長にしか決められないこと」だけを、選択肢と推奨案の形でお持ちします</a:t>
+            </a:r>
+          </a:p>
+        </p:txBody>
+      </p:sp>
+      <p:sp>
+        <p:nvSpPr>
+          <p:cNvPr id="18" name="Rectangle 17"/>
           <p:cNvSpPr/>
           <p:nvPr/>
         </p:nvSpPr>
         <p:spPr>
           <a:xfrm>
-            <a:off x="502920" y="1389888"/>
-            <a:ext cx="1463040" cy="33020"/>
+            <a:off x="502920" y="6510528"/>
+            <a:ext cx="11183112" cy="15240"/>
           </a:xfrm>
           <a:prstGeom prst="rect">
             <a:avLst/>
           </a:prstGeom>
           <a:solidFill>
-            <a:srgbClr val="7823DC"/>
+            <a:srgbClr val="E5E7EB"/>
           </a:solidFill>
           <a:ln>
             <a:noFill/>
@@ -5338,172 +6301,14 @@
       </p:sp>
       <p:sp>
         <p:nvSpPr>
-          <p:cNvPr id="5" name="Rectangle 4"/>
-          <p:cNvSpPr/>
-          <p:nvPr/>
-        </p:nvSpPr>
-        <p:spPr>
-          <a:xfrm>
-            <a:off x="1947672" y="1938528"/>
-            <a:ext cx="8321040" cy="841248"/>
-          </a:xfrm>
-          <a:prstGeom prst="rect">
-            <a:avLst/>
-          </a:prstGeom>
-          <a:solidFill>
-            <a:srgbClr val="3A106E"/>
-          </a:solidFill>
-          <a:ln>
-            <a:noFill/>
-          </a:ln>
-          <a:effectLst/>
-        </p:spPr>
-        <p:style>
-          <a:lnRef idx="1">
-            <a:schemeClr val="accent1"/>
-          </a:lnRef>
-          <a:fillRef idx="3">
-            <a:schemeClr val="accent1"/>
-          </a:fillRef>
-          <a:effectRef idx="2">
-            <a:schemeClr val="accent1"/>
-          </a:effectRef>
-          <a:fontRef idx="minor">
-            <a:schemeClr val="lt1"/>
-          </a:fontRef>
-        </p:style>
-        <p:txBody>
-          <a:bodyPr rtlCol="0" anchor="ctr"/>
-          <a:lstStyle/>
-          <a:p>
-            <a:pPr algn="ctr"/>
-          </a:p>
-        </p:txBody>
-      </p:sp>
-      <p:sp>
-        <p:nvSpPr>
-          <p:cNvPr id="6" name="TextBox 5"/>
+          <p:cNvPr id="19" name="TextBox 18"/>
           <p:cNvSpPr txBox="1"/>
           <p:nvPr/>
         </p:nvSpPr>
         <p:spPr>
           <a:xfrm>
-            <a:off x="2167128" y="2029968"/>
-            <a:ext cx="7882128" cy="676656"/>
-          </a:xfrm>
-          <a:prstGeom prst="rect">
-            <a:avLst/>
-          </a:prstGeom>
-          <a:noFill/>
-        </p:spPr>
-        <p:txBody>
-          <a:bodyPr wrap="square" lIns="0" rIns="0" tIns="0" bIns="0" anchor="ctr">
-            <a:spAutoFit/>
-          </a:bodyPr>
-          <a:lstStyle/>
-          <a:p>
-            <a:pPr algn="ctr">
-              <a:spcAft>
-                <a:spcPts val="100"/>
-              </a:spcAft>
-            </a:pPr>
-            <a:r>
-              <a:rPr sz="1400" b="1" i="0">
-                <a:solidFill>
-                  <a:srgbClr val="FFFFFF"/>
-                </a:solidFill>
-                <a:latin typeface="Yu Gothic"/>
-                <a:ea typeface="Yu Gothic"/>
-                <a:cs typeface="Yu Gothic"/>
-              </a:rPr>
-              <a:t>点検会議</a:t>
-            </a:r>
-            <a:r>
-              <a:rPr sz="1050" b="0" i="0">
-                <a:solidFill>
-                  <a:srgbClr val="E0D2F6"/>
-                </a:solidFill>
-                <a:latin typeface="Yu Gothic"/>
-                <a:ea typeface="Yu Gothic"/>
-                <a:cs typeface="Yu Gothic"/>
-              </a:rPr>
-              <a:t>（月次60分・議長：山本会長）</a:t>
-            </a:r>
-          </a:p>
-          <a:p>
-            <a:pPr algn="ctr">
-              <a:spcAft>
-                <a:spcPts val="0"/>
-              </a:spcAft>
-            </a:pPr>
-            <a:r>
-              <a:rPr sz="950" b="0" i="0">
-                <a:solidFill>
-                  <a:srgbClr val="E0D2F6"/>
-                </a:solidFill>
-                <a:latin typeface="Yu Gothic"/>
-                <a:ea typeface="Yu Gothic"/>
-                <a:cs typeface="Yu Gothic"/>
-              </a:rPr>
-              <a:t>重要テーマの意思決定・優先順位・改革が約束どおり進んでいるかの点検</a:t>
-            </a:r>
-          </a:p>
-        </p:txBody>
-      </p:sp>
-      <p:sp>
-        <p:nvSpPr>
-          <p:cNvPr id="7" name="Up Arrow 6"/>
-          <p:cNvSpPr/>
-          <p:nvPr/>
-        </p:nvSpPr>
-        <p:spPr>
-          <a:xfrm>
-            <a:off x="5852160" y="2834640"/>
-            <a:ext cx="457200" cy="274320"/>
-          </a:xfrm>
-          <a:prstGeom prst="upArrow">
-            <a:avLst/>
-          </a:prstGeom>
-          <a:solidFill>
-            <a:srgbClr val="7823DC"/>
-          </a:solidFill>
-          <a:ln>
-            <a:noFill/>
-          </a:ln>
-          <a:effectLst/>
-        </p:spPr>
-        <p:style>
-          <a:lnRef idx="1">
-            <a:schemeClr val="accent1"/>
-          </a:lnRef>
-          <a:fillRef idx="3">
-            <a:schemeClr val="accent1"/>
-          </a:fillRef>
-          <a:effectRef idx="2">
-            <a:schemeClr val="accent1"/>
-          </a:effectRef>
-          <a:fontRef idx="minor">
-            <a:schemeClr val="lt1"/>
-          </a:fontRef>
-        </p:style>
-        <p:txBody>
-          <a:bodyPr rtlCol="0" anchor="ctr"/>
-          <a:lstStyle/>
-          <a:p>
-            <a:pPr algn="ctr"/>
-          </a:p>
-        </p:txBody>
-      </p:sp>
-      <p:sp>
-        <p:nvSpPr>
-          <p:cNvPr id="8" name="TextBox 7"/>
-          <p:cNvSpPr txBox="1"/>
-          <p:nvPr/>
-        </p:nvSpPr>
-        <p:spPr>
-          <a:xfrm>
-            <a:off x="6400800" y="2843784"/>
-            <a:ext cx="5029200" cy="256032"/>
+            <a:off x="502920" y="6565392"/>
+            <a:ext cx="8686800" cy="274320"/>
           </a:xfrm>
           <a:prstGeom prst="rect">
             <a:avLst/>
@@ -5522,547 +6327,9 @@
               </a:spcAft>
             </a:pPr>
             <a:r>
-              <a:rPr sz="950" b="1" i="0">
-                <a:solidFill>
-                  <a:srgbClr val="7823DC"/>
-                </a:solidFill>
-                <a:latin typeface="Yu Gothic"/>
-                <a:ea typeface="Yu Gothic"/>
-                <a:cs typeface="Yu Gothic"/>
-              </a:rPr>
-              <a:t>会長のご判断が必要な論点のみ（1回3件以内）</a:t>
-            </a:r>
-          </a:p>
-        </p:txBody>
-      </p:sp>
-      <p:sp>
-        <p:nvSpPr>
-          <p:cNvPr id="9" name="Rectangle 8"/>
-          <p:cNvSpPr/>
-          <p:nvPr/>
-        </p:nvSpPr>
-        <p:spPr>
-          <a:xfrm>
-            <a:off x="1947672" y="3200400"/>
-            <a:ext cx="8321040" cy="841248"/>
-          </a:xfrm>
-          <a:prstGeom prst="rect">
-            <a:avLst/>
-          </a:prstGeom>
-          <a:solidFill>
-            <a:srgbClr val="7823DC"/>
-          </a:solidFill>
-          <a:ln>
-            <a:noFill/>
-          </a:ln>
-          <a:effectLst/>
-        </p:spPr>
-        <p:style>
-          <a:lnRef idx="1">
-            <a:schemeClr val="accent1"/>
-          </a:lnRef>
-          <a:fillRef idx="3">
-            <a:schemeClr val="accent1"/>
-          </a:fillRef>
-          <a:effectRef idx="2">
-            <a:schemeClr val="accent1"/>
-          </a:effectRef>
-          <a:fontRef idx="minor">
-            <a:schemeClr val="lt1"/>
-          </a:fontRef>
-        </p:style>
-        <p:txBody>
-          <a:bodyPr rtlCol="0" anchor="ctr"/>
-          <a:lstStyle/>
-          <a:p>
-            <a:pPr algn="ctr"/>
-          </a:p>
-        </p:txBody>
-      </p:sp>
-      <p:sp>
-        <p:nvSpPr>
-          <p:cNvPr id="10" name="TextBox 9"/>
-          <p:cNvSpPr txBox="1"/>
-          <p:nvPr/>
-        </p:nvSpPr>
-        <p:spPr>
-          <a:xfrm>
-            <a:off x="2167128" y="3291840"/>
-            <a:ext cx="7882128" cy="676656"/>
-          </a:xfrm>
-          <a:prstGeom prst="rect">
-            <a:avLst/>
-          </a:prstGeom>
-          <a:noFill/>
-        </p:spPr>
-        <p:txBody>
-          <a:bodyPr wrap="square" lIns="0" rIns="0" tIns="0" bIns="0" anchor="ctr">
-            <a:spAutoFit/>
-          </a:bodyPr>
-          <a:lstStyle/>
-          <a:p>
-            <a:pPr algn="ctr">
-              <a:spcAft>
-                <a:spcPts val="100"/>
-              </a:spcAft>
-            </a:pPr>
-            <a:r>
-              <a:rPr sz="1400" b="1" i="0">
-                <a:solidFill>
-                  <a:srgbClr val="FFFFFF"/>
-                </a:solidFill>
-                <a:latin typeface="Yu Gothic"/>
-                <a:ea typeface="Yu Gothic"/>
-                <a:cs typeface="Yu Gothic"/>
-              </a:rPr>
-              <a:t>戦略会議</a:t>
-            </a:r>
-            <a:r>
-              <a:rPr sz="1050" b="0" i="0">
-                <a:solidFill>
-                  <a:srgbClr val="E0D2F6"/>
-                </a:solidFill>
-                <a:latin typeface="Yu Gothic"/>
-                <a:ea typeface="Yu Gothic"/>
-                <a:cs typeface="Yu Gothic"/>
-              </a:rPr>
-              <a:t>（隔週90分・議長：永竹社長）</a:t>
-            </a:r>
-          </a:p>
-          <a:p>
-            <a:pPr algn="ctr">
-              <a:spcAft>
-                <a:spcPts val="0"/>
-              </a:spcAft>
-            </a:pPr>
-            <a:r>
-              <a:rPr sz="950" b="0" i="0">
-                <a:solidFill>
-                  <a:srgbClr val="E0D2F6"/>
-                </a:solidFill>
-                <a:latin typeface="Yu Gothic"/>
-                <a:ea typeface="Yu Gothic"/>
-                <a:cs typeface="Yu Gothic"/>
-              </a:rPr>
-              <a:t>決め切る場。リソース配分・部門横断の決定</a:t>
-            </a:r>
-          </a:p>
-        </p:txBody>
-      </p:sp>
-      <p:sp>
-        <p:nvSpPr>
-          <p:cNvPr id="11" name="Up Arrow 10"/>
-          <p:cNvSpPr/>
-          <p:nvPr/>
-        </p:nvSpPr>
-        <p:spPr>
-          <a:xfrm>
-            <a:off x="5852160" y="4096512"/>
-            <a:ext cx="457200" cy="274320"/>
-          </a:xfrm>
-          <a:prstGeom prst="upArrow">
-            <a:avLst/>
-          </a:prstGeom>
-          <a:solidFill>
-            <a:srgbClr val="7823DC"/>
-          </a:solidFill>
-          <a:ln>
-            <a:noFill/>
-          </a:ln>
-          <a:effectLst/>
-        </p:spPr>
-        <p:style>
-          <a:lnRef idx="1">
-            <a:schemeClr val="accent1"/>
-          </a:lnRef>
-          <a:fillRef idx="3">
-            <a:schemeClr val="accent1"/>
-          </a:fillRef>
-          <a:effectRef idx="2">
-            <a:schemeClr val="accent1"/>
-          </a:effectRef>
-          <a:fontRef idx="minor">
-            <a:schemeClr val="lt1"/>
-          </a:fontRef>
-        </p:style>
-        <p:txBody>
-          <a:bodyPr rtlCol="0" anchor="ctr"/>
-          <a:lstStyle/>
-          <a:p>
-            <a:pPr algn="ctr"/>
-          </a:p>
-        </p:txBody>
-      </p:sp>
-      <p:sp>
-        <p:nvSpPr>
-          <p:cNvPr id="12" name="TextBox 11"/>
-          <p:cNvSpPr txBox="1"/>
-          <p:nvPr/>
-        </p:nvSpPr>
-        <p:spPr>
-          <a:xfrm>
-            <a:off x="6400800" y="4105656"/>
-            <a:ext cx="5029200" cy="256032"/>
-          </a:xfrm>
-          <a:prstGeom prst="rect">
-            <a:avLst/>
-          </a:prstGeom>
-          <a:noFill/>
-        </p:spPr>
-        <p:txBody>
-          <a:bodyPr wrap="square" lIns="0" rIns="0" tIns="0" bIns="0">
-            <a:spAutoFit/>
-          </a:bodyPr>
-          <a:lstStyle/>
-          <a:p>
-            <a:pPr algn="l">
-              <a:spcAft>
-                <a:spcPts val="400"/>
-              </a:spcAft>
-            </a:pPr>
-            <a:r>
-              <a:rPr sz="950" b="1" i="0">
-                <a:solidFill>
-                  <a:srgbClr val="7823DC"/>
-                </a:solidFill>
-                <a:latin typeface="Yu Gothic"/>
-                <a:ea typeface="Yu Gothic"/>
-                <a:cs typeface="Yu Gothic"/>
-              </a:rPr>
-              <a:t>分科会で決め切れない論点</a:t>
-            </a:r>
-          </a:p>
-        </p:txBody>
-      </p:sp>
-      <p:sp>
-        <p:nvSpPr>
-          <p:cNvPr id="13" name="Rectangle 12"/>
-          <p:cNvSpPr/>
-          <p:nvPr/>
-        </p:nvSpPr>
-        <p:spPr>
-          <a:xfrm>
-            <a:off x="1947672" y="4462272"/>
-            <a:ext cx="8321040" cy="841248"/>
-          </a:xfrm>
-          <a:prstGeom prst="rect">
-            <a:avLst/>
-          </a:prstGeom>
-          <a:solidFill>
-            <a:srgbClr val="6B5E8A"/>
-          </a:solidFill>
-          <a:ln>
-            <a:noFill/>
-          </a:ln>
-          <a:effectLst/>
-        </p:spPr>
-        <p:style>
-          <a:lnRef idx="1">
-            <a:schemeClr val="accent1"/>
-          </a:lnRef>
-          <a:fillRef idx="3">
-            <a:schemeClr val="accent1"/>
-          </a:fillRef>
-          <a:effectRef idx="2">
-            <a:schemeClr val="accent1"/>
-          </a:effectRef>
-          <a:fontRef idx="minor">
-            <a:schemeClr val="lt1"/>
-          </a:fontRef>
-        </p:style>
-        <p:txBody>
-          <a:bodyPr rtlCol="0" anchor="ctr"/>
-          <a:lstStyle/>
-          <a:p>
-            <a:pPr algn="ctr"/>
-          </a:p>
-        </p:txBody>
-      </p:sp>
-      <p:sp>
-        <p:nvSpPr>
-          <p:cNvPr id="14" name="TextBox 13"/>
-          <p:cNvSpPr txBox="1"/>
-          <p:nvPr/>
-        </p:nvSpPr>
-        <p:spPr>
-          <a:xfrm>
-            <a:off x="2167128" y="4553712"/>
-            <a:ext cx="7882128" cy="676656"/>
-          </a:xfrm>
-          <a:prstGeom prst="rect">
-            <a:avLst/>
-          </a:prstGeom>
-          <a:noFill/>
-        </p:spPr>
-        <p:txBody>
-          <a:bodyPr wrap="square" lIns="0" rIns="0" tIns="0" bIns="0" anchor="ctr">
-            <a:spAutoFit/>
-          </a:bodyPr>
-          <a:lstStyle/>
-          <a:p>
-            <a:pPr algn="ctr">
-              <a:spcAft>
-                <a:spcPts val="100"/>
-              </a:spcAft>
-            </a:pPr>
-            <a:r>
-              <a:rPr sz="1400" b="1" i="0">
-                <a:solidFill>
-                  <a:srgbClr val="FFFFFF"/>
-                </a:solidFill>
-                <a:latin typeface="Yu Gothic"/>
-                <a:ea typeface="Yu Gothic"/>
-                <a:cs typeface="Yu Gothic"/>
-              </a:rPr>
-              <a:t>分科会×3</a:t>
-            </a:r>
-            <a:r>
-              <a:rPr sz="1050" b="0" i="0">
-                <a:solidFill>
-                  <a:srgbClr val="E0D2F6"/>
-                </a:solidFill>
-                <a:latin typeface="Yu Gothic"/>
-                <a:ea typeface="Yu Gothic"/>
-                <a:cs typeface="Yu Gothic"/>
-              </a:rPr>
-              <a:t>（週次75分・黒澤／南谷／高橋）</a:t>
-            </a:r>
-          </a:p>
-          <a:p>
-            <a:pPr algn="ctr">
-              <a:spcAft>
-                <a:spcPts val="0"/>
-              </a:spcAft>
-            </a:pPr>
-            <a:r>
-              <a:rPr sz="950" b="0" i="0">
-                <a:solidFill>
-                  <a:srgbClr val="E0D2F6"/>
-                </a:solidFill>
-                <a:latin typeface="Yu Gothic"/>
-                <a:ea typeface="Yu Gothic"/>
-                <a:cs typeface="Yu Gothic"/>
-              </a:rPr>
-              <a:t>接点づくり／ライセンス営業改革／経営基盤強化</a:t>
-            </a:r>
-          </a:p>
-        </p:txBody>
-      </p:sp>
-      <p:sp>
-        <p:nvSpPr>
-          <p:cNvPr id="15" name="Rectangle 14"/>
-          <p:cNvSpPr/>
-          <p:nvPr/>
-        </p:nvSpPr>
-        <p:spPr>
-          <a:xfrm>
-            <a:off x="502920" y="5742432"/>
-            <a:ext cx="11183112" cy="603504"/>
-          </a:xfrm>
-          <a:prstGeom prst="rect">
-            <a:avLst/>
-          </a:prstGeom>
-          <a:solidFill>
-            <a:srgbClr val="F3EFFB"/>
-          </a:solidFill>
-          <a:ln>
-            <a:noFill/>
-          </a:ln>
-          <a:effectLst/>
-        </p:spPr>
-        <p:style>
-          <a:lnRef idx="1">
-            <a:schemeClr val="accent1"/>
-          </a:lnRef>
-          <a:fillRef idx="3">
-            <a:schemeClr val="accent1"/>
-          </a:fillRef>
-          <a:effectRef idx="2">
-            <a:schemeClr val="accent1"/>
-          </a:effectRef>
-          <a:fontRef idx="minor">
-            <a:schemeClr val="lt1"/>
-          </a:fontRef>
-        </p:style>
-        <p:txBody>
-          <a:bodyPr rtlCol="0" anchor="ctr"/>
-          <a:lstStyle/>
-          <a:p>
-            <a:pPr algn="ctr"/>
-          </a:p>
-        </p:txBody>
-      </p:sp>
-      <p:sp>
-        <p:nvSpPr>
-          <p:cNvPr id="16" name="Rectangle 15"/>
-          <p:cNvSpPr/>
-          <p:nvPr/>
-        </p:nvSpPr>
-        <p:spPr>
-          <a:xfrm>
-            <a:off x="502920" y="5742432"/>
-            <a:ext cx="38100" cy="603504"/>
-          </a:xfrm>
-          <a:prstGeom prst="rect">
-            <a:avLst/>
-          </a:prstGeom>
-          <a:solidFill>
-            <a:srgbClr val="7823DC"/>
-          </a:solidFill>
-          <a:ln>
-            <a:noFill/>
-          </a:ln>
-          <a:effectLst/>
-        </p:spPr>
-        <p:style>
-          <a:lnRef idx="1">
-            <a:schemeClr val="accent1"/>
-          </a:lnRef>
-          <a:fillRef idx="3">
-            <a:schemeClr val="accent1"/>
-          </a:fillRef>
-          <a:effectRef idx="2">
-            <a:schemeClr val="accent1"/>
-          </a:effectRef>
-          <a:fontRef idx="minor">
-            <a:schemeClr val="lt1"/>
-          </a:fontRef>
-        </p:style>
-        <p:txBody>
-          <a:bodyPr rtlCol="0" anchor="ctr"/>
-          <a:lstStyle/>
-          <a:p>
-            <a:pPr algn="ctr"/>
-          </a:p>
-        </p:txBody>
-      </p:sp>
-      <p:sp>
-        <p:nvSpPr>
-          <p:cNvPr id="17" name="TextBox 16"/>
-          <p:cNvSpPr txBox="1"/>
-          <p:nvPr/>
-        </p:nvSpPr>
-        <p:spPr>
-          <a:xfrm>
-            <a:off x="685800" y="5815584"/>
-            <a:ext cx="10881360" cy="493776"/>
-          </a:xfrm>
-          <a:prstGeom prst="rect">
-            <a:avLst/>
-          </a:prstGeom>
-          <a:noFill/>
-        </p:spPr>
-        <p:txBody>
-          <a:bodyPr wrap="square" lIns="0" rIns="0" tIns="0" bIns="0" anchor="ctr">
-            <a:spAutoFit/>
-          </a:bodyPr>
-          <a:lstStyle/>
-          <a:p>
-            <a:pPr algn="l">
-              <a:spcAft>
-                <a:spcPts val="0"/>
-              </a:spcAft>
-            </a:pPr>
-            <a:r>
-              <a:rPr sz="1000" b="1" i="0">
-                <a:solidFill>
-                  <a:srgbClr val="7823DC"/>
-                </a:solidFill>
-                <a:latin typeface="Yu Gothic"/>
-                <a:ea typeface="Yu Gothic"/>
-                <a:cs typeface="Yu Gothic"/>
-              </a:rPr>
-              <a:t>原則：</a:t>
-            </a:r>
-            <a:r>
-              <a:rPr sz="1000" b="0" i="0">
-                <a:solidFill>
-                  <a:srgbClr val="262630"/>
-                </a:solidFill>
-                <a:latin typeface="Yu Gothic"/>
-                <a:ea typeface="Yu Gothic"/>
-                <a:cs typeface="Yu Gothic"/>
-              </a:rPr>
-              <a:t>下で決められることは下で決め、会長には「会長にしか決められないこと」だけを、選択肢と推奨案の形でお持ちします</a:t>
-            </a:r>
-          </a:p>
-        </p:txBody>
-      </p:sp>
-      <p:sp>
-        <p:nvSpPr>
-          <p:cNvPr id="18" name="Rectangle 17"/>
-          <p:cNvSpPr/>
-          <p:nvPr/>
-        </p:nvSpPr>
-        <p:spPr>
-          <a:xfrm>
-            <a:off x="502920" y="6510528"/>
-            <a:ext cx="11183112" cy="15240"/>
-          </a:xfrm>
-          <a:prstGeom prst="rect">
-            <a:avLst/>
-          </a:prstGeom>
-          <a:solidFill>
-            <a:srgbClr val="D9D9E0"/>
-          </a:solidFill>
-          <a:ln>
-            <a:noFill/>
-          </a:ln>
-          <a:effectLst/>
-        </p:spPr>
-        <p:style>
-          <a:lnRef idx="1">
-            <a:schemeClr val="accent1"/>
-          </a:lnRef>
-          <a:fillRef idx="3">
-            <a:schemeClr val="accent1"/>
-          </a:fillRef>
-          <a:effectRef idx="2">
-            <a:schemeClr val="accent1"/>
-          </a:effectRef>
-          <a:fontRef idx="minor">
-            <a:schemeClr val="lt1"/>
-          </a:fontRef>
-        </p:style>
-        <p:txBody>
-          <a:bodyPr rtlCol="0" anchor="ctr"/>
-          <a:lstStyle/>
-          <a:p>
-            <a:pPr algn="ctr"/>
-          </a:p>
-        </p:txBody>
-      </p:sp>
-      <p:sp>
-        <p:nvSpPr>
-          <p:cNvPr id="19" name="TextBox 18"/>
-          <p:cNvSpPr txBox="1"/>
-          <p:nvPr/>
-        </p:nvSpPr>
-        <p:spPr>
-          <a:xfrm>
-            <a:off x="502920" y="6565392"/>
-            <a:ext cx="8686800" cy="274320"/>
-          </a:xfrm>
-          <a:prstGeom prst="rect">
-            <a:avLst/>
-          </a:prstGeom>
-          <a:noFill/>
-        </p:spPr>
-        <p:txBody>
-          <a:bodyPr wrap="square" lIns="0" rIns="0" tIns="0" bIns="0">
-            <a:spAutoFit/>
-          </a:bodyPr>
-          <a:lstStyle/>
-          <a:p>
-            <a:pPr algn="l">
-              <a:spcAft>
-                <a:spcPts val="400"/>
-              </a:spcAft>
-            </a:pPr>
-            <a:r>
               <a:rPr sz="750" b="0" i="0">
                 <a:solidFill>
-                  <a:srgbClr val="8A8A99"/>
+                  <a:srgbClr val="8A8F9C"/>
                 </a:solidFill>
                 <a:latin typeface="Yu Gothic"/>
                 <a:ea typeface="Yu Gothic"/>
@@ -6103,7 +6370,7 @@
             <a:r>
               <a:rPr sz="900" b="0" i="0">
                 <a:solidFill>
-                  <a:srgbClr val="5F5F6E"/>
+                  <a:srgbClr val="6B7280"/>
                 </a:solidFill>
                 <a:latin typeface="Yu Gothic"/>
                 <a:ea typeface="Yu Gothic"/>
@@ -6134,35 +6401,55 @@
       <p:grpSpPr/>
       <p:sp>
         <p:nvSpPr>
-          <p:cNvPr id="2" name="TextBox 1"/>
-          <p:cNvSpPr txBox="1"/>
-          <p:nvPr/>
-        </p:nvSpPr>
-        <p:spPr>
-          <a:xfrm>
-            <a:off x="502920" y="256032"/>
-            <a:ext cx="11155680" cy="256032"/>
-          </a:xfrm>
-          <a:prstGeom prst="rect">
-            <a:avLst/>
-          </a:prstGeom>
-          <a:noFill/>
-        </p:spPr>
-        <p:txBody>
-          <a:bodyPr wrap="square" lIns="0" rIns="0" tIns="0" bIns="0">
-            <a:spAutoFit/>
-          </a:bodyPr>
+          <p:cNvPr id="2" name="Rounded Rectangle 1"/>
+          <p:cNvSpPr/>
+          <p:nvPr/>
+        </p:nvSpPr>
+        <p:spPr>
+          <a:xfrm>
+            <a:off x="502920" y="274320"/>
+            <a:ext cx="1627632" cy="274320"/>
+          </a:xfrm>
+          <a:prstGeom prst="roundRect">
+            <a:avLst>
+              <a:gd name="adj" fmla="val 50000"/>
+            </a:avLst>
+          </a:prstGeom>
+          <a:solidFill>
+            <a:srgbClr val="EAF1FE"/>
+          </a:solidFill>
+          <a:ln>
+            <a:noFill/>
+          </a:ln>
+          <a:effectLst/>
+        </p:spPr>
+        <p:style>
+          <a:lnRef idx="1">
+            <a:schemeClr val="accent1"/>
+          </a:lnRef>
+          <a:fillRef idx="3">
+            <a:schemeClr val="accent1"/>
+          </a:fillRef>
+          <a:effectRef idx="2">
+            <a:schemeClr val="accent1"/>
+          </a:effectRef>
+          <a:fontRef idx="minor">
+            <a:schemeClr val="lt1"/>
+          </a:fontRef>
+        </p:style>
+        <p:txBody>
+          <a:bodyPr rtlCol="0" anchor="ctr" wrap="none" lIns="109728" rIns="109728" tIns="0" bIns="0"/>
           <a:lstStyle/>
           <a:p>
             <a:pPr algn="l">
               <a:spcAft>
-                <a:spcPts val="400"/>
+                <a:spcPts val="0"/>
               </a:spcAft>
             </a:pPr>
             <a:r>
-              <a:rPr sz="1000" b="1" i="0">
-                <a:solidFill>
-                  <a:srgbClr val="7823DC"/>
+              <a:rPr sz="900" b="1" i="0">
+                <a:solidFill>
+                  <a:srgbClr val="2563EB"/>
                 </a:solidFill>
                 <a:latin typeface="Yu Gothic"/>
                 <a:ea typeface="Yu Gothic"/>
@@ -6181,8 +6468,8 @@
         </p:nvSpPr>
         <p:spPr>
           <a:xfrm>
-            <a:off x="502920" y="512064"/>
-            <a:ext cx="11155680" cy="868680"/>
+            <a:off x="502920" y="566928"/>
+            <a:ext cx="11155680" cy="804672"/>
           </a:xfrm>
           <a:prstGeom prst="rect">
             <a:avLst/>
@@ -6201,9 +6488,9 @@
               </a:spcAft>
             </a:pPr>
             <a:r>
-              <a:rPr sz="1900" b="1" i="0">
-                <a:solidFill>
-                  <a:srgbClr val="262630"/>
+              <a:rPr sz="1800" b="1" i="0">
+                <a:solidFill>
+                  <a:srgbClr val="1B1B26"/>
                 </a:solidFill>
                 <a:latin typeface="Yu Gothic"/>
                 <a:ea typeface="Yu Gothic"/>
@@ -6222,14 +6509,14 @@
         </p:nvSpPr>
         <p:spPr>
           <a:xfrm>
-            <a:off x="502920" y="1389888"/>
-            <a:ext cx="1463040" cy="33020"/>
+            <a:off x="502920" y="1335024"/>
+            <a:ext cx="11183112" cy="11430"/>
           </a:xfrm>
           <a:prstGeom prst="rect">
             <a:avLst/>
           </a:prstGeom>
           <a:solidFill>
-            <a:srgbClr val="7823DC"/>
+            <a:srgbClr val="E5E7EB"/>
           </a:solidFill>
           <a:ln>
             <a:noFill/>
@@ -6273,9 +6560,7 @@
         <a:graphic>
           <a:graphicData uri="http://schemas.openxmlformats.org/drawingml/2006/table">
             <a:tbl>
-              <a:tblPr firstRow="1" bandRow="1">
-                <a:tableStyleId>{5C22544A-7EE6-4342-B048-85BDC9FD1C3A}</a:tableStyleId>
-              </a:tblPr>
+              <a:tblPr firstRow="0" bandRow="0"/>
               <a:tblGrid>
                 <a:gridCol w="1191643"/>
                 <a:gridCol w="9991468"/>
@@ -6294,7 +6579,7 @@
                       <a:r>
                         <a:rPr sz="1050" b="1" i="0">
                           <a:solidFill>
-                            <a:srgbClr val="FFFFFF"/>
+                            <a:srgbClr val="1B1B26"/>
                           </a:solidFill>
                           <a:latin typeface="Yu Gothic"/>
                           <a:ea typeface="Yu Gothic"/>
@@ -6304,10 +6589,20 @@
                       </a:r>
                     </a:p>
                   </a:txBody>
-                  <a:tcPr marL="54864" marR="54864" marT="18288" marB="18288" anchor="ctr">
+                  <a:tcPr marL="73152" marR="54864" marT="18288" marB="18288" anchor="ctr">
                     <a:solidFill>
-                      <a:srgbClr val="3A106E"/>
+                      <a:srgbClr val="EAF1FE"/>
                     </a:solidFill>
+                    <a:lnB w="15240" cap="flat">
+                      <a:solidFill>
+                        <a:srgbClr val="2563EB"/>
+                      </a:solidFill>
+                    </a:lnB>
+                    <a:lnT w="15240" cap="flat">
+                      <a:solidFill>
+                        <a:srgbClr val="2563EB"/>
+                      </a:solidFill>
+                    </a:lnT>
                   </a:tcPr>
                 </a:tc>
                 <a:tc>
@@ -6323,7 +6618,7 @@
                       <a:r>
                         <a:rPr sz="1050" b="1" i="0">
                           <a:solidFill>
-                            <a:srgbClr val="FFFFFF"/>
+                            <a:srgbClr val="1B1B26"/>
                           </a:solidFill>
                           <a:latin typeface="Yu Gothic"/>
                           <a:ea typeface="Yu Gothic"/>
@@ -6333,10 +6628,20 @@
                       </a:r>
                     </a:p>
                   </a:txBody>
-                  <a:tcPr marL="54864" marR="54864" marT="18288" marB="18288" anchor="ctr">
+                  <a:tcPr marL="73152" marR="54864" marT="18288" marB="18288" anchor="ctr">
                     <a:solidFill>
-                      <a:srgbClr val="3A106E"/>
+                      <a:srgbClr val="EAF1FE"/>
                     </a:solidFill>
+                    <a:lnB w="15240" cap="flat">
+                      <a:solidFill>
+                        <a:srgbClr val="2563EB"/>
+                      </a:solidFill>
+                    </a:lnB>
+                    <a:lnT w="15240" cap="flat">
+                      <a:solidFill>
+                        <a:srgbClr val="2563EB"/>
+                      </a:solidFill>
+                    </a:lnT>
                   </a:tcPr>
                 </a:tc>
               </a:tr>
@@ -6354,7 +6659,7 @@
                       <a:r>
                         <a:rPr sz="1050" b="1" i="0">
                           <a:solidFill>
-                            <a:srgbClr val="3A106E"/>
+                            <a:srgbClr val="2563EB"/>
                           </a:solidFill>
                           <a:latin typeface="Yu Gothic"/>
                           <a:ea typeface="Yu Gothic"/>
@@ -6364,10 +6669,15 @@
                       </a:r>
                     </a:p>
                   </a:txBody>
-                  <a:tcPr marL="54864" marR="54864" marT="18288" marB="18288" anchor="ctr">
+                  <a:tcPr marL="73152" marR="54864" marT="18288" marB="18288" anchor="ctr">
                     <a:solidFill>
                       <a:srgbClr val="FFFFFF"/>
                     </a:solidFill>
+                    <a:lnB w="9525" cap="flat">
+                      <a:solidFill>
+                        <a:srgbClr val="E5E7EB"/>
+                      </a:solidFill>
+                    </a:lnB>
                   </a:tcPr>
                 </a:tc>
                 <a:tc>
@@ -6383,7 +6693,7 @@
                       <a:r>
                         <a:rPr sz="1050" b="0" i="0">
                           <a:solidFill>
-                            <a:srgbClr val="262630"/>
+                            <a:srgbClr val="1B1B26"/>
                           </a:solidFill>
                           <a:latin typeface="Yu Gothic"/>
                           <a:ea typeface="Yu Gothic"/>
@@ -6393,10 +6703,15 @@
                       </a:r>
                     </a:p>
                   </a:txBody>
-                  <a:tcPr marL="54864" marR="54864" marT="18288" marB="18288" anchor="ctr">
+                  <a:tcPr marL="73152" marR="54864" marT="18288" marB="18288" anchor="ctr">
                     <a:solidFill>
                       <a:srgbClr val="FFFFFF"/>
                     </a:solidFill>
+                    <a:lnB w="9525" cap="flat">
+                      <a:solidFill>
+                        <a:srgbClr val="E5E7EB"/>
+                      </a:solidFill>
+                    </a:lnB>
                   </a:tcPr>
                 </a:tc>
               </a:tr>
@@ -6414,7 +6729,7 @@
                       <a:r>
                         <a:rPr sz="1050" b="1" i="0">
                           <a:solidFill>
-                            <a:srgbClr val="3A106E"/>
+                            <a:srgbClr val="2563EB"/>
                           </a:solidFill>
                           <a:latin typeface="Yu Gothic"/>
                           <a:ea typeface="Yu Gothic"/>
@@ -6424,10 +6739,15 @@
                       </a:r>
                     </a:p>
                   </a:txBody>
-                  <a:tcPr marL="54864" marR="54864" marT="18288" marB="18288" anchor="ctr">
+                  <a:tcPr marL="73152" marR="54864" marT="18288" marB="18288" anchor="ctr">
                     <a:solidFill>
-                      <a:srgbClr val="F7F7F9"/>
+                      <a:srgbClr val="FFFFFF"/>
                     </a:solidFill>
+                    <a:lnB w="9525" cap="flat">
+                      <a:solidFill>
+                        <a:srgbClr val="E5E7EB"/>
+                      </a:solidFill>
+                    </a:lnB>
                   </a:tcPr>
                 </a:tc>
                 <a:tc>
@@ -6443,7 +6763,7 @@
                       <a:r>
                         <a:rPr sz="1050" b="0" i="0">
                           <a:solidFill>
-                            <a:srgbClr val="262630"/>
+                            <a:srgbClr val="1B1B26"/>
                           </a:solidFill>
                           <a:latin typeface="Yu Gothic"/>
                           <a:ea typeface="Yu Gothic"/>
@@ -6453,10 +6773,15 @@
                       </a:r>
                     </a:p>
                   </a:txBody>
-                  <a:tcPr marL="54864" marR="54864" marT="18288" marB="18288" anchor="ctr">
+                  <a:tcPr marL="73152" marR="54864" marT="18288" marB="18288" anchor="ctr">
                     <a:solidFill>
-                      <a:srgbClr val="F7F7F9"/>
+                      <a:srgbClr val="FFFFFF"/>
                     </a:solidFill>
+                    <a:lnB w="9525" cap="flat">
+                      <a:solidFill>
+                        <a:srgbClr val="E5E7EB"/>
+                      </a:solidFill>
+                    </a:lnB>
                   </a:tcPr>
                 </a:tc>
               </a:tr>
@@ -6474,7 +6799,7 @@
                       <a:r>
                         <a:rPr sz="1050" b="1" i="0">
                           <a:solidFill>
-                            <a:srgbClr val="3A106E"/>
+                            <a:srgbClr val="2563EB"/>
                           </a:solidFill>
                           <a:latin typeface="Yu Gothic"/>
                           <a:ea typeface="Yu Gothic"/>
@@ -6484,10 +6809,15 @@
                       </a:r>
                     </a:p>
                   </a:txBody>
-                  <a:tcPr marL="54864" marR="54864" marT="18288" marB="18288" anchor="ctr">
+                  <a:tcPr marL="73152" marR="54864" marT="18288" marB="18288" anchor="ctr">
                     <a:solidFill>
                       <a:srgbClr val="FFFFFF"/>
                     </a:solidFill>
+                    <a:lnB w="9525" cap="flat">
+                      <a:solidFill>
+                        <a:srgbClr val="E5E7EB"/>
+                      </a:solidFill>
+                    </a:lnB>
                   </a:tcPr>
                 </a:tc>
                 <a:tc>
@@ -6503,7 +6833,7 @@
                       <a:r>
                         <a:rPr sz="1050" b="0" i="0">
                           <a:solidFill>
-                            <a:srgbClr val="262630"/>
+                            <a:srgbClr val="1B1B26"/>
                           </a:solidFill>
                           <a:latin typeface="Yu Gothic"/>
                           <a:ea typeface="Yu Gothic"/>
@@ -6513,10 +6843,15 @@
                       </a:r>
                     </a:p>
                   </a:txBody>
-                  <a:tcPr marL="54864" marR="54864" marT="18288" marB="18288" anchor="ctr">
+                  <a:tcPr marL="73152" marR="54864" marT="18288" marB="18288" anchor="ctr">
                     <a:solidFill>
                       <a:srgbClr val="FFFFFF"/>
                     </a:solidFill>
+                    <a:lnB w="9525" cap="flat">
+                      <a:solidFill>
+                        <a:srgbClr val="E5E7EB"/>
+                      </a:solidFill>
+                    </a:lnB>
                   </a:tcPr>
                 </a:tc>
               </a:tr>
@@ -6534,7 +6869,7 @@
                       <a:r>
                         <a:rPr sz="1050" b="1" i="0">
                           <a:solidFill>
-                            <a:srgbClr val="3A106E"/>
+                            <a:srgbClr val="2563EB"/>
                           </a:solidFill>
                           <a:latin typeface="Yu Gothic"/>
                           <a:ea typeface="Yu Gothic"/>
@@ -6544,10 +6879,15 @@
                       </a:r>
                     </a:p>
                   </a:txBody>
-                  <a:tcPr marL="54864" marR="54864" marT="18288" marB="18288" anchor="ctr">
+                  <a:tcPr marL="73152" marR="54864" marT="18288" marB="18288" anchor="ctr">
                     <a:solidFill>
-                      <a:srgbClr val="F7F7F9"/>
+                      <a:srgbClr val="FFFFFF"/>
                     </a:solidFill>
+                    <a:lnB w="9525" cap="flat">
+                      <a:solidFill>
+                        <a:srgbClr val="E5E7EB"/>
+                      </a:solidFill>
+                    </a:lnB>
                   </a:tcPr>
                 </a:tc>
                 <a:tc>
@@ -6563,7 +6903,7 @@
                       <a:r>
                         <a:rPr sz="1050" b="0" i="0">
                           <a:solidFill>
-                            <a:srgbClr val="262630"/>
+                            <a:srgbClr val="1B1B26"/>
                           </a:solidFill>
                           <a:latin typeface="Yu Gothic"/>
                           <a:ea typeface="Yu Gothic"/>
@@ -6573,10 +6913,15 @@
                       </a:r>
                     </a:p>
                   </a:txBody>
-                  <a:tcPr marL="54864" marR="54864" marT="18288" marB="18288" anchor="ctr">
+                  <a:tcPr marL="73152" marR="54864" marT="18288" marB="18288" anchor="ctr">
                     <a:solidFill>
-                      <a:srgbClr val="F7F7F9"/>
+                      <a:srgbClr val="FFFFFF"/>
                     </a:solidFill>
+                    <a:lnB w="9525" cap="flat">
+                      <a:solidFill>
+                        <a:srgbClr val="E5E7EB"/>
+                      </a:solidFill>
+                    </a:lnB>
                   </a:tcPr>
                 </a:tc>
               </a:tr>
@@ -6594,7 +6939,7 @@
                       <a:r>
                         <a:rPr sz="1050" b="1" i="0">
                           <a:solidFill>
-                            <a:srgbClr val="3A106E"/>
+                            <a:srgbClr val="2563EB"/>
                           </a:solidFill>
                           <a:latin typeface="Yu Gothic"/>
                           <a:ea typeface="Yu Gothic"/>
@@ -6604,10 +6949,15 @@
                       </a:r>
                     </a:p>
                   </a:txBody>
-                  <a:tcPr marL="54864" marR="54864" marT="18288" marB="18288" anchor="ctr">
+                  <a:tcPr marL="73152" marR="54864" marT="18288" marB="18288" anchor="ctr">
                     <a:solidFill>
                       <a:srgbClr val="FFFFFF"/>
                     </a:solidFill>
+                    <a:lnB w="9525" cap="flat">
+                      <a:solidFill>
+                        <a:srgbClr val="E5E7EB"/>
+                      </a:solidFill>
+                    </a:lnB>
                   </a:tcPr>
                 </a:tc>
                 <a:tc>
@@ -6623,7 +6973,7 @@
                       <a:r>
                         <a:rPr sz="1050" b="0" i="0">
                           <a:solidFill>
-                            <a:srgbClr val="262630"/>
+                            <a:srgbClr val="1B1B26"/>
                           </a:solidFill>
                           <a:latin typeface="Yu Gothic"/>
                           <a:ea typeface="Yu Gothic"/>
@@ -6633,10 +6983,15 @@
                       </a:r>
                     </a:p>
                   </a:txBody>
-                  <a:tcPr marL="54864" marR="54864" marT="18288" marB="18288" anchor="ctr">
+                  <a:tcPr marL="73152" marR="54864" marT="18288" marB="18288" anchor="ctr">
                     <a:solidFill>
                       <a:srgbClr val="FFFFFF"/>
                     </a:solidFill>
+                    <a:lnB w="9525" cap="flat">
+                      <a:solidFill>
+                        <a:srgbClr val="E5E7EB"/>
+                      </a:solidFill>
+                    </a:lnB>
                   </a:tcPr>
                 </a:tc>
               </a:tr>
@@ -6654,7 +7009,7 @@
                       <a:r>
                         <a:rPr sz="1050" b="1" i="0">
                           <a:solidFill>
-                            <a:srgbClr val="3A106E"/>
+                            <a:srgbClr val="2563EB"/>
                           </a:solidFill>
                           <a:latin typeface="Yu Gothic"/>
                           <a:ea typeface="Yu Gothic"/>
@@ -6664,10 +7019,15 @@
                       </a:r>
                     </a:p>
                   </a:txBody>
-                  <a:tcPr marL="54864" marR="54864" marT="18288" marB="18288" anchor="ctr">
+                  <a:tcPr marL="73152" marR="54864" marT="18288" marB="18288" anchor="ctr">
                     <a:solidFill>
-                      <a:srgbClr val="F7F7F9"/>
+                      <a:srgbClr val="FFFFFF"/>
                     </a:solidFill>
+                    <a:lnB w="9525" cap="flat">
+                      <a:solidFill>
+                        <a:srgbClr val="E5E7EB"/>
+                      </a:solidFill>
+                    </a:lnB>
                   </a:tcPr>
                 </a:tc>
                 <a:tc>
@@ -6683,7 +7043,7 @@
                       <a:r>
                         <a:rPr sz="1050" b="0" i="0">
                           <a:solidFill>
-                            <a:srgbClr val="262630"/>
+                            <a:srgbClr val="1B1B26"/>
                           </a:solidFill>
                           <a:latin typeface="Yu Gothic"/>
                           <a:ea typeface="Yu Gothic"/>
@@ -6693,10 +7053,15 @@
                       </a:r>
                     </a:p>
                   </a:txBody>
-                  <a:tcPr marL="54864" marR="54864" marT="18288" marB="18288" anchor="ctr">
+                  <a:tcPr marL="73152" marR="54864" marT="18288" marB="18288" anchor="ctr">
                     <a:solidFill>
-                      <a:srgbClr val="F7F7F9"/>
+                      <a:srgbClr val="FFFFFF"/>
                     </a:solidFill>
+                    <a:lnB w="9525" cap="flat">
+                      <a:solidFill>
+                        <a:srgbClr val="E5E7EB"/>
+                      </a:solidFill>
+                    </a:lnB>
                   </a:tcPr>
                 </a:tc>
               </a:tr>
@@ -6714,7 +7079,7 @@
                       <a:r>
                         <a:rPr sz="1050" b="1" i="0">
                           <a:solidFill>
-                            <a:srgbClr val="3A106E"/>
+                            <a:srgbClr val="2563EB"/>
                           </a:solidFill>
                           <a:latin typeface="Yu Gothic"/>
                           <a:ea typeface="Yu Gothic"/>
@@ -6724,10 +7089,15 @@
                       </a:r>
                     </a:p>
                   </a:txBody>
-                  <a:tcPr marL="54864" marR="54864" marT="18288" marB="18288" anchor="ctr">
+                  <a:tcPr marL="73152" marR="54864" marT="18288" marB="18288" anchor="ctr">
                     <a:solidFill>
                       <a:srgbClr val="FFFFFF"/>
                     </a:solidFill>
+                    <a:lnB w="9525" cap="flat">
+                      <a:solidFill>
+                        <a:srgbClr val="E5E7EB"/>
+                      </a:solidFill>
+                    </a:lnB>
                   </a:tcPr>
                 </a:tc>
                 <a:tc>
@@ -6743,7 +7113,7 @@
                       <a:r>
                         <a:rPr sz="1050" b="0" i="0">
                           <a:solidFill>
-                            <a:srgbClr val="262630"/>
+                            <a:srgbClr val="1B1B26"/>
                           </a:solidFill>
                           <a:latin typeface="Yu Gothic"/>
                           <a:ea typeface="Yu Gothic"/>
@@ -6753,10 +7123,15 @@
                       </a:r>
                     </a:p>
                   </a:txBody>
-                  <a:tcPr marL="54864" marR="54864" marT="18288" marB="18288" anchor="ctr">
+                  <a:tcPr marL="73152" marR="54864" marT="18288" marB="18288" anchor="ctr">
                     <a:solidFill>
                       <a:srgbClr val="FFFFFF"/>
                     </a:solidFill>
+                    <a:lnB w="9525" cap="flat">
+                      <a:solidFill>
+                        <a:srgbClr val="E5E7EB"/>
+                      </a:solidFill>
+                    </a:lnB>
                   </a:tcPr>
                 </a:tc>
               </a:tr>
@@ -6779,11 +7154,11 @@
             <a:avLst/>
           </a:prstGeom>
           <a:solidFill>
-            <a:srgbClr val="F7F7F9"/>
+            <a:srgbClr val="F6F8FB"/>
           </a:solidFill>
           <a:ln w="9525">
             <a:solidFill>
-              <a:srgbClr val="D9D9E0"/>
+              <a:srgbClr val="E5E7EB"/>
             </a:solidFill>
           </a:ln>
           <a:effectLst/>
@@ -6825,7 +7200,7 @@
             <a:avLst/>
           </a:prstGeom>
           <a:solidFill>
-            <a:srgbClr val="7823DC"/>
+            <a:srgbClr val="2563EB"/>
           </a:solidFill>
           <a:ln>
             <a:noFill/>
@@ -6884,7 +7259,7 @@
             <a:r>
               <a:rPr sz="950" b="0" i="0">
                 <a:solidFill>
-                  <a:srgbClr val="262630"/>
+                  <a:srgbClr val="1B1B26"/>
                 </a:solidFill>
                 <a:latin typeface="Yu Gothic"/>
                 <a:ea typeface="Yu Gothic"/>
@@ -6910,11 +7285,11 @@
             <a:avLst/>
           </a:prstGeom>
           <a:solidFill>
-            <a:srgbClr val="F7F7F9"/>
+            <a:srgbClr val="F6F8FB"/>
           </a:solidFill>
           <a:ln w="9525">
             <a:solidFill>
-              <a:srgbClr val="D9D9E0"/>
+              <a:srgbClr val="E5E7EB"/>
             </a:solidFill>
           </a:ln>
           <a:effectLst/>
@@ -6956,7 +7331,7 @@
             <a:avLst/>
           </a:prstGeom>
           <a:solidFill>
-            <a:srgbClr val="3A106E"/>
+            <a:srgbClr val="1E40AF"/>
           </a:solidFill>
           <a:ln>
             <a:noFill/>
@@ -7015,7 +7390,7 @@
             <a:r>
               <a:rPr sz="950" b="0" i="0">
                 <a:solidFill>
-                  <a:srgbClr val="262630"/>
+                  <a:srgbClr val="1B1B26"/>
                 </a:solidFill>
                 <a:latin typeface="Yu Gothic"/>
                 <a:ea typeface="Yu Gothic"/>
@@ -7041,7 +7416,7 @@
             <a:avLst/>
           </a:prstGeom>
           <a:solidFill>
-            <a:srgbClr val="D9D9E0"/>
+            <a:srgbClr val="E5E7EB"/>
           </a:solidFill>
           <a:ln>
             <a:noFill/>
@@ -7100,7 +7475,7 @@
             <a:r>
               <a:rPr sz="750" b="0" i="0">
                 <a:solidFill>
-                  <a:srgbClr val="8A8A99"/>
+                  <a:srgbClr val="8A8F9C"/>
                 </a:solidFill>
                 <a:latin typeface="Yu Gothic"/>
                 <a:ea typeface="Yu Gothic"/>
@@ -7141,7 +7516,7 @@
             <a:r>
               <a:rPr sz="900" b="0" i="0">
                 <a:solidFill>
-                  <a:srgbClr val="5F5F6E"/>
+                  <a:srgbClr val="6B7280"/>
                 </a:solidFill>
                 <a:latin typeface="Yu Gothic"/>
                 <a:ea typeface="Yu Gothic"/>
@@ -7172,14 +7547,75 @@
       <p:grpSpPr/>
       <p:sp>
         <p:nvSpPr>
-          <p:cNvPr id="2" name="TextBox 1"/>
+          <p:cNvPr id="2" name="Rounded Rectangle 1"/>
+          <p:cNvSpPr/>
+          <p:nvPr/>
+        </p:nvSpPr>
+        <p:spPr>
+          <a:xfrm>
+            <a:off x="502920" y="274320"/>
+            <a:ext cx="1627632" cy="274320"/>
+          </a:xfrm>
+          <a:prstGeom prst="roundRect">
+            <a:avLst>
+              <a:gd name="adj" fmla="val 50000"/>
+            </a:avLst>
+          </a:prstGeom>
+          <a:solidFill>
+            <a:srgbClr val="EAF1FE"/>
+          </a:solidFill>
+          <a:ln>
+            <a:noFill/>
+          </a:ln>
+          <a:effectLst/>
+        </p:spPr>
+        <p:style>
+          <a:lnRef idx="1">
+            <a:schemeClr val="accent1"/>
+          </a:lnRef>
+          <a:fillRef idx="3">
+            <a:schemeClr val="accent1"/>
+          </a:fillRef>
+          <a:effectRef idx="2">
+            <a:schemeClr val="accent1"/>
+          </a:effectRef>
+          <a:fontRef idx="minor">
+            <a:schemeClr val="lt1"/>
+          </a:fontRef>
+        </p:style>
+        <p:txBody>
+          <a:bodyPr rtlCol="0" anchor="ctr" wrap="none" lIns="109728" rIns="109728" tIns="0" bIns="0"/>
+          <a:lstStyle/>
+          <a:p>
+            <a:pPr algn="l">
+              <a:spcAft>
+                <a:spcPts val="0"/>
+              </a:spcAft>
+            </a:pPr>
+            <a:r>
+              <a:rPr sz="900" b="1" i="0">
+                <a:solidFill>
+                  <a:srgbClr val="2563EB"/>
+                </a:solidFill>
+                <a:latin typeface="Yu Gothic"/>
+                <a:ea typeface="Yu Gothic"/>
+                <a:cs typeface="Yu Gothic"/>
+              </a:rPr>
+              <a:t>02 ｜ 点検会議の設計</a:t>
+            </a:r>
+          </a:p>
+        </p:txBody>
+      </p:sp>
+      <p:sp>
+        <p:nvSpPr>
+          <p:cNvPr id="3" name="TextBox 2"/>
           <p:cNvSpPr txBox="1"/>
           <p:nvPr/>
         </p:nvSpPr>
         <p:spPr>
           <a:xfrm>
-            <a:off x="502920" y="256032"/>
-            <a:ext cx="11155680" cy="256032"/>
+            <a:off x="502920" y="566928"/>
+            <a:ext cx="11155680" cy="804672"/>
           </a:xfrm>
           <a:prstGeom prst="rect">
             <a:avLst/>
@@ -7188,6 +7624,240 @@
         </p:spPr>
         <p:txBody>
           <a:bodyPr wrap="square" lIns="0" rIns="0" tIns="0" bIns="0">
+            <a:spAutoFit/>
+          </a:bodyPr>
+          <a:lstStyle/>
+          <a:p>
+            <a:pPr algn="l">
+              <a:spcAft>
+                <a:spcPts val="0"/>
+              </a:spcAft>
+            </a:pPr>
+            <a:r>
+              <a:rPr sz="1800" b="1" i="0">
+                <a:solidFill>
+                  <a:srgbClr val="1B1B26"/>
+                </a:solidFill>
+                <a:latin typeface="Yu Gothic"/>
+                <a:ea typeface="Yu Gothic"/>
+                <a:cs typeface="Yu Gothic"/>
+              </a:rPr>
+              <a:t>会長にお願いしたいこと</a:t>
+            </a:r>
+          </a:p>
+        </p:txBody>
+      </p:sp>
+      <p:sp>
+        <p:nvSpPr>
+          <p:cNvPr id="4" name="Rectangle 3"/>
+          <p:cNvSpPr/>
+          <p:nvPr/>
+        </p:nvSpPr>
+        <p:spPr>
+          <a:xfrm>
+            <a:off x="502920" y="1335024"/>
+            <a:ext cx="11183112" cy="11430"/>
+          </a:xfrm>
+          <a:prstGeom prst="rect">
+            <a:avLst/>
+          </a:prstGeom>
+          <a:solidFill>
+            <a:srgbClr val="E5E7EB"/>
+          </a:solidFill>
+          <a:ln>
+            <a:noFill/>
+          </a:ln>
+          <a:effectLst/>
+        </p:spPr>
+        <p:style>
+          <a:lnRef idx="1">
+            <a:schemeClr val="accent1"/>
+          </a:lnRef>
+          <a:fillRef idx="3">
+            <a:schemeClr val="accent1"/>
+          </a:fillRef>
+          <a:effectRef idx="2">
+            <a:schemeClr val="accent1"/>
+          </a:effectRef>
+          <a:fontRef idx="minor">
+            <a:schemeClr val="lt1"/>
+          </a:fontRef>
+        </p:style>
+        <p:txBody>
+          <a:bodyPr rtlCol="0" anchor="ctr"/>
+          <a:lstStyle/>
+          <a:p>
+            <a:pPr algn="ctr"/>
+          </a:p>
+        </p:txBody>
+      </p:sp>
+      <p:sp>
+        <p:nvSpPr>
+          <p:cNvPr id="5" name="Rectangle 4"/>
+          <p:cNvSpPr/>
+          <p:nvPr/>
+        </p:nvSpPr>
+        <p:spPr>
+          <a:xfrm>
+            <a:off x="502920" y="2103120"/>
+            <a:ext cx="11183112" cy="1170432"/>
+          </a:xfrm>
+          <a:prstGeom prst="rect">
+            <a:avLst/>
+          </a:prstGeom>
+          <a:solidFill>
+            <a:srgbClr val="FFFFFF"/>
+          </a:solidFill>
+          <a:ln w="9525">
+            <a:solidFill>
+              <a:srgbClr val="E5E7EB"/>
+            </a:solidFill>
+          </a:ln>
+          <a:effectLst/>
+        </p:spPr>
+        <p:style>
+          <a:lnRef idx="1">
+            <a:schemeClr val="accent1"/>
+          </a:lnRef>
+          <a:fillRef idx="3">
+            <a:schemeClr val="accent1"/>
+          </a:fillRef>
+          <a:effectRef idx="2">
+            <a:schemeClr val="accent1"/>
+          </a:effectRef>
+          <a:fontRef idx="minor">
+            <a:schemeClr val="lt1"/>
+          </a:fontRef>
+        </p:style>
+        <p:txBody>
+          <a:bodyPr rtlCol="0" anchor="ctr"/>
+          <a:lstStyle/>
+          <a:p>
+            <a:pPr algn="ctr"/>
+          </a:p>
+        </p:txBody>
+      </p:sp>
+      <p:sp>
+        <p:nvSpPr>
+          <p:cNvPr id="6" name="Rectangle 5"/>
+          <p:cNvSpPr/>
+          <p:nvPr/>
+        </p:nvSpPr>
+        <p:spPr>
+          <a:xfrm>
+            <a:off x="502920" y="2103120"/>
+            <a:ext cx="64008" cy="1170432"/>
+          </a:xfrm>
+          <a:prstGeom prst="rect">
+            <a:avLst/>
+          </a:prstGeom>
+          <a:solidFill>
+            <a:srgbClr val="1E40AF"/>
+          </a:solidFill>
+          <a:ln>
+            <a:noFill/>
+          </a:ln>
+          <a:effectLst/>
+        </p:spPr>
+        <p:style>
+          <a:lnRef idx="1">
+            <a:schemeClr val="accent1"/>
+          </a:lnRef>
+          <a:fillRef idx="3">
+            <a:schemeClr val="accent1"/>
+          </a:fillRef>
+          <a:effectRef idx="2">
+            <a:schemeClr val="accent1"/>
+          </a:effectRef>
+          <a:fontRef idx="minor">
+            <a:schemeClr val="lt1"/>
+          </a:fontRef>
+        </p:style>
+        <p:txBody>
+          <a:bodyPr rtlCol="0" anchor="ctr"/>
+          <a:lstStyle/>
+          <a:p>
+            <a:pPr algn="ctr"/>
+          </a:p>
+        </p:txBody>
+      </p:sp>
+      <p:sp>
+        <p:nvSpPr>
+          <p:cNvPr id="7" name="Oval 6"/>
+          <p:cNvSpPr/>
+          <p:nvPr/>
+        </p:nvSpPr>
+        <p:spPr>
+          <a:xfrm>
+            <a:off x="704088" y="2304288"/>
+            <a:ext cx="457200" cy="457200"/>
+          </a:xfrm>
+          <a:prstGeom prst="ellipse">
+            <a:avLst/>
+          </a:prstGeom>
+          <a:solidFill>
+            <a:srgbClr val="1E40AF"/>
+          </a:solidFill>
+          <a:ln>
+            <a:noFill/>
+          </a:ln>
+          <a:effectLst/>
+        </p:spPr>
+        <p:style>
+          <a:lnRef idx="1">
+            <a:schemeClr val="accent1"/>
+          </a:lnRef>
+          <a:fillRef idx="3">
+            <a:schemeClr val="accent1"/>
+          </a:fillRef>
+          <a:effectRef idx="2">
+            <a:schemeClr val="accent1"/>
+          </a:effectRef>
+          <a:fontRef idx="minor">
+            <a:schemeClr val="lt1"/>
+          </a:fontRef>
+        </p:style>
+        <p:txBody>
+          <a:bodyPr rtlCol="0" anchor="ctr" wrap="none" lIns="0" rIns="0" tIns="0" bIns="0"/>
+          <a:lstStyle/>
+          <a:p>
+            <a:pPr algn="ctr">
+              <a:spcAft>
+                <a:spcPts val="0"/>
+              </a:spcAft>
+            </a:pPr>
+            <a:r>
+              <a:rPr sz="1800" b="1" i="0">
+                <a:solidFill>
+                  <a:srgbClr val="FFFFFF"/>
+                </a:solidFill>
+                <a:latin typeface="Yu Gothic"/>
+                <a:ea typeface="Yu Gothic"/>
+                <a:cs typeface="Yu Gothic"/>
+              </a:rPr>
+              <a:t>1</a:t>
+            </a:r>
+          </a:p>
+        </p:txBody>
+      </p:sp>
+      <p:sp>
+        <p:nvSpPr>
+          <p:cNvPr id="8" name="TextBox 7"/>
+          <p:cNvSpPr txBox="1"/>
+          <p:nvPr/>
+        </p:nvSpPr>
+        <p:spPr>
+          <a:xfrm>
+            <a:off x="1344168" y="2267712"/>
+            <a:ext cx="10158984" cy="896112"/>
+          </a:xfrm>
+          <a:prstGeom prst="rect">
+            <a:avLst/>
+          </a:prstGeom>
+          <a:noFill/>
+        </p:spPr>
+        <p:txBody>
+          <a:bodyPr wrap="square" lIns="0" rIns="0" tIns="0" bIns="0" anchor="ctr">
             <a:spAutoFit/>
           </a:bodyPr>
           <a:lstStyle/>
@@ -7198,40 +7868,17 @@
               </a:spcAft>
             </a:pPr>
             <a:r>
-              <a:rPr sz="1000" b="1" i="0">
-                <a:solidFill>
-                  <a:srgbClr val="7823DC"/>
+              <a:rPr sz="1300" b="1" i="0">
+                <a:solidFill>
+                  <a:srgbClr val="1E40AF"/>
                 </a:solidFill>
                 <a:latin typeface="Yu Gothic"/>
                 <a:ea typeface="Yu Gothic"/>
                 <a:cs typeface="Yu Gothic"/>
               </a:rPr>
-              <a:t>02 ｜ 点検会議の設計</a:t>
-            </a:r>
-          </a:p>
-        </p:txBody>
-      </p:sp>
-      <p:sp>
-        <p:nvSpPr>
-          <p:cNvPr id="3" name="TextBox 2"/>
-          <p:cNvSpPr txBox="1"/>
-          <p:nvPr/>
-        </p:nvSpPr>
-        <p:spPr>
-          <a:xfrm>
-            <a:off x="502920" y="512064"/>
-            <a:ext cx="11155680" cy="868680"/>
-          </a:xfrm>
-          <a:prstGeom prst="rect">
-            <a:avLst/>
-          </a:prstGeom>
-          <a:noFill/>
-        </p:spPr>
-        <p:txBody>
-          <a:bodyPr wrap="square" lIns="0" rIns="0" tIns="0" bIns="0">
-            <a:spAutoFit/>
-          </a:bodyPr>
-          <a:lstStyle/>
+              <a:t>点検会議の議長（月次60分）</a:t>
+            </a:r>
+          </a:p>
           <a:p>
             <a:pPr algn="l">
               <a:spcAft>
@@ -7239,35 +7886,81 @@
               </a:spcAft>
             </a:pPr>
             <a:r>
-              <a:rPr sz="1900" b="1" i="0">
-                <a:solidFill>
-                  <a:srgbClr val="262630"/>
+              <a:rPr sz="1050" b="0" i="0">
+                <a:solidFill>
+                  <a:srgbClr val="1B1B26"/>
                 </a:solidFill>
                 <a:latin typeface="Yu Gothic"/>
                 <a:ea typeface="Yu Gothic"/>
                 <a:cs typeface="Yu Gothic"/>
               </a:rPr>
-              <a:t>会長にお願いしたいこと</a:t>
-            </a:r>
-          </a:p>
-        </p:txBody>
-      </p:sp>
-      <p:sp>
-        <p:nvSpPr>
-          <p:cNvPr id="4" name="Rectangle 3"/>
+              <a:t>意思決定と優先順位付けの最終判断</a:t>
+            </a:r>
+          </a:p>
+        </p:txBody>
+      </p:sp>
+      <p:sp>
+        <p:nvSpPr>
+          <p:cNvPr id="9" name="Rectangle 8"/>
           <p:cNvSpPr/>
           <p:nvPr/>
         </p:nvSpPr>
         <p:spPr>
           <a:xfrm>
-            <a:off x="502920" y="1389888"/>
-            <a:ext cx="1463040" cy="33020"/>
+            <a:off x="502920" y="3493008"/>
+            <a:ext cx="11183112" cy="1170432"/>
           </a:xfrm>
           <a:prstGeom prst="rect">
             <a:avLst/>
           </a:prstGeom>
           <a:solidFill>
-            <a:srgbClr val="7823DC"/>
+            <a:srgbClr val="FFFFFF"/>
+          </a:solidFill>
+          <a:ln w="9525">
+            <a:solidFill>
+              <a:srgbClr val="E5E7EB"/>
+            </a:solidFill>
+          </a:ln>
+          <a:effectLst/>
+        </p:spPr>
+        <p:style>
+          <a:lnRef idx="1">
+            <a:schemeClr val="accent1"/>
+          </a:lnRef>
+          <a:fillRef idx="3">
+            <a:schemeClr val="accent1"/>
+          </a:fillRef>
+          <a:effectRef idx="2">
+            <a:schemeClr val="accent1"/>
+          </a:effectRef>
+          <a:fontRef idx="minor">
+            <a:schemeClr val="lt1"/>
+          </a:fontRef>
+        </p:style>
+        <p:txBody>
+          <a:bodyPr rtlCol="0" anchor="ctr"/>
+          <a:lstStyle/>
+          <a:p>
+            <a:pPr algn="ctr"/>
+          </a:p>
+        </p:txBody>
+      </p:sp>
+      <p:sp>
+        <p:nvSpPr>
+          <p:cNvPr id="10" name="Rectangle 9"/>
+          <p:cNvSpPr/>
+          <p:nvPr/>
+        </p:nvSpPr>
+        <p:spPr>
+          <a:xfrm>
+            <a:off x="502920" y="3493008"/>
+            <a:ext cx="64008" cy="1170432"/>
+          </a:xfrm>
+          <a:prstGeom prst="rect">
+            <a:avLst/>
+          </a:prstGeom>
+          <a:solidFill>
+            <a:srgbClr val="1E40AF"/>
           </a:solidFill>
           <a:ln>
             <a:noFill/>
@@ -7298,13 +7991,131 @@
       </p:sp>
       <p:sp>
         <p:nvSpPr>
-          <p:cNvPr id="5" name="Rectangle 4"/>
+          <p:cNvPr id="11" name="Oval 10"/>
           <p:cNvSpPr/>
           <p:nvPr/>
         </p:nvSpPr>
         <p:spPr>
           <a:xfrm>
-            <a:off x="502920" y="2103120"/>
+            <a:off x="704088" y="3694176"/>
+            <a:ext cx="457200" cy="457200"/>
+          </a:xfrm>
+          <a:prstGeom prst="ellipse">
+            <a:avLst/>
+          </a:prstGeom>
+          <a:solidFill>
+            <a:srgbClr val="1E40AF"/>
+          </a:solidFill>
+          <a:ln>
+            <a:noFill/>
+          </a:ln>
+          <a:effectLst/>
+        </p:spPr>
+        <p:style>
+          <a:lnRef idx="1">
+            <a:schemeClr val="accent1"/>
+          </a:lnRef>
+          <a:fillRef idx="3">
+            <a:schemeClr val="accent1"/>
+          </a:fillRef>
+          <a:effectRef idx="2">
+            <a:schemeClr val="accent1"/>
+          </a:effectRef>
+          <a:fontRef idx="minor">
+            <a:schemeClr val="lt1"/>
+          </a:fontRef>
+        </p:style>
+        <p:txBody>
+          <a:bodyPr rtlCol="0" anchor="ctr" wrap="none" lIns="0" rIns="0" tIns="0" bIns="0"/>
+          <a:lstStyle/>
+          <a:p>
+            <a:pPr algn="ctr">
+              <a:spcAft>
+                <a:spcPts val="0"/>
+              </a:spcAft>
+            </a:pPr>
+            <a:r>
+              <a:rPr sz="1800" b="1" i="0">
+                <a:solidFill>
+                  <a:srgbClr val="FFFFFF"/>
+                </a:solidFill>
+                <a:latin typeface="Yu Gothic"/>
+                <a:ea typeface="Yu Gothic"/>
+                <a:cs typeface="Yu Gothic"/>
+              </a:rPr>
+              <a:t>2</a:t>
+            </a:r>
+          </a:p>
+        </p:txBody>
+      </p:sp>
+      <p:sp>
+        <p:nvSpPr>
+          <p:cNvPr id="12" name="TextBox 11"/>
+          <p:cNvSpPr txBox="1"/>
+          <p:nvPr/>
+        </p:nvSpPr>
+        <p:spPr>
+          <a:xfrm>
+            <a:off x="1344168" y="3657600"/>
+            <a:ext cx="10158984" cy="896112"/>
+          </a:xfrm>
+          <a:prstGeom prst="rect">
+            <a:avLst/>
+          </a:prstGeom>
+          <a:noFill/>
+        </p:spPr>
+        <p:txBody>
+          <a:bodyPr wrap="square" lIns="0" rIns="0" tIns="0" bIns="0" anchor="ctr">
+            <a:spAutoFit/>
+          </a:bodyPr>
+          <a:lstStyle/>
+          <a:p>
+            <a:pPr algn="l">
+              <a:spcAft>
+                <a:spcPts val="400"/>
+              </a:spcAft>
+            </a:pPr>
+            <a:r>
+              <a:rPr sz="1300" b="1" i="0">
+                <a:solidFill>
+                  <a:srgbClr val="1E40AF"/>
+                </a:solidFill>
+                <a:latin typeface="Yu Gothic"/>
+                <a:ea typeface="Yu Gothic"/>
+                <a:cs typeface="Yu Gothic"/>
+              </a:rPr>
+              <a:t>トップ外交のご登板</a:t>
+            </a:r>
+          </a:p>
+          <a:p>
+            <a:pPr algn="l">
+              <a:spcAft>
+                <a:spcPts val="0"/>
+              </a:spcAft>
+            </a:pPr>
+            <a:r>
+              <a:rPr sz="1050" b="0" i="0">
+                <a:solidFill>
+                  <a:srgbClr val="1B1B26"/>
+                </a:solidFill>
+                <a:latin typeface="Yu Gothic"/>
+                <a:ea typeface="Yu Gothic"/>
+                <a:cs typeface="Yu Gothic"/>
+              </a:rPr>
+              <a:t>重要パートナーとの関係強化で、会長にしか開けない扉を数件（対象は初回点検会議でご相談）</a:t>
+            </a:r>
+          </a:p>
+        </p:txBody>
+      </p:sp>
+      <p:sp>
+        <p:nvSpPr>
+          <p:cNvPr id="13" name="Rectangle 12"/>
+          <p:cNvSpPr/>
+          <p:nvPr/>
+        </p:nvSpPr>
+        <p:spPr>
+          <a:xfrm>
+            <a:off x="502920" y="4882896"/>
             <a:ext cx="11183112" cy="1170432"/>
           </a:xfrm>
           <a:prstGeom prst="rect">
@@ -7315,7 +8126,7 @@
           </a:solidFill>
           <a:ln w="9525">
             <a:solidFill>
-              <a:srgbClr val="D9D9E0"/>
+              <a:srgbClr val="E5E7EB"/>
             </a:solidFill>
           </a:ln>
           <a:effectLst/>
@@ -7344,20 +8155,20 @@
       </p:sp>
       <p:sp>
         <p:nvSpPr>
-          <p:cNvPr id="6" name="Rectangle 5"/>
+          <p:cNvPr id="14" name="Rectangle 13"/>
           <p:cNvSpPr/>
           <p:nvPr/>
         </p:nvSpPr>
         <p:spPr>
           <a:xfrm>
-            <a:off x="502920" y="2103120"/>
+            <a:off x="502920" y="4882896"/>
             <a:ext cx="64008" cy="1170432"/>
           </a:xfrm>
           <a:prstGeom prst="rect">
             <a:avLst/>
           </a:prstGeom>
           <a:solidFill>
-            <a:srgbClr val="3A106E"/>
+            <a:srgbClr val="1E40AF"/>
           </a:solidFill>
           <a:ln>
             <a:noFill/>
@@ -7388,20 +8199,20 @@
       </p:sp>
       <p:sp>
         <p:nvSpPr>
-          <p:cNvPr id="7" name="Oval 6"/>
+          <p:cNvPr id="15" name="Oval 14"/>
           <p:cNvSpPr/>
           <p:nvPr/>
         </p:nvSpPr>
         <p:spPr>
           <a:xfrm>
-            <a:off x="704088" y="2304288"/>
+            <a:off x="704088" y="5084064"/>
             <a:ext cx="457200" cy="457200"/>
           </a:xfrm>
           <a:prstGeom prst="ellipse">
             <a:avLst/>
           </a:prstGeom>
           <a:solidFill>
-            <a:srgbClr val="3A106E"/>
+            <a:srgbClr val="1E40AF"/>
           </a:solidFill>
           <a:ln>
             <a:noFill/>
@@ -7440,20 +8251,20 @@
                 <a:ea typeface="Yu Gothic"/>
                 <a:cs typeface="Yu Gothic"/>
               </a:rPr>
-              <a:t>1</a:t>
-            </a:r>
-          </a:p>
-        </p:txBody>
-      </p:sp>
-      <p:sp>
-        <p:nvSpPr>
-          <p:cNvPr id="8" name="TextBox 7"/>
+              <a:t>3</a:t>
+            </a:r>
+          </a:p>
+        </p:txBody>
+      </p:sp>
+      <p:sp>
+        <p:nvSpPr>
+          <p:cNvPr id="16" name="TextBox 15"/>
           <p:cNvSpPr txBox="1"/>
           <p:nvPr/>
         </p:nvSpPr>
         <p:spPr>
           <a:xfrm>
-            <a:off x="1344168" y="2267712"/>
+            <a:off x="1344168" y="5047488"/>
             <a:ext cx="10158984" cy="896112"/>
           </a:xfrm>
           <a:prstGeom prst="rect">
@@ -7475,13 +8286,13 @@
             <a:r>
               <a:rPr sz="1300" b="1" i="0">
                 <a:solidFill>
-                  <a:srgbClr val="3A106E"/>
+                  <a:srgbClr val="1E40AF"/>
                 </a:solidFill>
                 <a:latin typeface="Yu Gothic"/>
                 <a:ea typeface="Yu Gothic"/>
                 <a:cs typeface="Yu Gothic"/>
               </a:rPr>
-              <a:t>点検会議の議長（月次60分）</a:t>
+              <a:t>「決める会議」の運用へのご賛同</a:t>
             </a:r>
           </a:p>
           <a:p>
@@ -7493,38 +8304,36 @@
             <a:r>
               <a:rPr sz="1050" b="0" i="0">
                 <a:solidFill>
-                  <a:srgbClr val="262630"/>
+                  <a:srgbClr val="1B1B26"/>
                 </a:solidFill>
                 <a:latin typeface="Yu Gothic"/>
                 <a:ea typeface="Yu Gothic"/>
                 <a:cs typeface="Yu Gothic"/>
               </a:rPr>
-              <a:t>意思決定と優先順位付けの最終判断</a:t>
-            </a:r>
-          </a:p>
-        </p:txBody>
-      </p:sp>
-      <p:sp>
-        <p:nvSpPr>
-          <p:cNvPr id="9" name="Rectangle 8"/>
+              <a:t>報告の受領ではなく、毎回2〜3件の決定をお願いする運び</a:t>
+            </a:r>
+          </a:p>
+        </p:txBody>
+      </p:sp>
+      <p:sp>
+        <p:nvSpPr>
+          <p:cNvPr id="17" name="Rectangle 16"/>
           <p:cNvSpPr/>
           <p:nvPr/>
         </p:nvSpPr>
         <p:spPr>
           <a:xfrm>
-            <a:off x="502920" y="3493008"/>
-            <a:ext cx="11183112" cy="1170432"/>
+            <a:off x="502920" y="6510528"/>
+            <a:ext cx="11183112" cy="15240"/>
           </a:xfrm>
           <a:prstGeom prst="rect">
             <a:avLst/>
           </a:prstGeom>
           <a:solidFill>
-            <a:srgbClr val="FFFFFF"/>
+            <a:srgbClr val="E5E7EB"/>
           </a:solidFill>
-          <a:ln w="9525">
-            <a:solidFill>
-              <a:srgbClr val="D9D9E0"/>
-            </a:solidFill>
+          <a:ln>
+            <a:noFill/>
           </a:ln>
           <a:effectLst/>
         </p:spPr>
@@ -7552,125 +8361,22 @@
       </p:sp>
       <p:sp>
         <p:nvSpPr>
-          <p:cNvPr id="10" name="Rectangle 9"/>
-          <p:cNvSpPr/>
-          <p:nvPr/>
-        </p:nvSpPr>
-        <p:spPr>
-          <a:xfrm>
-            <a:off x="502920" y="3493008"/>
-            <a:ext cx="64008" cy="1170432"/>
+          <p:cNvPr id="18" name="TextBox 17"/>
+          <p:cNvSpPr txBox="1"/>
+          <p:nvPr/>
+        </p:nvSpPr>
+        <p:spPr>
+          <a:xfrm>
+            <a:off x="502920" y="6565392"/>
+            <a:ext cx="8686800" cy="274320"/>
           </a:xfrm>
           <a:prstGeom prst="rect">
             <a:avLst/>
           </a:prstGeom>
-          <a:solidFill>
-            <a:srgbClr val="3A106E"/>
-          </a:solidFill>
-          <a:ln>
-            <a:noFill/>
-          </a:ln>
-          <a:effectLst/>
-        </p:spPr>
-        <p:style>
-          <a:lnRef idx="1">
-            <a:schemeClr val="accent1"/>
-          </a:lnRef>
-          <a:fillRef idx="3">
-            <a:schemeClr val="accent1"/>
-          </a:fillRef>
-          <a:effectRef idx="2">
-            <a:schemeClr val="accent1"/>
-          </a:effectRef>
-          <a:fontRef idx="minor">
-            <a:schemeClr val="lt1"/>
-          </a:fontRef>
-        </p:style>
-        <p:txBody>
-          <a:bodyPr rtlCol="0" anchor="ctr"/>
-          <a:lstStyle/>
-          <a:p>
-            <a:pPr algn="ctr"/>
-          </a:p>
-        </p:txBody>
-      </p:sp>
-      <p:sp>
-        <p:nvSpPr>
-          <p:cNvPr id="11" name="Oval 10"/>
-          <p:cNvSpPr/>
-          <p:nvPr/>
-        </p:nvSpPr>
-        <p:spPr>
-          <a:xfrm>
-            <a:off x="704088" y="3694176"/>
-            <a:ext cx="457200" cy="457200"/>
-          </a:xfrm>
-          <a:prstGeom prst="ellipse">
-            <a:avLst/>
-          </a:prstGeom>
-          <a:solidFill>
-            <a:srgbClr val="3A106E"/>
-          </a:solidFill>
-          <a:ln>
-            <a:noFill/>
-          </a:ln>
-          <a:effectLst/>
-        </p:spPr>
-        <p:style>
-          <a:lnRef idx="1">
-            <a:schemeClr val="accent1"/>
-          </a:lnRef>
-          <a:fillRef idx="3">
-            <a:schemeClr val="accent1"/>
-          </a:fillRef>
-          <a:effectRef idx="2">
-            <a:schemeClr val="accent1"/>
-          </a:effectRef>
-          <a:fontRef idx="minor">
-            <a:schemeClr val="lt1"/>
-          </a:fontRef>
-        </p:style>
-        <p:txBody>
-          <a:bodyPr rtlCol="0" anchor="ctr" wrap="none" lIns="0" rIns="0" tIns="0" bIns="0"/>
-          <a:lstStyle/>
-          <a:p>
-            <a:pPr algn="ctr">
-              <a:spcAft>
-                <a:spcPts val="0"/>
-              </a:spcAft>
-            </a:pPr>
-            <a:r>
-              <a:rPr sz="1800" b="1" i="0">
-                <a:solidFill>
-                  <a:srgbClr val="FFFFFF"/>
-                </a:solidFill>
-                <a:latin typeface="Yu Gothic"/>
-                <a:ea typeface="Yu Gothic"/>
-                <a:cs typeface="Yu Gothic"/>
-              </a:rPr>
-              <a:t>2</a:t>
-            </a:r>
-          </a:p>
-        </p:txBody>
-      </p:sp>
-      <p:sp>
-        <p:nvSpPr>
-          <p:cNvPr id="12" name="TextBox 11"/>
-          <p:cNvSpPr txBox="1"/>
-          <p:nvPr/>
-        </p:nvSpPr>
-        <p:spPr>
-          <a:xfrm>
-            <a:off x="1344168" y="3657600"/>
-            <a:ext cx="10158984" cy="896112"/>
-          </a:xfrm>
-          <a:prstGeom prst="rect">
-            <a:avLst/>
-          </a:prstGeom>
           <a:noFill/>
         </p:spPr>
         <p:txBody>
-          <a:bodyPr wrap="square" lIns="0" rIns="0" tIns="0" bIns="0" anchor="ctr">
+          <a:bodyPr wrap="square" lIns="0" rIns="0" tIns="0" bIns="0">
             <a:spAutoFit/>
           </a:bodyPr>
           <a:lstStyle/>
@@ -7681,320 +8387,9 @@
               </a:spcAft>
             </a:pPr>
             <a:r>
-              <a:rPr sz="1300" b="1" i="0">
-                <a:solidFill>
-                  <a:srgbClr val="3A106E"/>
-                </a:solidFill>
-                <a:latin typeface="Yu Gothic"/>
-                <a:ea typeface="Yu Gothic"/>
-                <a:cs typeface="Yu Gothic"/>
-              </a:rPr>
-              <a:t>トップ外交のご登板</a:t>
-            </a:r>
-          </a:p>
-          <a:p>
-            <a:pPr algn="l">
-              <a:spcAft>
-                <a:spcPts val="0"/>
-              </a:spcAft>
-            </a:pPr>
-            <a:r>
-              <a:rPr sz="1050" b="0" i="0">
-                <a:solidFill>
-                  <a:srgbClr val="262630"/>
-                </a:solidFill>
-                <a:latin typeface="Yu Gothic"/>
-                <a:ea typeface="Yu Gothic"/>
-                <a:cs typeface="Yu Gothic"/>
-              </a:rPr>
-              <a:t>重要パートナーとの関係強化で、会長にしか開けない扉を数件（対象は初回点検会議でご相談）</a:t>
-            </a:r>
-          </a:p>
-        </p:txBody>
-      </p:sp>
-      <p:sp>
-        <p:nvSpPr>
-          <p:cNvPr id="13" name="Rectangle 12"/>
-          <p:cNvSpPr/>
-          <p:nvPr/>
-        </p:nvSpPr>
-        <p:spPr>
-          <a:xfrm>
-            <a:off x="502920" y="4882896"/>
-            <a:ext cx="11183112" cy="1170432"/>
-          </a:xfrm>
-          <a:prstGeom prst="rect">
-            <a:avLst/>
-          </a:prstGeom>
-          <a:solidFill>
-            <a:srgbClr val="FFFFFF"/>
-          </a:solidFill>
-          <a:ln w="9525">
-            <a:solidFill>
-              <a:srgbClr val="D9D9E0"/>
-            </a:solidFill>
-          </a:ln>
-          <a:effectLst/>
-        </p:spPr>
-        <p:style>
-          <a:lnRef idx="1">
-            <a:schemeClr val="accent1"/>
-          </a:lnRef>
-          <a:fillRef idx="3">
-            <a:schemeClr val="accent1"/>
-          </a:fillRef>
-          <a:effectRef idx="2">
-            <a:schemeClr val="accent1"/>
-          </a:effectRef>
-          <a:fontRef idx="minor">
-            <a:schemeClr val="lt1"/>
-          </a:fontRef>
-        </p:style>
-        <p:txBody>
-          <a:bodyPr rtlCol="0" anchor="ctr"/>
-          <a:lstStyle/>
-          <a:p>
-            <a:pPr algn="ctr"/>
-          </a:p>
-        </p:txBody>
-      </p:sp>
-      <p:sp>
-        <p:nvSpPr>
-          <p:cNvPr id="14" name="Rectangle 13"/>
-          <p:cNvSpPr/>
-          <p:nvPr/>
-        </p:nvSpPr>
-        <p:spPr>
-          <a:xfrm>
-            <a:off x="502920" y="4882896"/>
-            <a:ext cx="64008" cy="1170432"/>
-          </a:xfrm>
-          <a:prstGeom prst="rect">
-            <a:avLst/>
-          </a:prstGeom>
-          <a:solidFill>
-            <a:srgbClr val="3A106E"/>
-          </a:solidFill>
-          <a:ln>
-            <a:noFill/>
-          </a:ln>
-          <a:effectLst/>
-        </p:spPr>
-        <p:style>
-          <a:lnRef idx="1">
-            <a:schemeClr val="accent1"/>
-          </a:lnRef>
-          <a:fillRef idx="3">
-            <a:schemeClr val="accent1"/>
-          </a:fillRef>
-          <a:effectRef idx="2">
-            <a:schemeClr val="accent1"/>
-          </a:effectRef>
-          <a:fontRef idx="minor">
-            <a:schemeClr val="lt1"/>
-          </a:fontRef>
-        </p:style>
-        <p:txBody>
-          <a:bodyPr rtlCol="0" anchor="ctr"/>
-          <a:lstStyle/>
-          <a:p>
-            <a:pPr algn="ctr"/>
-          </a:p>
-        </p:txBody>
-      </p:sp>
-      <p:sp>
-        <p:nvSpPr>
-          <p:cNvPr id="15" name="Oval 14"/>
-          <p:cNvSpPr/>
-          <p:nvPr/>
-        </p:nvSpPr>
-        <p:spPr>
-          <a:xfrm>
-            <a:off x="704088" y="5084064"/>
-            <a:ext cx="457200" cy="457200"/>
-          </a:xfrm>
-          <a:prstGeom prst="ellipse">
-            <a:avLst/>
-          </a:prstGeom>
-          <a:solidFill>
-            <a:srgbClr val="3A106E"/>
-          </a:solidFill>
-          <a:ln>
-            <a:noFill/>
-          </a:ln>
-          <a:effectLst/>
-        </p:spPr>
-        <p:style>
-          <a:lnRef idx="1">
-            <a:schemeClr val="accent1"/>
-          </a:lnRef>
-          <a:fillRef idx="3">
-            <a:schemeClr val="accent1"/>
-          </a:fillRef>
-          <a:effectRef idx="2">
-            <a:schemeClr val="accent1"/>
-          </a:effectRef>
-          <a:fontRef idx="minor">
-            <a:schemeClr val="lt1"/>
-          </a:fontRef>
-        </p:style>
-        <p:txBody>
-          <a:bodyPr rtlCol="0" anchor="ctr" wrap="none" lIns="0" rIns="0" tIns="0" bIns="0"/>
-          <a:lstStyle/>
-          <a:p>
-            <a:pPr algn="ctr">
-              <a:spcAft>
-                <a:spcPts val="0"/>
-              </a:spcAft>
-            </a:pPr>
-            <a:r>
-              <a:rPr sz="1800" b="1" i="0">
-                <a:solidFill>
-                  <a:srgbClr val="FFFFFF"/>
-                </a:solidFill>
-                <a:latin typeface="Yu Gothic"/>
-                <a:ea typeface="Yu Gothic"/>
-                <a:cs typeface="Yu Gothic"/>
-              </a:rPr>
-              <a:t>3</a:t>
-            </a:r>
-          </a:p>
-        </p:txBody>
-      </p:sp>
-      <p:sp>
-        <p:nvSpPr>
-          <p:cNvPr id="16" name="TextBox 15"/>
-          <p:cNvSpPr txBox="1"/>
-          <p:nvPr/>
-        </p:nvSpPr>
-        <p:spPr>
-          <a:xfrm>
-            <a:off x="1344168" y="5047488"/>
-            <a:ext cx="10158984" cy="896112"/>
-          </a:xfrm>
-          <a:prstGeom prst="rect">
-            <a:avLst/>
-          </a:prstGeom>
-          <a:noFill/>
-        </p:spPr>
-        <p:txBody>
-          <a:bodyPr wrap="square" lIns="0" rIns="0" tIns="0" bIns="0" anchor="ctr">
-            <a:spAutoFit/>
-          </a:bodyPr>
-          <a:lstStyle/>
-          <a:p>
-            <a:pPr algn="l">
-              <a:spcAft>
-                <a:spcPts val="400"/>
-              </a:spcAft>
-            </a:pPr>
-            <a:r>
-              <a:rPr sz="1300" b="1" i="0">
-                <a:solidFill>
-                  <a:srgbClr val="3A106E"/>
-                </a:solidFill>
-                <a:latin typeface="Yu Gothic"/>
-                <a:ea typeface="Yu Gothic"/>
-                <a:cs typeface="Yu Gothic"/>
-              </a:rPr>
-              <a:t>「決める会議」の運用へのご賛同</a:t>
-            </a:r>
-          </a:p>
-          <a:p>
-            <a:pPr algn="l">
-              <a:spcAft>
-                <a:spcPts val="0"/>
-              </a:spcAft>
-            </a:pPr>
-            <a:r>
-              <a:rPr sz="1050" b="0" i="0">
-                <a:solidFill>
-                  <a:srgbClr val="262630"/>
-                </a:solidFill>
-                <a:latin typeface="Yu Gothic"/>
-                <a:ea typeface="Yu Gothic"/>
-                <a:cs typeface="Yu Gothic"/>
-              </a:rPr>
-              <a:t>報告の受領ではなく、毎回2〜3件の決定をお願いする運び</a:t>
-            </a:r>
-          </a:p>
-        </p:txBody>
-      </p:sp>
-      <p:sp>
-        <p:nvSpPr>
-          <p:cNvPr id="17" name="Rectangle 16"/>
-          <p:cNvSpPr/>
-          <p:nvPr/>
-        </p:nvSpPr>
-        <p:spPr>
-          <a:xfrm>
-            <a:off x="502920" y="6510528"/>
-            <a:ext cx="11183112" cy="15240"/>
-          </a:xfrm>
-          <a:prstGeom prst="rect">
-            <a:avLst/>
-          </a:prstGeom>
-          <a:solidFill>
-            <a:srgbClr val="D9D9E0"/>
-          </a:solidFill>
-          <a:ln>
-            <a:noFill/>
-          </a:ln>
-          <a:effectLst/>
-        </p:spPr>
-        <p:style>
-          <a:lnRef idx="1">
-            <a:schemeClr val="accent1"/>
-          </a:lnRef>
-          <a:fillRef idx="3">
-            <a:schemeClr val="accent1"/>
-          </a:fillRef>
-          <a:effectRef idx="2">
-            <a:schemeClr val="accent1"/>
-          </a:effectRef>
-          <a:fontRef idx="minor">
-            <a:schemeClr val="lt1"/>
-          </a:fontRef>
-        </p:style>
-        <p:txBody>
-          <a:bodyPr rtlCol="0" anchor="ctr"/>
-          <a:lstStyle/>
-          <a:p>
-            <a:pPr algn="ctr"/>
-          </a:p>
-        </p:txBody>
-      </p:sp>
-      <p:sp>
-        <p:nvSpPr>
-          <p:cNvPr id="18" name="TextBox 17"/>
-          <p:cNvSpPr txBox="1"/>
-          <p:nvPr/>
-        </p:nvSpPr>
-        <p:spPr>
-          <a:xfrm>
-            <a:off x="502920" y="6565392"/>
-            <a:ext cx="8686800" cy="274320"/>
-          </a:xfrm>
-          <a:prstGeom prst="rect">
-            <a:avLst/>
-          </a:prstGeom>
-          <a:noFill/>
-        </p:spPr>
-        <p:txBody>
-          <a:bodyPr wrap="square" lIns="0" rIns="0" tIns="0" bIns="0">
-            <a:spAutoFit/>
-          </a:bodyPr>
-          <a:lstStyle/>
-          <a:p>
-            <a:pPr algn="l">
-              <a:spcAft>
-                <a:spcPts val="400"/>
-              </a:spcAft>
-            </a:pPr>
-            <a:r>
               <a:rPr sz="750" b="0" i="0">
                 <a:solidFill>
-                  <a:srgbClr val="8A8A99"/>
+                  <a:srgbClr val="8A8F9C"/>
                 </a:solidFill>
                 <a:latin typeface="Yu Gothic"/>
                 <a:ea typeface="Yu Gothic"/>
@@ -8035,7 +8430,7 @@
             <a:r>
               <a:rPr sz="900" b="0" i="0">
                 <a:solidFill>
-                  <a:srgbClr val="5F5F6E"/>
+                  <a:srgbClr val="6B7280"/>
                 </a:solidFill>
                 <a:latin typeface="Yu Gothic"/>
                 <a:ea typeface="Yu Gothic"/>
@@ -8066,35 +8461,55 @@
       <p:grpSpPr/>
       <p:sp>
         <p:nvSpPr>
-          <p:cNvPr id="2" name="TextBox 1"/>
-          <p:cNvSpPr txBox="1"/>
-          <p:nvPr/>
-        </p:nvSpPr>
-        <p:spPr>
-          <a:xfrm>
-            <a:off x="502920" y="256032"/>
-            <a:ext cx="11155680" cy="256032"/>
-          </a:xfrm>
-          <a:prstGeom prst="rect">
-            <a:avLst/>
-          </a:prstGeom>
-          <a:noFill/>
-        </p:spPr>
-        <p:txBody>
-          <a:bodyPr wrap="square" lIns="0" rIns="0" tIns="0" bIns="0">
-            <a:spAutoFit/>
-          </a:bodyPr>
+          <p:cNvPr id="2" name="Rounded Rectangle 1"/>
+          <p:cNvSpPr/>
+          <p:nvPr/>
+        </p:nvSpPr>
+        <p:spPr>
+          <a:xfrm>
+            <a:off x="502920" y="274320"/>
+            <a:ext cx="1757934" cy="274320"/>
+          </a:xfrm>
+          <a:prstGeom prst="roundRect">
+            <a:avLst>
+              <a:gd name="adj" fmla="val 50000"/>
+            </a:avLst>
+          </a:prstGeom>
+          <a:solidFill>
+            <a:srgbClr val="EAF1FE"/>
+          </a:solidFill>
+          <a:ln>
+            <a:noFill/>
+          </a:ln>
+          <a:effectLst/>
+        </p:spPr>
+        <p:style>
+          <a:lnRef idx="1">
+            <a:schemeClr val="accent1"/>
+          </a:lnRef>
+          <a:fillRef idx="3">
+            <a:schemeClr val="accent1"/>
+          </a:fillRef>
+          <a:effectRef idx="2">
+            <a:schemeClr val="accent1"/>
+          </a:effectRef>
+          <a:fontRef idx="minor">
+            <a:schemeClr val="lt1"/>
+          </a:fontRef>
+        </p:style>
+        <p:txBody>
+          <a:bodyPr rtlCol="0" anchor="ctr" wrap="none" lIns="109728" rIns="109728" tIns="0" bIns="0"/>
           <a:lstStyle/>
           <a:p>
             <a:pPr algn="l">
               <a:spcAft>
-                <a:spcPts val="400"/>
+                <a:spcPts val="0"/>
               </a:spcAft>
             </a:pPr>
             <a:r>
-              <a:rPr sz="1000" b="1" i="0">
-                <a:solidFill>
-                  <a:srgbClr val="7823DC"/>
+              <a:rPr sz="900" b="1" i="0">
+                <a:solidFill>
+                  <a:srgbClr val="2563EB"/>
                 </a:solidFill>
                 <a:latin typeface="Yu Gothic"/>
                 <a:ea typeface="Yu Gothic"/>
@@ -8113,8 +8528,8 @@
         </p:nvSpPr>
         <p:spPr>
           <a:xfrm>
-            <a:off x="502920" y="512064"/>
-            <a:ext cx="11155680" cy="868680"/>
+            <a:off x="502920" y="566928"/>
+            <a:ext cx="11155680" cy="804672"/>
           </a:xfrm>
           <a:prstGeom prst="rect">
             <a:avLst/>
@@ -8133,9 +8548,9 @@
               </a:spcAft>
             </a:pPr>
             <a:r>
-              <a:rPr sz="1900" b="1" i="0">
-                <a:solidFill>
-                  <a:srgbClr val="262630"/>
+              <a:rPr sz="1800" b="1" i="0">
+                <a:solidFill>
+                  <a:srgbClr val="1B1B26"/>
                 </a:solidFill>
                 <a:latin typeface="Yu Gothic"/>
                 <a:ea typeface="Yu Gothic"/>
@@ -8154,14 +8569,14 @@
         </p:nvSpPr>
         <p:spPr>
           <a:xfrm>
-            <a:off x="502920" y="1389888"/>
-            <a:ext cx="1463040" cy="33020"/>
+            <a:off x="502920" y="1335024"/>
+            <a:ext cx="11183112" cy="11430"/>
           </a:xfrm>
           <a:prstGeom prst="rect">
             <a:avLst/>
           </a:prstGeom>
           <a:solidFill>
-            <a:srgbClr val="7823DC"/>
+            <a:srgbClr val="E5E7EB"/>
           </a:solidFill>
           <a:ln>
             <a:noFill/>
@@ -8205,9 +8620,7 @@
         <a:graphic>
           <a:graphicData uri="http://schemas.openxmlformats.org/drawingml/2006/table">
             <a:tbl>
-              <a:tblPr firstRow="1" bandRow="1">
-                <a:tableStyleId>{5C22544A-7EE6-4342-B048-85BDC9FD1C3A}</a:tableStyleId>
-              </a:tblPr>
+              <a:tblPr firstRow="0" bandRow="0"/>
               <a:tblGrid>
                 <a:gridCol w="2291621"/>
                 <a:gridCol w="5499891"/>
@@ -8227,7 +8640,7 @@
                       <a:r>
                         <a:rPr sz="1000" b="1" i="0">
                           <a:solidFill>
-                            <a:srgbClr val="FFFFFF"/>
+                            <a:srgbClr val="1B1B26"/>
                           </a:solidFill>
                           <a:latin typeface="Yu Gothic"/>
                           <a:ea typeface="Yu Gothic"/>
@@ -8237,10 +8650,20 @@
                       </a:r>
                     </a:p>
                   </a:txBody>
-                  <a:tcPr marL="54864" marR="54864" marT="18288" marB="18288" anchor="ctr">
+                  <a:tcPr marL="73152" marR="54864" marT="18288" marB="18288" anchor="ctr">
                     <a:solidFill>
-                      <a:srgbClr val="3A106E"/>
+                      <a:srgbClr val="EAF1FE"/>
                     </a:solidFill>
+                    <a:lnB w="15240" cap="flat">
+                      <a:solidFill>
+                        <a:srgbClr val="2563EB"/>
+                      </a:solidFill>
+                    </a:lnB>
+                    <a:lnT w="15240" cap="flat">
+                      <a:solidFill>
+                        <a:srgbClr val="2563EB"/>
+                      </a:solidFill>
+                    </a:lnT>
                   </a:tcPr>
                 </a:tc>
                 <a:tc>
@@ -8256,7 +8679,7 @@
                       <a:r>
                         <a:rPr sz="1000" b="1" i="0">
                           <a:solidFill>
-                            <a:srgbClr val="FFFFFF"/>
+                            <a:srgbClr val="1B1B26"/>
                           </a:solidFill>
                           <a:latin typeface="Yu Gothic"/>
                           <a:ea typeface="Yu Gothic"/>
@@ -8266,10 +8689,20 @@
                       </a:r>
                     </a:p>
                   </a:txBody>
-                  <a:tcPr marL="54864" marR="54864" marT="18288" marB="18288" anchor="ctr">
+                  <a:tcPr marL="73152" marR="54864" marT="18288" marB="18288" anchor="ctr">
                     <a:solidFill>
-                      <a:srgbClr val="3A106E"/>
+                      <a:srgbClr val="EAF1FE"/>
                     </a:solidFill>
+                    <a:lnB w="15240" cap="flat">
+                      <a:solidFill>
+                        <a:srgbClr val="2563EB"/>
+                      </a:solidFill>
+                    </a:lnB>
+                    <a:lnT w="15240" cap="flat">
+                      <a:solidFill>
+                        <a:srgbClr val="2563EB"/>
+                      </a:solidFill>
+                    </a:lnT>
                   </a:tcPr>
                 </a:tc>
                 <a:tc>
@@ -8285,7 +8718,7 @@
                       <a:r>
                         <a:rPr sz="1000" b="1" i="0">
                           <a:solidFill>
-                            <a:srgbClr val="FFFFFF"/>
+                            <a:srgbClr val="1B1B26"/>
                           </a:solidFill>
                           <a:latin typeface="Yu Gothic"/>
                           <a:ea typeface="Yu Gothic"/>
@@ -8295,10 +8728,20 @@
                       </a:r>
                     </a:p>
                   </a:txBody>
-                  <a:tcPr marL="54864" marR="54864" marT="18288" marB="18288" anchor="ctr">
+                  <a:tcPr marL="73152" marR="54864" marT="18288" marB="18288" anchor="ctr">
                     <a:solidFill>
-                      <a:srgbClr val="3A106E"/>
+                      <a:srgbClr val="EAF1FE"/>
                     </a:solidFill>
+                    <a:lnB w="15240" cap="flat">
+                      <a:solidFill>
+                        <a:srgbClr val="2563EB"/>
+                      </a:solidFill>
+                    </a:lnB>
+                    <a:lnT w="15240" cap="flat">
+                      <a:solidFill>
+                        <a:srgbClr val="2563EB"/>
+                      </a:solidFill>
+                    </a:lnT>
                   </a:tcPr>
                 </a:tc>
               </a:tr>
@@ -8316,7 +8759,7 @@
                       <a:r>
                         <a:rPr sz="900" b="1" i="0">
                           <a:solidFill>
-                            <a:srgbClr val="3A106E"/>
+                            <a:srgbClr val="2563EB"/>
                           </a:solidFill>
                           <a:latin typeface="Yu Gothic"/>
                           <a:ea typeface="Yu Gothic"/>
@@ -8334,7 +8777,7 @@
                       <a:r>
                         <a:rPr sz="900" b="1" i="0">
                           <a:solidFill>
-                            <a:srgbClr val="3A106E"/>
+                            <a:srgbClr val="2563EB"/>
                           </a:solidFill>
                           <a:latin typeface="Yu Gothic"/>
                           <a:ea typeface="Yu Gothic"/>
@@ -8344,10 +8787,15 @@
                       </a:r>
                     </a:p>
                   </a:txBody>
-                  <a:tcPr marL="54864" marR="54864" marT="18288" marB="18288" anchor="ctr">
+                  <a:tcPr marL="73152" marR="54864" marT="18288" marB="18288" anchor="ctr">
                     <a:solidFill>
                       <a:srgbClr val="FFFFFF"/>
                     </a:solidFill>
+                    <a:lnB w="9525" cap="flat">
+                      <a:solidFill>
+                        <a:srgbClr val="E5E7EB"/>
+                      </a:solidFill>
+                    </a:lnB>
                   </a:tcPr>
                 </a:tc>
                 <a:tc>
@@ -8363,7 +8811,7 @@
                       <a:r>
                         <a:rPr sz="900" b="0" i="0">
                           <a:solidFill>
-                            <a:srgbClr val="262630"/>
+                            <a:srgbClr val="1B1B26"/>
                           </a:solidFill>
                           <a:latin typeface="Yu Gothic"/>
                           <a:ea typeface="Yu Gothic"/>
@@ -8373,10 +8821,15 @@
                       </a:r>
                     </a:p>
                   </a:txBody>
-                  <a:tcPr marL="54864" marR="54864" marT="18288" marB="18288" anchor="ctr">
+                  <a:tcPr marL="73152" marR="54864" marT="18288" marB="18288" anchor="ctr">
                     <a:solidFill>
                       <a:srgbClr val="FFFFFF"/>
                     </a:solidFill>
+                    <a:lnB w="9525" cap="flat">
+                      <a:solidFill>
+                        <a:srgbClr val="E5E7EB"/>
+                      </a:solidFill>
+                    </a:lnB>
                   </a:tcPr>
                 </a:tc>
                 <a:tc>
@@ -8392,7 +8845,7 @@
                       <a:r>
                         <a:rPr sz="900" b="0" i="0">
                           <a:solidFill>
-                            <a:srgbClr val="262630"/>
+                            <a:srgbClr val="1B1B26"/>
                           </a:solidFill>
                           <a:latin typeface="Yu Gothic"/>
                           <a:ea typeface="Yu Gothic"/>
@@ -8402,10 +8855,15 @@
                       </a:r>
                     </a:p>
                   </a:txBody>
-                  <a:tcPr marL="54864" marR="54864" marT="18288" marB="18288" anchor="ctr">
+                  <a:tcPr marL="73152" marR="54864" marT="18288" marB="18288" anchor="ctr">
                     <a:solidFill>
                       <a:srgbClr val="FFFFFF"/>
                     </a:solidFill>
+                    <a:lnB w="9525" cap="flat">
+                      <a:solidFill>
+                        <a:srgbClr val="E5E7EB"/>
+                      </a:solidFill>
+                    </a:lnB>
                   </a:tcPr>
                 </a:tc>
               </a:tr>
@@ -8423,7 +8881,7 @@
                       <a:r>
                         <a:rPr sz="900" b="1" i="0">
                           <a:solidFill>
-                            <a:srgbClr val="3A106E"/>
+                            <a:srgbClr val="2563EB"/>
                           </a:solidFill>
                           <a:latin typeface="Yu Gothic"/>
                           <a:ea typeface="Yu Gothic"/>
@@ -8441,7 +8899,7 @@
                       <a:r>
                         <a:rPr sz="900" b="1" i="0">
                           <a:solidFill>
-                            <a:srgbClr val="3A106E"/>
+                            <a:srgbClr val="2563EB"/>
                           </a:solidFill>
                           <a:latin typeface="Yu Gothic"/>
                           <a:ea typeface="Yu Gothic"/>
@@ -8451,10 +8909,15 @@
                       </a:r>
                     </a:p>
                   </a:txBody>
-                  <a:tcPr marL="54864" marR="54864" marT="18288" marB="18288" anchor="ctr">
+                  <a:tcPr marL="73152" marR="54864" marT="18288" marB="18288" anchor="ctr">
                     <a:solidFill>
-                      <a:srgbClr val="F7F7F9"/>
+                      <a:srgbClr val="FFFFFF"/>
                     </a:solidFill>
+                    <a:lnB w="9525" cap="flat">
+                      <a:solidFill>
+                        <a:srgbClr val="E5E7EB"/>
+                      </a:solidFill>
+                    </a:lnB>
                   </a:tcPr>
                 </a:tc>
                 <a:tc>
@@ -8470,7 +8933,7 @@
                       <a:r>
                         <a:rPr sz="900" b="0" i="0">
                           <a:solidFill>
-                            <a:srgbClr val="262630"/>
+                            <a:srgbClr val="1B1B26"/>
                           </a:solidFill>
                           <a:latin typeface="Yu Gothic"/>
                           <a:ea typeface="Yu Gothic"/>
@@ -8480,10 +8943,15 @@
                       </a:r>
                     </a:p>
                   </a:txBody>
-                  <a:tcPr marL="54864" marR="54864" marT="18288" marB="18288" anchor="ctr">
+                  <a:tcPr marL="73152" marR="54864" marT="18288" marB="18288" anchor="ctr">
                     <a:solidFill>
-                      <a:srgbClr val="F7F7F9"/>
+                      <a:srgbClr val="FFFFFF"/>
                     </a:solidFill>
+                    <a:lnB w="9525" cap="flat">
+                      <a:solidFill>
+                        <a:srgbClr val="E5E7EB"/>
+                      </a:solidFill>
+                    </a:lnB>
                   </a:tcPr>
                 </a:tc>
                 <a:tc>
@@ -8499,7 +8967,7 @@
                       <a:r>
                         <a:rPr sz="900" b="0" i="0">
                           <a:solidFill>
-                            <a:srgbClr val="262630"/>
+                            <a:srgbClr val="1B1B26"/>
                           </a:solidFill>
                           <a:latin typeface="Yu Gothic"/>
                           <a:ea typeface="Yu Gothic"/>
@@ -8509,10 +8977,15 @@
                       </a:r>
                     </a:p>
                   </a:txBody>
-                  <a:tcPr marL="54864" marR="54864" marT="18288" marB="18288" anchor="ctr">
+                  <a:tcPr marL="73152" marR="54864" marT="18288" marB="18288" anchor="ctr">
                     <a:solidFill>
-                      <a:srgbClr val="F7F7F9"/>
+                      <a:srgbClr val="FFFFFF"/>
                     </a:solidFill>
+                    <a:lnB w="9525" cap="flat">
+                      <a:solidFill>
+                        <a:srgbClr val="E5E7EB"/>
+                      </a:solidFill>
+                    </a:lnB>
                   </a:tcPr>
                 </a:tc>
               </a:tr>
@@ -8530,7 +9003,7 @@
                       <a:r>
                         <a:rPr sz="900" b="1" i="0">
                           <a:solidFill>
-                            <a:srgbClr val="3A106E"/>
+                            <a:srgbClr val="2563EB"/>
                           </a:solidFill>
                           <a:latin typeface="Yu Gothic"/>
                           <a:ea typeface="Yu Gothic"/>
@@ -8548,7 +9021,7 @@
                       <a:r>
                         <a:rPr sz="900" b="1" i="0">
                           <a:solidFill>
-                            <a:srgbClr val="3A106E"/>
+                            <a:srgbClr val="2563EB"/>
                           </a:solidFill>
                           <a:latin typeface="Yu Gothic"/>
                           <a:ea typeface="Yu Gothic"/>
@@ -8558,10 +9031,15 @@
                       </a:r>
                     </a:p>
                   </a:txBody>
-                  <a:tcPr marL="54864" marR="54864" marT="18288" marB="18288" anchor="ctr">
+                  <a:tcPr marL="73152" marR="54864" marT="18288" marB="18288" anchor="ctr">
                     <a:solidFill>
                       <a:srgbClr val="FFFFFF"/>
                     </a:solidFill>
+                    <a:lnB w="9525" cap="flat">
+                      <a:solidFill>
+                        <a:srgbClr val="E5E7EB"/>
+                      </a:solidFill>
+                    </a:lnB>
                   </a:tcPr>
                 </a:tc>
                 <a:tc>
@@ -8577,7 +9055,7 @@
                       <a:r>
                         <a:rPr sz="900" b="0" i="0">
                           <a:solidFill>
-                            <a:srgbClr val="262630"/>
+                            <a:srgbClr val="1B1B26"/>
                           </a:solidFill>
                           <a:latin typeface="Yu Gothic"/>
                           <a:ea typeface="Yu Gothic"/>
@@ -8587,10 +9065,15 @@
                       </a:r>
                     </a:p>
                   </a:txBody>
-                  <a:tcPr marL="54864" marR="54864" marT="18288" marB="18288" anchor="ctr">
+                  <a:tcPr marL="73152" marR="54864" marT="18288" marB="18288" anchor="ctr">
                     <a:solidFill>
                       <a:srgbClr val="FFFFFF"/>
                     </a:solidFill>
+                    <a:lnB w="9525" cap="flat">
+                      <a:solidFill>
+                        <a:srgbClr val="E5E7EB"/>
+                      </a:solidFill>
+                    </a:lnB>
                   </a:tcPr>
                 </a:tc>
                 <a:tc>
@@ -8606,7 +9089,7 @@
                       <a:r>
                         <a:rPr sz="900" b="0" i="0">
                           <a:solidFill>
-                            <a:srgbClr val="262630"/>
+                            <a:srgbClr val="1B1B26"/>
                           </a:solidFill>
                           <a:latin typeface="Yu Gothic"/>
                           <a:ea typeface="Yu Gothic"/>
@@ -8616,10 +9099,15 @@
                       </a:r>
                     </a:p>
                   </a:txBody>
-                  <a:tcPr marL="54864" marR="54864" marT="18288" marB="18288" anchor="ctr">
+                  <a:tcPr marL="73152" marR="54864" marT="18288" marB="18288" anchor="ctr">
                     <a:solidFill>
                       <a:srgbClr val="FFFFFF"/>
                     </a:solidFill>
+                    <a:lnB w="9525" cap="flat">
+                      <a:solidFill>
+                        <a:srgbClr val="E5E7EB"/>
+                      </a:solidFill>
+                    </a:lnB>
                   </a:tcPr>
                 </a:tc>
               </a:tr>
@@ -8637,7 +9125,7 @@
                       <a:r>
                         <a:rPr sz="900" b="1" i="0">
                           <a:solidFill>
-                            <a:srgbClr val="3A106E"/>
+                            <a:srgbClr val="2563EB"/>
                           </a:solidFill>
                           <a:latin typeface="Yu Gothic"/>
                           <a:ea typeface="Yu Gothic"/>
@@ -8655,7 +9143,7 @@
                       <a:r>
                         <a:rPr sz="900" b="1" i="0">
                           <a:solidFill>
-                            <a:srgbClr val="3A106E"/>
+                            <a:srgbClr val="2563EB"/>
                           </a:solidFill>
                           <a:latin typeface="Yu Gothic"/>
                           <a:ea typeface="Yu Gothic"/>
@@ -8665,10 +9153,15 @@
                       </a:r>
                     </a:p>
                   </a:txBody>
-                  <a:tcPr marL="54864" marR="54864" marT="18288" marB="18288" anchor="ctr">
+                  <a:tcPr marL="73152" marR="54864" marT="18288" marB="18288" anchor="ctr">
                     <a:solidFill>
-                      <a:srgbClr val="F7F7F9"/>
+                      <a:srgbClr val="FFFFFF"/>
                     </a:solidFill>
+                    <a:lnB w="9525" cap="flat">
+                      <a:solidFill>
+                        <a:srgbClr val="E5E7EB"/>
+                      </a:solidFill>
+                    </a:lnB>
                   </a:tcPr>
                 </a:tc>
                 <a:tc>
@@ -8684,7 +9177,7 @@
                       <a:r>
                         <a:rPr sz="900" b="0" i="0">
                           <a:solidFill>
-                            <a:srgbClr val="262630"/>
+                            <a:srgbClr val="1B1B26"/>
                           </a:solidFill>
                           <a:latin typeface="Yu Gothic"/>
                           <a:ea typeface="Yu Gothic"/>
@@ -8694,10 +9187,15 @@
                       </a:r>
                     </a:p>
                   </a:txBody>
-                  <a:tcPr marL="54864" marR="54864" marT="18288" marB="18288" anchor="ctr">
+                  <a:tcPr marL="73152" marR="54864" marT="18288" marB="18288" anchor="ctr">
                     <a:solidFill>
-                      <a:srgbClr val="F7F7F9"/>
+                      <a:srgbClr val="FFFFFF"/>
                     </a:solidFill>
+                    <a:lnB w="9525" cap="flat">
+                      <a:solidFill>
+                        <a:srgbClr val="E5E7EB"/>
+                      </a:solidFill>
+                    </a:lnB>
                   </a:tcPr>
                 </a:tc>
                 <a:tc>
@@ -8713,7 +9211,7 @@
                       <a:r>
                         <a:rPr sz="900" b="0" i="0">
                           <a:solidFill>
-                            <a:srgbClr val="262630"/>
+                            <a:srgbClr val="1B1B26"/>
                           </a:solidFill>
                           <a:latin typeface="Yu Gothic"/>
                           <a:ea typeface="Yu Gothic"/>
@@ -8723,10 +9221,15 @@
                       </a:r>
                     </a:p>
                   </a:txBody>
-                  <a:tcPr marL="54864" marR="54864" marT="18288" marB="18288" anchor="ctr">
+                  <a:tcPr marL="73152" marR="54864" marT="18288" marB="18288" anchor="ctr">
                     <a:solidFill>
-                      <a:srgbClr val="F7F7F9"/>
+                      <a:srgbClr val="FFFFFF"/>
                     </a:solidFill>
+                    <a:lnB w="9525" cap="flat">
+                      <a:solidFill>
+                        <a:srgbClr val="E5E7EB"/>
+                      </a:solidFill>
+                    </a:lnB>
                   </a:tcPr>
                 </a:tc>
               </a:tr>
@@ -8749,7 +9252,7 @@
             <a:avLst/>
           </a:prstGeom>
           <a:solidFill>
-            <a:srgbClr val="D9D9E0"/>
+            <a:srgbClr val="E5E7EB"/>
           </a:solidFill>
           <a:ln>
             <a:noFill/>
@@ -8808,7 +9311,7 @@
             <a:r>
               <a:rPr sz="750" b="0" i="0">
                 <a:solidFill>
-                  <a:srgbClr val="8A8A99"/>
+                  <a:srgbClr val="8A8F9C"/>
                 </a:solidFill>
                 <a:latin typeface="Yu Gothic"/>
                 <a:ea typeface="Yu Gothic"/>
@@ -8849,7 +9352,7 @@
             <a:r>
               <a:rPr sz="900" b="0" i="0">
                 <a:solidFill>
-                  <a:srgbClr val="5F5F6E"/>
+                  <a:srgbClr val="6B7280"/>
                 </a:solidFill>
                 <a:latin typeface="Yu Gothic"/>
                 <a:ea typeface="Yu Gothic"/>
@@ -8880,14 +9383,937 @@
       <p:grpSpPr/>
       <p:sp>
         <p:nvSpPr>
-          <p:cNvPr id="2" name="TextBox 1"/>
+          <p:cNvPr id="2" name="Rounded Rectangle 1"/>
+          <p:cNvSpPr/>
+          <p:nvPr/>
+        </p:nvSpPr>
+        <p:spPr>
+          <a:xfrm>
+            <a:off x="502920" y="274320"/>
+            <a:ext cx="1005840" cy="274320"/>
+          </a:xfrm>
+          <a:prstGeom prst="roundRect">
+            <a:avLst>
+              <a:gd name="adj" fmla="val 50000"/>
+            </a:avLst>
+          </a:prstGeom>
+          <a:solidFill>
+            <a:srgbClr val="EAF1FE"/>
+          </a:solidFill>
+          <a:ln>
+            <a:noFill/>
+          </a:ln>
+          <a:effectLst/>
+        </p:spPr>
+        <p:style>
+          <a:lnRef idx="1">
+            <a:schemeClr val="accent1"/>
+          </a:lnRef>
+          <a:fillRef idx="3">
+            <a:schemeClr val="accent1"/>
+          </a:fillRef>
+          <a:effectRef idx="2">
+            <a:schemeClr val="accent1"/>
+          </a:effectRef>
+          <a:fontRef idx="minor">
+            <a:schemeClr val="lt1"/>
+          </a:fontRef>
+        </p:style>
+        <p:txBody>
+          <a:bodyPr rtlCol="0" anchor="ctr" wrap="none" lIns="109728" rIns="109728" tIns="0" bIns="0"/>
+          <a:lstStyle/>
+          <a:p>
+            <a:pPr algn="l">
+              <a:spcAft>
+                <a:spcPts val="0"/>
+              </a:spcAft>
+            </a:pPr>
+            <a:r>
+              <a:rPr sz="900" b="1" i="0">
+                <a:solidFill>
+                  <a:srgbClr val="2563EB"/>
+                </a:solidFill>
+                <a:latin typeface="Yu Gothic"/>
+                <a:ea typeface="Yu Gothic"/>
+                <a:cs typeface="Yu Gothic"/>
+              </a:rPr>
+              <a:t>NEXT STEPS</a:t>
+            </a:r>
+          </a:p>
+        </p:txBody>
+      </p:sp>
+      <p:sp>
+        <p:nvSpPr>
+          <p:cNvPr id="3" name="TextBox 2"/>
           <p:cNvSpPr txBox="1"/>
           <p:nvPr/>
         </p:nvSpPr>
         <p:spPr>
           <a:xfrm>
-            <a:off x="502920" y="256032"/>
-            <a:ext cx="11155680" cy="256032"/>
+            <a:off x="502920" y="566928"/>
+            <a:ext cx="11155680" cy="804672"/>
+          </a:xfrm>
+          <a:prstGeom prst="rect">
+            <a:avLst/>
+          </a:prstGeom>
+          <a:noFill/>
+        </p:spPr>
+        <p:txBody>
+          <a:bodyPr wrap="square" lIns="0" rIns="0" tIns="0" bIns="0">
+            <a:spAutoFit/>
+          </a:bodyPr>
+          <a:lstStyle/>
+          <a:p>
+            <a:pPr algn="l">
+              <a:spcAft>
+                <a:spcPts val="0"/>
+              </a:spcAft>
+            </a:pPr>
+            <a:r>
+              <a:rPr sz="1800" b="1" i="0">
+                <a:solidFill>
+                  <a:srgbClr val="1B1B26"/>
+                </a:solidFill>
+                <a:latin typeface="Yu Gothic"/>
+                <a:ea typeface="Yu Gothic"/>
+                <a:cs typeface="Yu Gothic"/>
+              </a:rPr>
+              <a:t>次のステップ</a:t>
+            </a:r>
+          </a:p>
+        </p:txBody>
+      </p:sp>
+      <p:sp>
+        <p:nvSpPr>
+          <p:cNvPr id="4" name="Rectangle 3"/>
+          <p:cNvSpPr/>
+          <p:nvPr/>
+        </p:nvSpPr>
+        <p:spPr>
+          <a:xfrm>
+            <a:off x="502920" y="1335024"/>
+            <a:ext cx="11183112" cy="11430"/>
+          </a:xfrm>
+          <a:prstGeom prst="rect">
+            <a:avLst/>
+          </a:prstGeom>
+          <a:solidFill>
+            <a:srgbClr val="E5E7EB"/>
+          </a:solidFill>
+          <a:ln>
+            <a:noFill/>
+          </a:ln>
+          <a:effectLst/>
+        </p:spPr>
+        <p:style>
+          <a:lnRef idx="1">
+            <a:schemeClr val="accent1"/>
+          </a:lnRef>
+          <a:fillRef idx="3">
+            <a:schemeClr val="accent1"/>
+          </a:fillRef>
+          <a:effectRef idx="2">
+            <a:schemeClr val="accent1"/>
+          </a:effectRef>
+          <a:fontRef idx="minor">
+            <a:schemeClr val="lt1"/>
+          </a:fontRef>
+        </p:style>
+        <p:txBody>
+          <a:bodyPr rtlCol="0" anchor="ctr"/>
+          <a:lstStyle/>
+          <a:p>
+            <a:pPr algn="ctr"/>
+          </a:p>
+        </p:txBody>
+      </p:sp>
+      <p:sp>
+        <p:nvSpPr>
+          <p:cNvPr id="5" name="Rectangle 4"/>
+          <p:cNvSpPr/>
+          <p:nvPr/>
+        </p:nvSpPr>
+        <p:spPr>
+          <a:xfrm>
+            <a:off x="502920" y="2212848"/>
+            <a:ext cx="11183112" cy="859536"/>
+          </a:xfrm>
+          <a:prstGeom prst="rect">
+            <a:avLst/>
+          </a:prstGeom>
+          <a:solidFill>
+            <a:srgbClr val="FFFFFF"/>
+          </a:solidFill>
+          <a:ln w="9525">
+            <a:solidFill>
+              <a:srgbClr val="E5E7EB"/>
+            </a:solidFill>
+          </a:ln>
+          <a:effectLst/>
+        </p:spPr>
+        <p:style>
+          <a:lnRef idx="1">
+            <a:schemeClr val="accent1"/>
+          </a:lnRef>
+          <a:fillRef idx="3">
+            <a:schemeClr val="accent1"/>
+          </a:fillRef>
+          <a:effectRef idx="2">
+            <a:schemeClr val="accent1"/>
+          </a:effectRef>
+          <a:fontRef idx="minor">
+            <a:schemeClr val="lt1"/>
+          </a:fontRef>
+        </p:style>
+        <p:txBody>
+          <a:bodyPr rtlCol="0" anchor="ctr"/>
+          <a:lstStyle/>
+          <a:p>
+            <a:pPr algn="ctr"/>
+          </a:p>
+        </p:txBody>
+      </p:sp>
+      <p:sp>
+        <p:nvSpPr>
+          <p:cNvPr id="6" name="Rectangle 5"/>
+          <p:cNvSpPr/>
+          <p:nvPr/>
+        </p:nvSpPr>
+        <p:spPr>
+          <a:xfrm>
+            <a:off x="502920" y="2212848"/>
+            <a:ext cx="2468880" cy="859536"/>
+          </a:xfrm>
+          <a:prstGeom prst="rect">
+            <a:avLst/>
+          </a:prstGeom>
+          <a:solidFill>
+            <a:srgbClr val="2563EB"/>
+          </a:solidFill>
+          <a:ln>
+            <a:noFill/>
+          </a:ln>
+          <a:effectLst/>
+        </p:spPr>
+        <p:style>
+          <a:lnRef idx="1">
+            <a:schemeClr val="accent1"/>
+          </a:lnRef>
+          <a:fillRef idx="3">
+            <a:schemeClr val="accent1"/>
+          </a:fillRef>
+          <a:effectRef idx="2">
+            <a:schemeClr val="accent1"/>
+          </a:effectRef>
+          <a:fontRef idx="minor">
+            <a:schemeClr val="lt1"/>
+          </a:fontRef>
+        </p:style>
+        <p:txBody>
+          <a:bodyPr rtlCol="0" anchor="ctr"/>
+          <a:lstStyle/>
+          <a:p>
+            <a:pPr algn="ctr"/>
+          </a:p>
+        </p:txBody>
+      </p:sp>
+      <p:sp>
+        <p:nvSpPr>
+          <p:cNvPr id="7" name="TextBox 6"/>
+          <p:cNvSpPr txBox="1"/>
+          <p:nvPr/>
+        </p:nvSpPr>
+        <p:spPr>
+          <a:xfrm>
+            <a:off x="667512" y="2267712"/>
+            <a:ext cx="2194560" cy="749808"/>
+          </a:xfrm>
+          <a:prstGeom prst="rect">
+            <a:avLst/>
+          </a:prstGeom>
+          <a:noFill/>
+        </p:spPr>
+        <p:txBody>
+          <a:bodyPr wrap="square" lIns="0" rIns="0" tIns="0" bIns="0" anchor="ctr">
+            <a:spAutoFit/>
+          </a:bodyPr>
+          <a:lstStyle/>
+          <a:p>
+            <a:pPr algn="ctr">
+              <a:spcAft>
+                <a:spcPts val="0"/>
+              </a:spcAft>
+            </a:pPr>
+            <a:r>
+              <a:rPr sz="1400" b="1" i="0">
+                <a:solidFill>
+                  <a:srgbClr val="FFFFFF"/>
+                </a:solidFill>
+                <a:latin typeface="Yu Gothic"/>
+                <a:ea typeface="Yu Gothic"/>
+                <a:cs typeface="Yu Gothic"/>
+              </a:rPr>
+              <a:t>本日</a:t>
+            </a:r>
+          </a:p>
+        </p:txBody>
+      </p:sp>
+      <p:sp>
+        <p:nvSpPr>
+          <p:cNvPr id="8" name="TextBox 7"/>
+          <p:cNvSpPr txBox="1"/>
+          <p:nvPr/>
+        </p:nvSpPr>
+        <p:spPr>
+          <a:xfrm>
+            <a:off x="3227832" y="2267712"/>
+            <a:ext cx="8257032" cy="749808"/>
+          </a:xfrm>
+          <a:prstGeom prst="rect">
+            <a:avLst/>
+          </a:prstGeom>
+          <a:noFill/>
+        </p:spPr>
+        <p:txBody>
+          <a:bodyPr wrap="square" lIns="0" rIns="0" tIns="0" bIns="0" anchor="ctr">
+            <a:spAutoFit/>
+          </a:bodyPr>
+          <a:lstStyle/>
+          <a:p>
+            <a:pPr algn="l">
+              <a:spcAft>
+                <a:spcPts val="0"/>
+              </a:spcAft>
+            </a:pPr>
+            <a:r>
+              <a:rPr sz="1200" b="1" i="0">
+                <a:solidFill>
+                  <a:srgbClr val="1B1B26"/>
+                </a:solidFill>
+                <a:latin typeface="Yu Gothic"/>
+                <a:ea typeface="Yu Gothic"/>
+                <a:cs typeface="Yu Gothic"/>
+              </a:rPr>
+              <a:t>設計と論点のご意見をいただく</a:t>
+            </a:r>
+          </a:p>
+        </p:txBody>
+      </p:sp>
+      <p:sp>
+        <p:nvSpPr>
+          <p:cNvPr id="9" name="Up Arrow 8"/>
+          <p:cNvSpPr/>
+          <p:nvPr/>
+        </p:nvSpPr>
+        <p:spPr>
+          <a:xfrm>
+            <a:off x="5852160" y="3054096"/>
+            <a:ext cx="384048" cy="237744"/>
+          </a:xfrm>
+          <a:prstGeom prst="upArrow">
+            <a:avLst/>
+          </a:prstGeom>
+          <a:solidFill>
+            <a:srgbClr val="2563EB"/>
+          </a:solidFill>
+          <a:ln>
+            <a:noFill/>
+          </a:ln>
+          <a:effectLst/>
+        </p:spPr>
+        <p:style>
+          <a:lnRef idx="1">
+            <a:schemeClr val="accent1"/>
+          </a:lnRef>
+          <a:fillRef idx="3">
+            <a:schemeClr val="accent1"/>
+          </a:fillRef>
+          <a:effectRef idx="2">
+            <a:schemeClr val="accent1"/>
+          </a:effectRef>
+          <a:fontRef idx="minor">
+            <a:schemeClr val="lt1"/>
+          </a:fontRef>
+        </p:style>
+        <p:txBody>
+          <a:bodyPr rtlCol="0" anchor="ctr"/>
+          <a:lstStyle/>
+          <a:p>
+            <a:pPr algn="ctr"/>
+          </a:p>
+        </p:txBody>
+      </p:sp>
+      <p:sp>
+        <p:nvSpPr>
+          <p:cNvPr id="10" name="Rectangle 9"/>
+          <p:cNvSpPr/>
+          <p:nvPr/>
+        </p:nvSpPr>
+        <p:spPr>
+          <a:xfrm>
+            <a:off x="502920" y="3310128"/>
+            <a:ext cx="11183112" cy="859536"/>
+          </a:xfrm>
+          <a:prstGeom prst="rect">
+            <a:avLst/>
+          </a:prstGeom>
+          <a:solidFill>
+            <a:srgbClr val="FFFFFF"/>
+          </a:solidFill>
+          <a:ln w="9525">
+            <a:solidFill>
+              <a:srgbClr val="E5E7EB"/>
+            </a:solidFill>
+          </a:ln>
+          <a:effectLst/>
+        </p:spPr>
+        <p:style>
+          <a:lnRef idx="1">
+            <a:schemeClr val="accent1"/>
+          </a:lnRef>
+          <a:fillRef idx="3">
+            <a:schemeClr val="accent1"/>
+          </a:fillRef>
+          <a:effectRef idx="2">
+            <a:schemeClr val="accent1"/>
+          </a:effectRef>
+          <a:fontRef idx="minor">
+            <a:schemeClr val="lt1"/>
+          </a:fontRef>
+        </p:style>
+        <p:txBody>
+          <a:bodyPr rtlCol="0" anchor="ctr"/>
+          <a:lstStyle/>
+          <a:p>
+            <a:pPr algn="ctr"/>
+          </a:p>
+        </p:txBody>
+      </p:sp>
+      <p:sp>
+        <p:nvSpPr>
+          <p:cNvPr id="11" name="Rectangle 10"/>
+          <p:cNvSpPr/>
+          <p:nvPr/>
+        </p:nvSpPr>
+        <p:spPr>
+          <a:xfrm>
+            <a:off x="502920" y="3310128"/>
+            <a:ext cx="2468880" cy="859536"/>
+          </a:xfrm>
+          <a:prstGeom prst="rect">
+            <a:avLst/>
+          </a:prstGeom>
+          <a:solidFill>
+            <a:srgbClr val="2563EB"/>
+          </a:solidFill>
+          <a:ln>
+            <a:noFill/>
+          </a:ln>
+          <a:effectLst/>
+        </p:spPr>
+        <p:style>
+          <a:lnRef idx="1">
+            <a:schemeClr val="accent1"/>
+          </a:lnRef>
+          <a:fillRef idx="3">
+            <a:schemeClr val="accent1"/>
+          </a:fillRef>
+          <a:effectRef idx="2">
+            <a:schemeClr val="accent1"/>
+          </a:effectRef>
+          <a:fontRef idx="minor">
+            <a:schemeClr val="lt1"/>
+          </a:fontRef>
+        </p:style>
+        <p:txBody>
+          <a:bodyPr rtlCol="0" anchor="ctr"/>
+          <a:lstStyle/>
+          <a:p>
+            <a:pPr algn="ctr"/>
+          </a:p>
+        </p:txBody>
+      </p:sp>
+      <p:sp>
+        <p:nvSpPr>
+          <p:cNvPr id="12" name="TextBox 11"/>
+          <p:cNvSpPr txBox="1"/>
+          <p:nvPr/>
+        </p:nvSpPr>
+        <p:spPr>
+          <a:xfrm>
+            <a:off x="667512" y="3364992"/>
+            <a:ext cx="2194560" cy="749808"/>
+          </a:xfrm>
+          <a:prstGeom prst="rect">
+            <a:avLst/>
+          </a:prstGeom>
+          <a:noFill/>
+        </p:spPr>
+        <p:txBody>
+          <a:bodyPr wrap="square" lIns="0" rIns="0" tIns="0" bIns="0" anchor="ctr">
+            <a:spAutoFit/>
+          </a:bodyPr>
+          <a:lstStyle/>
+          <a:p>
+            <a:pPr algn="ctr">
+              <a:spcAft>
+                <a:spcPts val="0"/>
+              </a:spcAft>
+            </a:pPr>
+            <a:r>
+              <a:rPr sz="1400" b="1" i="0">
+                <a:solidFill>
+                  <a:srgbClr val="FFFFFF"/>
+                </a:solidFill>
+                <a:latin typeface="Yu Gothic"/>
+                <a:ea typeface="Yu Gothic"/>
+                <a:cs typeface="Yu Gothic"/>
+              </a:rPr>
+              <a:t>今週中</a:t>
+            </a:r>
+          </a:p>
+        </p:txBody>
+      </p:sp>
+      <p:sp>
+        <p:nvSpPr>
+          <p:cNvPr id="13" name="TextBox 12"/>
+          <p:cNvSpPr txBox="1"/>
+          <p:nvPr/>
+        </p:nvSpPr>
+        <p:spPr>
+          <a:xfrm>
+            <a:off x="3227832" y="3364992"/>
+            <a:ext cx="8257032" cy="749808"/>
+          </a:xfrm>
+          <a:prstGeom prst="rect">
+            <a:avLst/>
+          </a:prstGeom>
+          <a:noFill/>
+        </p:spPr>
+        <p:txBody>
+          <a:bodyPr wrap="square" lIns="0" rIns="0" tIns="0" bIns="0" anchor="ctr">
+            <a:spAutoFit/>
+          </a:bodyPr>
+          <a:lstStyle/>
+          <a:p>
+            <a:pPr algn="l">
+              <a:spcAft>
+                <a:spcPts val="0"/>
+              </a:spcAft>
+            </a:pPr>
+            <a:r>
+              <a:rPr sz="1200" b="1" i="0">
+                <a:solidFill>
+                  <a:srgbClr val="1B1B26"/>
+                </a:solidFill>
+                <a:latin typeface="Yu Gothic"/>
+                <a:ea typeface="Yu Gothic"/>
+                <a:cs typeface="Yu Gothic"/>
+              </a:rPr>
+              <a:t>ご意見を反映し初回アジェンダ確定（事務局）</a:t>
+            </a:r>
+          </a:p>
+        </p:txBody>
+      </p:sp>
+      <p:sp>
+        <p:nvSpPr>
+          <p:cNvPr id="14" name="Up Arrow 13"/>
+          <p:cNvSpPr/>
+          <p:nvPr/>
+        </p:nvSpPr>
+        <p:spPr>
+          <a:xfrm>
+            <a:off x="5852160" y="4151376"/>
+            <a:ext cx="384048" cy="237744"/>
+          </a:xfrm>
+          <a:prstGeom prst="upArrow">
+            <a:avLst/>
+          </a:prstGeom>
+          <a:solidFill>
+            <a:srgbClr val="2563EB"/>
+          </a:solidFill>
+          <a:ln>
+            <a:noFill/>
+          </a:ln>
+          <a:effectLst/>
+        </p:spPr>
+        <p:style>
+          <a:lnRef idx="1">
+            <a:schemeClr val="accent1"/>
+          </a:lnRef>
+          <a:fillRef idx="3">
+            <a:schemeClr val="accent1"/>
+          </a:fillRef>
+          <a:effectRef idx="2">
+            <a:schemeClr val="accent1"/>
+          </a:effectRef>
+          <a:fontRef idx="minor">
+            <a:schemeClr val="lt1"/>
+          </a:fontRef>
+        </p:style>
+        <p:txBody>
+          <a:bodyPr rtlCol="0" anchor="ctr"/>
+          <a:lstStyle/>
+          <a:p>
+            <a:pPr algn="ctr"/>
+          </a:p>
+        </p:txBody>
+      </p:sp>
+      <p:sp>
+        <p:nvSpPr>
+          <p:cNvPr id="15" name="Rectangle 14"/>
+          <p:cNvSpPr/>
+          <p:nvPr/>
+        </p:nvSpPr>
+        <p:spPr>
+          <a:xfrm>
+            <a:off x="502920" y="4407408"/>
+            <a:ext cx="11183112" cy="859536"/>
+          </a:xfrm>
+          <a:prstGeom prst="rect">
+            <a:avLst/>
+          </a:prstGeom>
+          <a:solidFill>
+            <a:srgbClr val="FFFFFF"/>
+          </a:solidFill>
+          <a:ln w="9525">
+            <a:solidFill>
+              <a:srgbClr val="E5E7EB"/>
+            </a:solidFill>
+          </a:ln>
+          <a:effectLst/>
+        </p:spPr>
+        <p:style>
+          <a:lnRef idx="1">
+            <a:schemeClr val="accent1"/>
+          </a:lnRef>
+          <a:fillRef idx="3">
+            <a:schemeClr val="accent1"/>
+          </a:fillRef>
+          <a:effectRef idx="2">
+            <a:schemeClr val="accent1"/>
+          </a:effectRef>
+          <a:fontRef idx="minor">
+            <a:schemeClr val="lt1"/>
+          </a:fontRef>
+        </p:style>
+        <p:txBody>
+          <a:bodyPr rtlCol="0" anchor="ctr"/>
+          <a:lstStyle/>
+          <a:p>
+            <a:pPr algn="ctr"/>
+          </a:p>
+        </p:txBody>
+      </p:sp>
+      <p:sp>
+        <p:nvSpPr>
+          <p:cNvPr id="16" name="Rectangle 15"/>
+          <p:cNvSpPr/>
+          <p:nvPr/>
+        </p:nvSpPr>
+        <p:spPr>
+          <a:xfrm>
+            <a:off x="502920" y="4407408"/>
+            <a:ext cx="2468880" cy="859536"/>
+          </a:xfrm>
+          <a:prstGeom prst="rect">
+            <a:avLst/>
+          </a:prstGeom>
+          <a:solidFill>
+            <a:srgbClr val="1E40AF"/>
+          </a:solidFill>
+          <a:ln>
+            <a:noFill/>
+          </a:ln>
+          <a:effectLst/>
+        </p:spPr>
+        <p:style>
+          <a:lnRef idx="1">
+            <a:schemeClr val="accent1"/>
+          </a:lnRef>
+          <a:fillRef idx="3">
+            <a:schemeClr val="accent1"/>
+          </a:fillRef>
+          <a:effectRef idx="2">
+            <a:schemeClr val="accent1"/>
+          </a:effectRef>
+          <a:fontRef idx="minor">
+            <a:schemeClr val="lt1"/>
+          </a:fontRef>
+        </p:style>
+        <p:txBody>
+          <a:bodyPr rtlCol="0" anchor="ctr"/>
+          <a:lstStyle/>
+          <a:p>
+            <a:pPr algn="ctr"/>
+          </a:p>
+        </p:txBody>
+      </p:sp>
+      <p:sp>
+        <p:nvSpPr>
+          <p:cNvPr id="17" name="TextBox 16"/>
+          <p:cNvSpPr txBox="1"/>
+          <p:nvPr/>
+        </p:nvSpPr>
+        <p:spPr>
+          <a:xfrm>
+            <a:off x="667512" y="4462272"/>
+            <a:ext cx="2194560" cy="749808"/>
+          </a:xfrm>
+          <a:prstGeom prst="rect">
+            <a:avLst/>
+          </a:prstGeom>
+          <a:noFill/>
+        </p:spPr>
+        <p:txBody>
+          <a:bodyPr wrap="square" lIns="0" rIns="0" tIns="0" bIns="0" anchor="ctr">
+            <a:spAutoFit/>
+          </a:bodyPr>
+          <a:lstStyle/>
+          <a:p>
+            <a:pPr algn="ctr">
+              <a:spcAft>
+                <a:spcPts val="0"/>
+              </a:spcAft>
+            </a:pPr>
+            <a:r>
+              <a:rPr sz="1400" b="1" i="0">
+                <a:solidFill>
+                  <a:srgbClr val="FFFFFF"/>
+                </a:solidFill>
+                <a:latin typeface="Yu Gothic"/>
+                <a:ea typeface="Yu Gothic"/>
+                <a:cs typeface="Yu Gothic"/>
+              </a:rPr>
+              <a:t>初回点検会議</a:t>
+            </a:r>
+          </a:p>
+        </p:txBody>
+      </p:sp>
+      <p:sp>
+        <p:nvSpPr>
+          <p:cNvPr id="18" name="TextBox 17"/>
+          <p:cNvSpPr txBox="1"/>
+          <p:nvPr/>
+        </p:nvSpPr>
+        <p:spPr>
+          <a:xfrm>
+            <a:off x="3227832" y="4462272"/>
+            <a:ext cx="8257032" cy="749808"/>
+          </a:xfrm>
+          <a:prstGeom prst="rect">
+            <a:avLst/>
+          </a:prstGeom>
+          <a:noFill/>
+        </p:spPr>
+        <p:txBody>
+          <a:bodyPr wrap="square" lIns="0" rIns="0" tIns="0" bIns="0" anchor="ctr">
+            <a:spAutoFit/>
+          </a:bodyPr>
+          <a:lstStyle/>
+          <a:p>
+            <a:pPr algn="l">
+              <a:spcAft>
+                <a:spcPts val="0"/>
+              </a:spcAft>
+            </a:pPr>
+            <a:r>
+              <a:rPr sz="1200" b="1" i="0">
+                <a:solidFill>
+                  <a:srgbClr val="1B1B26"/>
+                </a:solidFill>
+                <a:latin typeface="Yu Gothic"/>
+                <a:ea typeface="Yu Gothic"/>
+                <a:cs typeface="Yu Gothic"/>
+              </a:rPr>
+              <a:t>キーチャート5枚でご判断を仰ぐ（日程は秘書室と調整）</a:t>
+            </a:r>
+          </a:p>
+        </p:txBody>
+      </p:sp>
+      <p:sp>
+        <p:nvSpPr>
+          <p:cNvPr id="19" name="Rectangle 18"/>
+          <p:cNvSpPr/>
+          <p:nvPr/>
+        </p:nvSpPr>
+        <p:spPr>
+          <a:xfrm>
+            <a:off x="502920" y="5632704"/>
+            <a:ext cx="11183112" cy="713232"/>
+          </a:xfrm>
+          <a:prstGeom prst="rect">
+            <a:avLst/>
+          </a:prstGeom>
+          <a:solidFill>
+            <a:srgbClr val="1E40AF"/>
+          </a:solidFill>
+          <a:ln>
+            <a:noFill/>
+          </a:ln>
+          <a:effectLst/>
+        </p:spPr>
+        <p:style>
+          <a:lnRef idx="1">
+            <a:schemeClr val="accent1"/>
+          </a:lnRef>
+          <a:fillRef idx="3">
+            <a:schemeClr val="accent1"/>
+          </a:fillRef>
+          <a:effectRef idx="2">
+            <a:schemeClr val="accent1"/>
+          </a:effectRef>
+          <a:fontRef idx="minor">
+            <a:schemeClr val="lt1"/>
+          </a:fontRef>
+        </p:style>
+        <p:txBody>
+          <a:bodyPr rtlCol="0" anchor="ctr"/>
+          <a:lstStyle/>
+          <a:p>
+            <a:pPr algn="ctr"/>
+          </a:p>
+        </p:txBody>
+      </p:sp>
+      <p:sp>
+        <p:nvSpPr>
+          <p:cNvPr id="20" name="Rectangle 19"/>
+          <p:cNvSpPr/>
+          <p:nvPr/>
+        </p:nvSpPr>
+        <p:spPr>
+          <a:xfrm>
+            <a:off x="502920" y="5632704"/>
+            <a:ext cx="38100" cy="713232"/>
+          </a:xfrm>
+          <a:prstGeom prst="rect">
+            <a:avLst/>
+          </a:prstGeom>
+          <a:solidFill>
+            <a:srgbClr val="2563EB"/>
+          </a:solidFill>
+          <a:ln>
+            <a:noFill/>
+          </a:ln>
+          <a:effectLst/>
+        </p:spPr>
+        <p:style>
+          <a:lnRef idx="1">
+            <a:schemeClr val="accent1"/>
+          </a:lnRef>
+          <a:fillRef idx="3">
+            <a:schemeClr val="accent1"/>
+          </a:fillRef>
+          <a:effectRef idx="2">
+            <a:schemeClr val="accent1"/>
+          </a:effectRef>
+          <a:fontRef idx="minor">
+            <a:schemeClr val="lt1"/>
+          </a:fontRef>
+        </p:style>
+        <p:txBody>
+          <a:bodyPr rtlCol="0" anchor="ctr"/>
+          <a:lstStyle/>
+          <a:p>
+            <a:pPr algn="ctr"/>
+          </a:p>
+        </p:txBody>
+      </p:sp>
+      <p:sp>
+        <p:nvSpPr>
+          <p:cNvPr id="21" name="TextBox 20"/>
+          <p:cNvSpPr txBox="1"/>
+          <p:nvPr/>
+        </p:nvSpPr>
+        <p:spPr>
+          <a:xfrm>
+            <a:off x="777240" y="5724144"/>
+            <a:ext cx="10698480" cy="548640"/>
+          </a:xfrm>
+          <a:prstGeom prst="rect">
+            <a:avLst/>
+          </a:prstGeom>
+          <a:noFill/>
+        </p:spPr>
+        <p:txBody>
+          <a:bodyPr wrap="square" lIns="0" rIns="0" tIns="0" bIns="0" anchor="ctr">
+            <a:spAutoFit/>
+          </a:bodyPr>
+          <a:lstStyle/>
+          <a:p>
+            <a:pPr algn="l">
+              <a:spcAft>
+                <a:spcPts val="0"/>
+              </a:spcAft>
+            </a:pPr>
+            <a:r>
+              <a:rPr sz="1200" b="1" i="0">
+                <a:solidFill>
+                  <a:srgbClr val="FFFFFF"/>
+                </a:solidFill>
+                <a:latin typeface="Yu Gothic"/>
+                <a:ea typeface="Yu Gothic"/>
+                <a:cs typeface="Yu Gothic"/>
+              </a:rPr>
+              <a:t>改革の主役は部長と現場です。私は詰まりを外す役に徹し、会長には「最後の判断」だけをお願いします</a:t>
+            </a:r>
+          </a:p>
+        </p:txBody>
+      </p:sp>
+      <p:sp>
+        <p:nvSpPr>
+          <p:cNvPr id="22" name="Rectangle 21"/>
+          <p:cNvSpPr/>
+          <p:nvPr/>
+        </p:nvSpPr>
+        <p:spPr>
+          <a:xfrm>
+            <a:off x="502920" y="6510528"/>
+            <a:ext cx="11183112" cy="15240"/>
+          </a:xfrm>
+          <a:prstGeom prst="rect">
+            <a:avLst/>
+          </a:prstGeom>
+          <a:solidFill>
+            <a:srgbClr val="E5E7EB"/>
+          </a:solidFill>
+          <a:ln>
+            <a:noFill/>
+          </a:ln>
+          <a:effectLst/>
+        </p:spPr>
+        <p:style>
+          <a:lnRef idx="1">
+            <a:schemeClr val="accent1"/>
+          </a:lnRef>
+          <a:fillRef idx="3">
+            <a:schemeClr val="accent1"/>
+          </a:fillRef>
+          <a:effectRef idx="2">
+            <a:schemeClr val="accent1"/>
+          </a:effectRef>
+          <a:fontRef idx="minor">
+            <a:schemeClr val="lt1"/>
+          </a:fontRef>
+        </p:style>
+        <p:txBody>
+          <a:bodyPr rtlCol="0" anchor="ctr"/>
+          <a:lstStyle/>
+          <a:p>
+            <a:pPr algn="ctr"/>
+          </a:p>
+        </p:txBody>
+      </p:sp>
+      <p:sp>
+        <p:nvSpPr>
+          <p:cNvPr id="23" name="TextBox 22"/>
+          <p:cNvSpPr txBox="1"/>
+          <p:nvPr/>
+        </p:nvSpPr>
+        <p:spPr>
+          <a:xfrm>
+            <a:off x="502920" y="6565392"/>
+            <a:ext cx="8686800" cy="274320"/>
           </a:xfrm>
           <a:prstGeom prst="rect">
             <a:avLst/>
@@ -8906,912 +10332,9 @@
               </a:spcAft>
             </a:pPr>
             <a:r>
-              <a:rPr sz="1000" b="1" i="0">
-                <a:solidFill>
-                  <a:srgbClr val="7823DC"/>
-                </a:solidFill>
-                <a:latin typeface="Yu Gothic"/>
-                <a:ea typeface="Yu Gothic"/>
-                <a:cs typeface="Yu Gothic"/>
-              </a:rPr>
-              <a:t>NEXT STEPS</a:t>
-            </a:r>
-          </a:p>
-        </p:txBody>
-      </p:sp>
-      <p:sp>
-        <p:nvSpPr>
-          <p:cNvPr id="3" name="TextBox 2"/>
-          <p:cNvSpPr txBox="1"/>
-          <p:nvPr/>
-        </p:nvSpPr>
-        <p:spPr>
-          <a:xfrm>
-            <a:off x="502920" y="512064"/>
-            <a:ext cx="11155680" cy="868680"/>
-          </a:xfrm>
-          <a:prstGeom prst="rect">
-            <a:avLst/>
-          </a:prstGeom>
-          <a:noFill/>
-        </p:spPr>
-        <p:txBody>
-          <a:bodyPr wrap="square" lIns="0" rIns="0" tIns="0" bIns="0">
-            <a:spAutoFit/>
-          </a:bodyPr>
-          <a:lstStyle/>
-          <a:p>
-            <a:pPr algn="l">
-              <a:spcAft>
-                <a:spcPts val="0"/>
-              </a:spcAft>
-            </a:pPr>
-            <a:r>
-              <a:rPr sz="1900" b="1" i="0">
-                <a:solidFill>
-                  <a:srgbClr val="262630"/>
-                </a:solidFill>
-                <a:latin typeface="Yu Gothic"/>
-                <a:ea typeface="Yu Gothic"/>
-                <a:cs typeface="Yu Gothic"/>
-              </a:rPr>
-              <a:t>次のステップ</a:t>
-            </a:r>
-          </a:p>
-        </p:txBody>
-      </p:sp>
-      <p:sp>
-        <p:nvSpPr>
-          <p:cNvPr id="4" name="Rectangle 3"/>
-          <p:cNvSpPr/>
-          <p:nvPr/>
-        </p:nvSpPr>
-        <p:spPr>
-          <a:xfrm>
-            <a:off x="502920" y="1389888"/>
-            <a:ext cx="1463040" cy="33020"/>
-          </a:xfrm>
-          <a:prstGeom prst="rect">
-            <a:avLst/>
-          </a:prstGeom>
-          <a:solidFill>
-            <a:srgbClr val="7823DC"/>
-          </a:solidFill>
-          <a:ln>
-            <a:noFill/>
-          </a:ln>
-          <a:effectLst/>
-        </p:spPr>
-        <p:style>
-          <a:lnRef idx="1">
-            <a:schemeClr val="accent1"/>
-          </a:lnRef>
-          <a:fillRef idx="3">
-            <a:schemeClr val="accent1"/>
-          </a:fillRef>
-          <a:effectRef idx="2">
-            <a:schemeClr val="accent1"/>
-          </a:effectRef>
-          <a:fontRef idx="minor">
-            <a:schemeClr val="lt1"/>
-          </a:fontRef>
-        </p:style>
-        <p:txBody>
-          <a:bodyPr rtlCol="0" anchor="ctr"/>
-          <a:lstStyle/>
-          <a:p>
-            <a:pPr algn="ctr"/>
-          </a:p>
-        </p:txBody>
-      </p:sp>
-      <p:sp>
-        <p:nvSpPr>
-          <p:cNvPr id="5" name="Rectangle 4"/>
-          <p:cNvSpPr/>
-          <p:nvPr/>
-        </p:nvSpPr>
-        <p:spPr>
-          <a:xfrm>
-            <a:off x="502920" y="2212848"/>
-            <a:ext cx="11183112" cy="859536"/>
-          </a:xfrm>
-          <a:prstGeom prst="rect">
-            <a:avLst/>
-          </a:prstGeom>
-          <a:solidFill>
-            <a:srgbClr val="FFFFFF"/>
-          </a:solidFill>
-          <a:ln w="9525">
-            <a:solidFill>
-              <a:srgbClr val="D9D9E0"/>
-            </a:solidFill>
-          </a:ln>
-          <a:effectLst/>
-        </p:spPr>
-        <p:style>
-          <a:lnRef idx="1">
-            <a:schemeClr val="accent1"/>
-          </a:lnRef>
-          <a:fillRef idx="3">
-            <a:schemeClr val="accent1"/>
-          </a:fillRef>
-          <a:effectRef idx="2">
-            <a:schemeClr val="accent1"/>
-          </a:effectRef>
-          <a:fontRef idx="minor">
-            <a:schemeClr val="lt1"/>
-          </a:fontRef>
-        </p:style>
-        <p:txBody>
-          <a:bodyPr rtlCol="0" anchor="ctr"/>
-          <a:lstStyle/>
-          <a:p>
-            <a:pPr algn="ctr"/>
-          </a:p>
-        </p:txBody>
-      </p:sp>
-      <p:sp>
-        <p:nvSpPr>
-          <p:cNvPr id="6" name="Rectangle 5"/>
-          <p:cNvSpPr/>
-          <p:nvPr/>
-        </p:nvSpPr>
-        <p:spPr>
-          <a:xfrm>
-            <a:off x="502920" y="2212848"/>
-            <a:ext cx="2468880" cy="859536"/>
-          </a:xfrm>
-          <a:prstGeom prst="rect">
-            <a:avLst/>
-          </a:prstGeom>
-          <a:solidFill>
-            <a:srgbClr val="7823DC"/>
-          </a:solidFill>
-          <a:ln>
-            <a:noFill/>
-          </a:ln>
-          <a:effectLst/>
-        </p:spPr>
-        <p:style>
-          <a:lnRef idx="1">
-            <a:schemeClr val="accent1"/>
-          </a:lnRef>
-          <a:fillRef idx="3">
-            <a:schemeClr val="accent1"/>
-          </a:fillRef>
-          <a:effectRef idx="2">
-            <a:schemeClr val="accent1"/>
-          </a:effectRef>
-          <a:fontRef idx="minor">
-            <a:schemeClr val="lt1"/>
-          </a:fontRef>
-        </p:style>
-        <p:txBody>
-          <a:bodyPr rtlCol="0" anchor="ctr"/>
-          <a:lstStyle/>
-          <a:p>
-            <a:pPr algn="ctr"/>
-          </a:p>
-        </p:txBody>
-      </p:sp>
-      <p:sp>
-        <p:nvSpPr>
-          <p:cNvPr id="7" name="TextBox 6"/>
-          <p:cNvSpPr txBox="1"/>
-          <p:nvPr/>
-        </p:nvSpPr>
-        <p:spPr>
-          <a:xfrm>
-            <a:off x="667512" y="2267712"/>
-            <a:ext cx="2194560" cy="749808"/>
-          </a:xfrm>
-          <a:prstGeom prst="rect">
-            <a:avLst/>
-          </a:prstGeom>
-          <a:noFill/>
-        </p:spPr>
-        <p:txBody>
-          <a:bodyPr wrap="square" lIns="0" rIns="0" tIns="0" bIns="0" anchor="ctr">
-            <a:spAutoFit/>
-          </a:bodyPr>
-          <a:lstStyle/>
-          <a:p>
-            <a:pPr algn="ctr">
-              <a:spcAft>
-                <a:spcPts val="0"/>
-              </a:spcAft>
-            </a:pPr>
-            <a:r>
-              <a:rPr sz="1400" b="1" i="0">
-                <a:solidFill>
-                  <a:srgbClr val="FFFFFF"/>
-                </a:solidFill>
-                <a:latin typeface="Yu Gothic"/>
-                <a:ea typeface="Yu Gothic"/>
-                <a:cs typeface="Yu Gothic"/>
-              </a:rPr>
-              <a:t>本日</a:t>
-            </a:r>
-          </a:p>
-        </p:txBody>
-      </p:sp>
-      <p:sp>
-        <p:nvSpPr>
-          <p:cNvPr id="8" name="TextBox 7"/>
-          <p:cNvSpPr txBox="1"/>
-          <p:nvPr/>
-        </p:nvSpPr>
-        <p:spPr>
-          <a:xfrm>
-            <a:off x="3227832" y="2267712"/>
-            <a:ext cx="8257032" cy="749808"/>
-          </a:xfrm>
-          <a:prstGeom prst="rect">
-            <a:avLst/>
-          </a:prstGeom>
-          <a:noFill/>
-        </p:spPr>
-        <p:txBody>
-          <a:bodyPr wrap="square" lIns="0" rIns="0" tIns="0" bIns="0" anchor="ctr">
-            <a:spAutoFit/>
-          </a:bodyPr>
-          <a:lstStyle/>
-          <a:p>
-            <a:pPr algn="l">
-              <a:spcAft>
-                <a:spcPts val="0"/>
-              </a:spcAft>
-            </a:pPr>
-            <a:r>
-              <a:rPr sz="1200" b="1" i="0">
-                <a:solidFill>
-                  <a:srgbClr val="262630"/>
-                </a:solidFill>
-                <a:latin typeface="Yu Gothic"/>
-                <a:ea typeface="Yu Gothic"/>
-                <a:cs typeface="Yu Gothic"/>
-              </a:rPr>
-              <a:t>設計と論点のご意見をいただく</a:t>
-            </a:r>
-          </a:p>
-        </p:txBody>
-      </p:sp>
-      <p:sp>
-        <p:nvSpPr>
-          <p:cNvPr id="9" name="Up Arrow 8"/>
-          <p:cNvSpPr/>
-          <p:nvPr/>
-        </p:nvSpPr>
-        <p:spPr>
-          <a:xfrm>
-            <a:off x="5852160" y="3054096"/>
-            <a:ext cx="384048" cy="237744"/>
-          </a:xfrm>
-          <a:prstGeom prst="upArrow">
-            <a:avLst/>
-          </a:prstGeom>
-          <a:solidFill>
-            <a:srgbClr val="7823DC"/>
-          </a:solidFill>
-          <a:ln>
-            <a:noFill/>
-          </a:ln>
-          <a:effectLst/>
-        </p:spPr>
-        <p:style>
-          <a:lnRef idx="1">
-            <a:schemeClr val="accent1"/>
-          </a:lnRef>
-          <a:fillRef idx="3">
-            <a:schemeClr val="accent1"/>
-          </a:fillRef>
-          <a:effectRef idx="2">
-            <a:schemeClr val="accent1"/>
-          </a:effectRef>
-          <a:fontRef idx="minor">
-            <a:schemeClr val="lt1"/>
-          </a:fontRef>
-        </p:style>
-        <p:txBody>
-          <a:bodyPr rtlCol="0" anchor="ctr"/>
-          <a:lstStyle/>
-          <a:p>
-            <a:pPr algn="ctr"/>
-          </a:p>
-        </p:txBody>
-      </p:sp>
-      <p:sp>
-        <p:nvSpPr>
-          <p:cNvPr id="10" name="Rectangle 9"/>
-          <p:cNvSpPr/>
-          <p:nvPr/>
-        </p:nvSpPr>
-        <p:spPr>
-          <a:xfrm>
-            <a:off x="502920" y="3310128"/>
-            <a:ext cx="11183112" cy="859536"/>
-          </a:xfrm>
-          <a:prstGeom prst="rect">
-            <a:avLst/>
-          </a:prstGeom>
-          <a:solidFill>
-            <a:srgbClr val="FFFFFF"/>
-          </a:solidFill>
-          <a:ln w="9525">
-            <a:solidFill>
-              <a:srgbClr val="D9D9E0"/>
-            </a:solidFill>
-          </a:ln>
-          <a:effectLst/>
-        </p:spPr>
-        <p:style>
-          <a:lnRef idx="1">
-            <a:schemeClr val="accent1"/>
-          </a:lnRef>
-          <a:fillRef idx="3">
-            <a:schemeClr val="accent1"/>
-          </a:fillRef>
-          <a:effectRef idx="2">
-            <a:schemeClr val="accent1"/>
-          </a:effectRef>
-          <a:fontRef idx="minor">
-            <a:schemeClr val="lt1"/>
-          </a:fontRef>
-        </p:style>
-        <p:txBody>
-          <a:bodyPr rtlCol="0" anchor="ctr"/>
-          <a:lstStyle/>
-          <a:p>
-            <a:pPr algn="ctr"/>
-          </a:p>
-        </p:txBody>
-      </p:sp>
-      <p:sp>
-        <p:nvSpPr>
-          <p:cNvPr id="11" name="Rectangle 10"/>
-          <p:cNvSpPr/>
-          <p:nvPr/>
-        </p:nvSpPr>
-        <p:spPr>
-          <a:xfrm>
-            <a:off x="502920" y="3310128"/>
-            <a:ext cx="2468880" cy="859536"/>
-          </a:xfrm>
-          <a:prstGeom prst="rect">
-            <a:avLst/>
-          </a:prstGeom>
-          <a:solidFill>
-            <a:srgbClr val="7823DC"/>
-          </a:solidFill>
-          <a:ln>
-            <a:noFill/>
-          </a:ln>
-          <a:effectLst/>
-        </p:spPr>
-        <p:style>
-          <a:lnRef idx="1">
-            <a:schemeClr val="accent1"/>
-          </a:lnRef>
-          <a:fillRef idx="3">
-            <a:schemeClr val="accent1"/>
-          </a:fillRef>
-          <a:effectRef idx="2">
-            <a:schemeClr val="accent1"/>
-          </a:effectRef>
-          <a:fontRef idx="minor">
-            <a:schemeClr val="lt1"/>
-          </a:fontRef>
-        </p:style>
-        <p:txBody>
-          <a:bodyPr rtlCol="0" anchor="ctr"/>
-          <a:lstStyle/>
-          <a:p>
-            <a:pPr algn="ctr"/>
-          </a:p>
-        </p:txBody>
-      </p:sp>
-      <p:sp>
-        <p:nvSpPr>
-          <p:cNvPr id="12" name="TextBox 11"/>
-          <p:cNvSpPr txBox="1"/>
-          <p:nvPr/>
-        </p:nvSpPr>
-        <p:spPr>
-          <a:xfrm>
-            <a:off x="667512" y="3364992"/>
-            <a:ext cx="2194560" cy="749808"/>
-          </a:xfrm>
-          <a:prstGeom prst="rect">
-            <a:avLst/>
-          </a:prstGeom>
-          <a:noFill/>
-        </p:spPr>
-        <p:txBody>
-          <a:bodyPr wrap="square" lIns="0" rIns="0" tIns="0" bIns="0" anchor="ctr">
-            <a:spAutoFit/>
-          </a:bodyPr>
-          <a:lstStyle/>
-          <a:p>
-            <a:pPr algn="ctr">
-              <a:spcAft>
-                <a:spcPts val="0"/>
-              </a:spcAft>
-            </a:pPr>
-            <a:r>
-              <a:rPr sz="1400" b="1" i="0">
-                <a:solidFill>
-                  <a:srgbClr val="FFFFFF"/>
-                </a:solidFill>
-                <a:latin typeface="Yu Gothic"/>
-                <a:ea typeface="Yu Gothic"/>
-                <a:cs typeface="Yu Gothic"/>
-              </a:rPr>
-              <a:t>今週中</a:t>
-            </a:r>
-          </a:p>
-        </p:txBody>
-      </p:sp>
-      <p:sp>
-        <p:nvSpPr>
-          <p:cNvPr id="13" name="TextBox 12"/>
-          <p:cNvSpPr txBox="1"/>
-          <p:nvPr/>
-        </p:nvSpPr>
-        <p:spPr>
-          <a:xfrm>
-            <a:off x="3227832" y="3364992"/>
-            <a:ext cx="8257032" cy="749808"/>
-          </a:xfrm>
-          <a:prstGeom prst="rect">
-            <a:avLst/>
-          </a:prstGeom>
-          <a:noFill/>
-        </p:spPr>
-        <p:txBody>
-          <a:bodyPr wrap="square" lIns="0" rIns="0" tIns="0" bIns="0" anchor="ctr">
-            <a:spAutoFit/>
-          </a:bodyPr>
-          <a:lstStyle/>
-          <a:p>
-            <a:pPr algn="l">
-              <a:spcAft>
-                <a:spcPts val="0"/>
-              </a:spcAft>
-            </a:pPr>
-            <a:r>
-              <a:rPr sz="1200" b="1" i="0">
-                <a:solidFill>
-                  <a:srgbClr val="262630"/>
-                </a:solidFill>
-                <a:latin typeface="Yu Gothic"/>
-                <a:ea typeface="Yu Gothic"/>
-                <a:cs typeface="Yu Gothic"/>
-              </a:rPr>
-              <a:t>ご意見を反映し初回アジェンダ確定（事務局）</a:t>
-            </a:r>
-          </a:p>
-        </p:txBody>
-      </p:sp>
-      <p:sp>
-        <p:nvSpPr>
-          <p:cNvPr id="14" name="Up Arrow 13"/>
-          <p:cNvSpPr/>
-          <p:nvPr/>
-        </p:nvSpPr>
-        <p:spPr>
-          <a:xfrm>
-            <a:off x="5852160" y="4151376"/>
-            <a:ext cx="384048" cy="237744"/>
-          </a:xfrm>
-          <a:prstGeom prst="upArrow">
-            <a:avLst/>
-          </a:prstGeom>
-          <a:solidFill>
-            <a:srgbClr val="7823DC"/>
-          </a:solidFill>
-          <a:ln>
-            <a:noFill/>
-          </a:ln>
-          <a:effectLst/>
-        </p:spPr>
-        <p:style>
-          <a:lnRef idx="1">
-            <a:schemeClr val="accent1"/>
-          </a:lnRef>
-          <a:fillRef idx="3">
-            <a:schemeClr val="accent1"/>
-          </a:fillRef>
-          <a:effectRef idx="2">
-            <a:schemeClr val="accent1"/>
-          </a:effectRef>
-          <a:fontRef idx="minor">
-            <a:schemeClr val="lt1"/>
-          </a:fontRef>
-        </p:style>
-        <p:txBody>
-          <a:bodyPr rtlCol="0" anchor="ctr"/>
-          <a:lstStyle/>
-          <a:p>
-            <a:pPr algn="ctr"/>
-          </a:p>
-        </p:txBody>
-      </p:sp>
-      <p:sp>
-        <p:nvSpPr>
-          <p:cNvPr id="15" name="Rectangle 14"/>
-          <p:cNvSpPr/>
-          <p:nvPr/>
-        </p:nvSpPr>
-        <p:spPr>
-          <a:xfrm>
-            <a:off x="502920" y="4407408"/>
-            <a:ext cx="11183112" cy="859536"/>
-          </a:xfrm>
-          <a:prstGeom prst="rect">
-            <a:avLst/>
-          </a:prstGeom>
-          <a:solidFill>
-            <a:srgbClr val="FFFFFF"/>
-          </a:solidFill>
-          <a:ln w="9525">
-            <a:solidFill>
-              <a:srgbClr val="D9D9E0"/>
-            </a:solidFill>
-          </a:ln>
-          <a:effectLst/>
-        </p:spPr>
-        <p:style>
-          <a:lnRef idx="1">
-            <a:schemeClr val="accent1"/>
-          </a:lnRef>
-          <a:fillRef idx="3">
-            <a:schemeClr val="accent1"/>
-          </a:fillRef>
-          <a:effectRef idx="2">
-            <a:schemeClr val="accent1"/>
-          </a:effectRef>
-          <a:fontRef idx="minor">
-            <a:schemeClr val="lt1"/>
-          </a:fontRef>
-        </p:style>
-        <p:txBody>
-          <a:bodyPr rtlCol="0" anchor="ctr"/>
-          <a:lstStyle/>
-          <a:p>
-            <a:pPr algn="ctr"/>
-          </a:p>
-        </p:txBody>
-      </p:sp>
-      <p:sp>
-        <p:nvSpPr>
-          <p:cNvPr id="16" name="Rectangle 15"/>
-          <p:cNvSpPr/>
-          <p:nvPr/>
-        </p:nvSpPr>
-        <p:spPr>
-          <a:xfrm>
-            <a:off x="502920" y="4407408"/>
-            <a:ext cx="2468880" cy="859536"/>
-          </a:xfrm>
-          <a:prstGeom prst="rect">
-            <a:avLst/>
-          </a:prstGeom>
-          <a:solidFill>
-            <a:srgbClr val="3A106E"/>
-          </a:solidFill>
-          <a:ln>
-            <a:noFill/>
-          </a:ln>
-          <a:effectLst/>
-        </p:spPr>
-        <p:style>
-          <a:lnRef idx="1">
-            <a:schemeClr val="accent1"/>
-          </a:lnRef>
-          <a:fillRef idx="3">
-            <a:schemeClr val="accent1"/>
-          </a:fillRef>
-          <a:effectRef idx="2">
-            <a:schemeClr val="accent1"/>
-          </a:effectRef>
-          <a:fontRef idx="minor">
-            <a:schemeClr val="lt1"/>
-          </a:fontRef>
-        </p:style>
-        <p:txBody>
-          <a:bodyPr rtlCol="0" anchor="ctr"/>
-          <a:lstStyle/>
-          <a:p>
-            <a:pPr algn="ctr"/>
-          </a:p>
-        </p:txBody>
-      </p:sp>
-      <p:sp>
-        <p:nvSpPr>
-          <p:cNvPr id="17" name="TextBox 16"/>
-          <p:cNvSpPr txBox="1"/>
-          <p:nvPr/>
-        </p:nvSpPr>
-        <p:spPr>
-          <a:xfrm>
-            <a:off x="667512" y="4462272"/>
-            <a:ext cx="2194560" cy="749808"/>
-          </a:xfrm>
-          <a:prstGeom prst="rect">
-            <a:avLst/>
-          </a:prstGeom>
-          <a:noFill/>
-        </p:spPr>
-        <p:txBody>
-          <a:bodyPr wrap="square" lIns="0" rIns="0" tIns="0" bIns="0" anchor="ctr">
-            <a:spAutoFit/>
-          </a:bodyPr>
-          <a:lstStyle/>
-          <a:p>
-            <a:pPr algn="ctr">
-              <a:spcAft>
-                <a:spcPts val="0"/>
-              </a:spcAft>
-            </a:pPr>
-            <a:r>
-              <a:rPr sz="1400" b="1" i="0">
-                <a:solidFill>
-                  <a:srgbClr val="FFFFFF"/>
-                </a:solidFill>
-                <a:latin typeface="Yu Gothic"/>
-                <a:ea typeface="Yu Gothic"/>
-                <a:cs typeface="Yu Gothic"/>
-              </a:rPr>
-              <a:t>初回点検会議</a:t>
-            </a:r>
-          </a:p>
-        </p:txBody>
-      </p:sp>
-      <p:sp>
-        <p:nvSpPr>
-          <p:cNvPr id="18" name="TextBox 17"/>
-          <p:cNvSpPr txBox="1"/>
-          <p:nvPr/>
-        </p:nvSpPr>
-        <p:spPr>
-          <a:xfrm>
-            <a:off x="3227832" y="4462272"/>
-            <a:ext cx="8257032" cy="749808"/>
-          </a:xfrm>
-          <a:prstGeom prst="rect">
-            <a:avLst/>
-          </a:prstGeom>
-          <a:noFill/>
-        </p:spPr>
-        <p:txBody>
-          <a:bodyPr wrap="square" lIns="0" rIns="0" tIns="0" bIns="0" anchor="ctr">
-            <a:spAutoFit/>
-          </a:bodyPr>
-          <a:lstStyle/>
-          <a:p>
-            <a:pPr algn="l">
-              <a:spcAft>
-                <a:spcPts val="0"/>
-              </a:spcAft>
-            </a:pPr>
-            <a:r>
-              <a:rPr sz="1200" b="1" i="0">
-                <a:solidFill>
-                  <a:srgbClr val="262630"/>
-                </a:solidFill>
-                <a:latin typeface="Yu Gothic"/>
-                <a:ea typeface="Yu Gothic"/>
-                <a:cs typeface="Yu Gothic"/>
-              </a:rPr>
-              <a:t>キーチャート5枚でご判断を仰ぐ（日程は秘書室と調整）</a:t>
-            </a:r>
-          </a:p>
-        </p:txBody>
-      </p:sp>
-      <p:sp>
-        <p:nvSpPr>
-          <p:cNvPr id="19" name="Rectangle 18"/>
-          <p:cNvSpPr/>
-          <p:nvPr/>
-        </p:nvSpPr>
-        <p:spPr>
-          <a:xfrm>
-            <a:off x="502920" y="5632704"/>
-            <a:ext cx="11183112" cy="713232"/>
-          </a:xfrm>
-          <a:prstGeom prst="rect">
-            <a:avLst/>
-          </a:prstGeom>
-          <a:solidFill>
-            <a:srgbClr val="3A106E"/>
-          </a:solidFill>
-          <a:ln>
-            <a:noFill/>
-          </a:ln>
-          <a:effectLst/>
-        </p:spPr>
-        <p:style>
-          <a:lnRef idx="1">
-            <a:schemeClr val="accent1"/>
-          </a:lnRef>
-          <a:fillRef idx="3">
-            <a:schemeClr val="accent1"/>
-          </a:fillRef>
-          <a:effectRef idx="2">
-            <a:schemeClr val="accent1"/>
-          </a:effectRef>
-          <a:fontRef idx="minor">
-            <a:schemeClr val="lt1"/>
-          </a:fontRef>
-        </p:style>
-        <p:txBody>
-          <a:bodyPr rtlCol="0" anchor="ctr"/>
-          <a:lstStyle/>
-          <a:p>
-            <a:pPr algn="ctr"/>
-          </a:p>
-        </p:txBody>
-      </p:sp>
-      <p:sp>
-        <p:nvSpPr>
-          <p:cNvPr id="20" name="Rectangle 19"/>
-          <p:cNvSpPr/>
-          <p:nvPr/>
-        </p:nvSpPr>
-        <p:spPr>
-          <a:xfrm>
-            <a:off x="502920" y="5632704"/>
-            <a:ext cx="38100" cy="713232"/>
-          </a:xfrm>
-          <a:prstGeom prst="rect">
-            <a:avLst/>
-          </a:prstGeom>
-          <a:solidFill>
-            <a:srgbClr val="7823DC"/>
-          </a:solidFill>
-          <a:ln>
-            <a:noFill/>
-          </a:ln>
-          <a:effectLst/>
-        </p:spPr>
-        <p:style>
-          <a:lnRef idx="1">
-            <a:schemeClr val="accent1"/>
-          </a:lnRef>
-          <a:fillRef idx="3">
-            <a:schemeClr val="accent1"/>
-          </a:fillRef>
-          <a:effectRef idx="2">
-            <a:schemeClr val="accent1"/>
-          </a:effectRef>
-          <a:fontRef idx="minor">
-            <a:schemeClr val="lt1"/>
-          </a:fontRef>
-        </p:style>
-        <p:txBody>
-          <a:bodyPr rtlCol="0" anchor="ctr"/>
-          <a:lstStyle/>
-          <a:p>
-            <a:pPr algn="ctr"/>
-          </a:p>
-        </p:txBody>
-      </p:sp>
-      <p:sp>
-        <p:nvSpPr>
-          <p:cNvPr id="21" name="TextBox 20"/>
-          <p:cNvSpPr txBox="1"/>
-          <p:nvPr/>
-        </p:nvSpPr>
-        <p:spPr>
-          <a:xfrm>
-            <a:off x="777240" y="5724144"/>
-            <a:ext cx="10698480" cy="548640"/>
-          </a:xfrm>
-          <a:prstGeom prst="rect">
-            <a:avLst/>
-          </a:prstGeom>
-          <a:noFill/>
-        </p:spPr>
-        <p:txBody>
-          <a:bodyPr wrap="square" lIns="0" rIns="0" tIns="0" bIns="0" anchor="ctr">
-            <a:spAutoFit/>
-          </a:bodyPr>
-          <a:lstStyle/>
-          <a:p>
-            <a:pPr algn="l">
-              <a:spcAft>
-                <a:spcPts val="0"/>
-              </a:spcAft>
-            </a:pPr>
-            <a:r>
-              <a:rPr sz="1200" b="1" i="0">
-                <a:solidFill>
-                  <a:srgbClr val="FFFFFF"/>
-                </a:solidFill>
-                <a:latin typeface="Yu Gothic"/>
-                <a:ea typeface="Yu Gothic"/>
-                <a:cs typeface="Yu Gothic"/>
-              </a:rPr>
-              <a:t>改革の主役は部長と現場です。私は詰まりを外す役に徹し、会長には「最後の判断」だけをお願いします</a:t>
-            </a:r>
-          </a:p>
-        </p:txBody>
-      </p:sp>
-      <p:sp>
-        <p:nvSpPr>
-          <p:cNvPr id="22" name="Rectangle 21"/>
-          <p:cNvSpPr/>
-          <p:nvPr/>
-        </p:nvSpPr>
-        <p:spPr>
-          <a:xfrm>
-            <a:off x="502920" y="6510528"/>
-            <a:ext cx="11183112" cy="15240"/>
-          </a:xfrm>
-          <a:prstGeom prst="rect">
-            <a:avLst/>
-          </a:prstGeom>
-          <a:solidFill>
-            <a:srgbClr val="D9D9E0"/>
-          </a:solidFill>
-          <a:ln>
-            <a:noFill/>
-          </a:ln>
-          <a:effectLst/>
-        </p:spPr>
-        <p:style>
-          <a:lnRef idx="1">
-            <a:schemeClr val="accent1"/>
-          </a:lnRef>
-          <a:fillRef idx="3">
-            <a:schemeClr val="accent1"/>
-          </a:fillRef>
-          <a:effectRef idx="2">
-            <a:schemeClr val="accent1"/>
-          </a:effectRef>
-          <a:fontRef idx="minor">
-            <a:schemeClr val="lt1"/>
-          </a:fontRef>
-        </p:style>
-        <p:txBody>
-          <a:bodyPr rtlCol="0" anchor="ctr"/>
-          <a:lstStyle/>
-          <a:p>
-            <a:pPr algn="ctr"/>
-          </a:p>
-        </p:txBody>
-      </p:sp>
-      <p:sp>
-        <p:nvSpPr>
-          <p:cNvPr id="23" name="TextBox 22"/>
-          <p:cNvSpPr txBox="1"/>
-          <p:nvPr/>
-        </p:nvSpPr>
-        <p:spPr>
-          <a:xfrm>
-            <a:off x="502920" y="6565392"/>
-            <a:ext cx="8686800" cy="274320"/>
-          </a:xfrm>
-          <a:prstGeom prst="rect">
-            <a:avLst/>
-          </a:prstGeom>
-          <a:noFill/>
-        </p:spPr>
-        <p:txBody>
-          <a:bodyPr wrap="square" lIns="0" rIns="0" tIns="0" bIns="0">
-            <a:spAutoFit/>
-          </a:bodyPr>
-          <a:lstStyle/>
-          <a:p>
-            <a:pPr algn="l">
-              <a:spcAft>
-                <a:spcPts val="400"/>
-              </a:spcAft>
-            </a:pPr>
-            <a:r>
               <a:rPr sz="750" b="0" i="0">
                 <a:solidFill>
-                  <a:srgbClr val="8A8A99"/>
+                  <a:srgbClr val="8A8F9C"/>
                 </a:solidFill>
                 <a:latin typeface="Yu Gothic"/>
                 <a:ea typeface="Yu Gothic"/>
@@ -9852,7 +10375,7 @@
             <a:r>
               <a:rPr sz="900" b="0" i="0">
                 <a:solidFill>
-                  <a:srgbClr val="5F5F6E"/>
+                  <a:srgbClr val="6B7280"/>
                 </a:solidFill>
                 <a:latin typeface="Yu Gothic"/>
                 <a:ea typeface="Yu Gothic"/>
